--- a/slides/PV_ltl.pptx
+++ b/slides/PV_ltl.pptx
@@ -789,7 +789,7 @@
       </p:grpSpPr>
       <p:sp>
         <p:nvSpPr>
-          <p:cNvPr id="78850" name="Tijdelijke aanduiding voor dia-afbeelding 1"/>
+          <p:cNvPr id="73730" name="Tijdelijke aanduiding voor dia-afbeelding 1"/>
           <p:cNvSpPr>
             <a:spLocks noGrp="1" noRot="1" noChangeAspect="1" noTextEdit="1"/>
           </p:cNvSpPr>
@@ -803,7 +803,7 @@
       </p:sp>
       <p:sp>
         <p:nvSpPr>
-          <p:cNvPr id="78851" name="Tijdelijke aanduiding voor notities 2"/>
+          <p:cNvPr id="73731" name="Tijdelijke aanduiding voor notities 2"/>
           <p:cNvSpPr>
             <a:spLocks noGrp="1"/>
           </p:cNvSpPr>
@@ -819,14 +819,13 @@
           <a:bodyPr/>
           <a:lstStyle/>
           <a:p>
-            <a:pPr lvl="3"/>
             <a:endParaRPr lang="nl-NL"/>
           </a:p>
         </p:txBody>
       </p:sp>
       <p:sp>
         <p:nvSpPr>
-          <p:cNvPr id="78852" name="Tijdelijke aanduiding voor dianummer 3"/>
+          <p:cNvPr id="73732" name="Tijdelijke aanduiding voor dianummer 3"/>
           <p:cNvSpPr>
             <a:spLocks noGrp="1"/>
           </p:cNvSpPr>
@@ -841,10 +840,10 @@
           <a:bodyPr/>
           <a:lstStyle/>
           <a:p>
-            <a:fld id="{A207973D-9A8D-405D-BDB0-672357A4B81A}" type="slidenum">
+            <a:fld id="{0D6AA3CB-8A9D-49CB-91DE-D5685D84EAF4}" type="slidenum">
               <a:rPr lang="en-US" smtClean="0"/>
               <a:pPr/>
-              <a:t>15</a:t>
+              <a:t>14</a:t>
             </a:fld>
             <a:endParaRPr lang="en-US"/>
           </a:p>
@@ -853,7 +852,7 @@
     </p:spTree>
     <p:extLst>
       <p:ext uri="{BB962C8B-B14F-4D97-AF65-F5344CB8AC3E}">
-        <p14:creationId xmlns:p14="http://schemas.microsoft.com/office/powerpoint/2010/main" val="431482267"/>
+        <p14:creationId xmlns:p14="http://schemas.microsoft.com/office/powerpoint/2010/main" val="702785059"/>
       </p:ext>
     </p:extLst>
   </p:cSld>
@@ -882,9 +881,46 @@
       </p:grpSpPr>
       <p:sp>
         <p:nvSpPr>
-          <p:cNvPr id="80898" name="Rectangle 7"/>
+          <p:cNvPr id="78850" name="Tijdelijke aanduiding voor dia-afbeelding 1"/>
           <p:cNvSpPr>
-            <a:spLocks noGrp="1" noChangeArrowheads="1"/>
+            <a:spLocks noGrp="1" noRot="1" noChangeAspect="1" noTextEdit="1"/>
+          </p:cNvSpPr>
+          <p:nvPr>
+            <p:ph type="sldImg"/>
+          </p:nvPr>
+        </p:nvSpPr>
+        <p:spPr>
+          <a:ln/>
+        </p:spPr>
+      </p:sp>
+      <p:sp>
+        <p:nvSpPr>
+          <p:cNvPr id="78851" name="Tijdelijke aanduiding voor notities 2"/>
+          <p:cNvSpPr>
+            <a:spLocks noGrp="1"/>
+          </p:cNvSpPr>
+          <p:nvPr>
+            <p:ph type="body" idx="1"/>
+          </p:nvPr>
+        </p:nvSpPr>
+        <p:spPr>
+          <a:noFill/>
+          <a:ln/>
+        </p:spPr>
+        <p:txBody>
+          <a:bodyPr/>
+          <a:lstStyle/>
+          <a:p>
+            <a:pPr lvl="3"/>
+            <a:endParaRPr lang="nl-NL"/>
+          </a:p>
+        </p:txBody>
+      </p:sp>
+      <p:sp>
+        <p:nvSpPr>
+          <p:cNvPr id="78852" name="Tijdelijke aanduiding voor dianummer 3"/>
+          <p:cNvSpPr>
+            <a:spLocks noGrp="1"/>
           </p:cNvSpPr>
           <p:nvPr>
             <p:ph type="sldNum" sz="quarter" idx="5"/>
@@ -897,56 +933,19 @@
           <a:bodyPr/>
           <a:lstStyle/>
           <a:p>
-            <a:fld id="{2C1A91C0-64C8-4BEA-B5B1-F992256B9E1E}" type="slidenum">
+            <a:fld id="{A207973D-9A8D-405D-BDB0-672357A4B81A}" type="slidenum">
               <a:rPr lang="en-US" smtClean="0"/>
               <a:pPr/>
-              <a:t>16</a:t>
+              <a:t>15</a:t>
             </a:fld>
             <a:endParaRPr lang="en-US"/>
-          </a:p>
-        </p:txBody>
-      </p:sp>
-      <p:sp>
-        <p:nvSpPr>
-          <p:cNvPr id="80899" name="Rectangle 2"/>
-          <p:cNvSpPr>
-            <a:spLocks noGrp="1" noRot="1" noChangeAspect="1" noChangeArrowheads="1" noTextEdit="1"/>
-          </p:cNvSpPr>
-          <p:nvPr>
-            <p:ph type="sldImg"/>
-          </p:nvPr>
-        </p:nvSpPr>
-        <p:spPr>
-          <a:ln/>
-        </p:spPr>
-      </p:sp>
-      <p:sp>
-        <p:nvSpPr>
-          <p:cNvPr id="80900" name="Rectangle 3"/>
-          <p:cNvSpPr>
-            <a:spLocks noGrp="1" noChangeArrowheads="1"/>
-          </p:cNvSpPr>
-          <p:nvPr>
-            <p:ph type="body" idx="1"/>
-          </p:nvPr>
-        </p:nvSpPr>
-        <p:spPr>
-          <a:noFill/>
-          <a:ln/>
-        </p:spPr>
-        <p:txBody>
-          <a:bodyPr/>
-          <a:lstStyle/>
-          <a:p>
-            <a:pPr eaLnBrk="1" hangingPunct="1"/>
-            <a:endParaRPr lang="nl-NL"/>
           </a:p>
         </p:txBody>
       </p:sp>
     </p:spTree>
     <p:extLst>
       <p:ext uri="{BB962C8B-B14F-4D97-AF65-F5344CB8AC3E}">
-        <p14:creationId xmlns:p14="http://schemas.microsoft.com/office/powerpoint/2010/main" val="2017669197"/>
+        <p14:creationId xmlns:p14="http://schemas.microsoft.com/office/powerpoint/2010/main" val="431482267"/>
       </p:ext>
     </p:extLst>
   </p:cSld>
@@ -975,7 +974,7 @@
       </p:grpSpPr>
       <p:sp>
         <p:nvSpPr>
-          <p:cNvPr id="81922" name="Rectangle 7"/>
+          <p:cNvPr id="80898" name="Rectangle 7"/>
           <p:cNvSpPr>
             <a:spLocks noGrp="1" noChangeArrowheads="1"/>
           </p:cNvSpPr>
@@ -990,10 +989,10 @@
           <a:bodyPr/>
           <a:lstStyle/>
           <a:p>
-            <a:fld id="{4CDB0C43-A9C1-45E5-9F7C-5BB7E185D10B}" type="slidenum">
+            <a:fld id="{2C1A91C0-64C8-4BEA-B5B1-F992256B9E1E}" type="slidenum">
               <a:rPr lang="en-US" smtClean="0"/>
               <a:pPr/>
-              <a:t>17</a:t>
+              <a:t>16</a:t>
             </a:fld>
             <a:endParaRPr lang="en-US"/>
           </a:p>
@@ -1001,7 +1000,7 @@
       </p:sp>
       <p:sp>
         <p:nvSpPr>
-          <p:cNvPr id="81923" name="Rectangle 2"/>
+          <p:cNvPr id="80899" name="Rectangle 2"/>
           <p:cNvSpPr>
             <a:spLocks noGrp="1" noRot="1" noChangeAspect="1" noChangeArrowheads="1" noTextEdit="1"/>
           </p:cNvSpPr>
@@ -1015,7 +1014,7 @@
       </p:sp>
       <p:sp>
         <p:nvSpPr>
-          <p:cNvPr id="81924" name="Rectangle 3"/>
+          <p:cNvPr id="80900" name="Rectangle 3"/>
           <p:cNvSpPr>
             <a:spLocks noGrp="1" noChangeArrowheads="1"/>
           </p:cNvSpPr>
@@ -1024,10 +1023,6 @@
           </p:nvPr>
         </p:nvSpPr>
         <p:spPr>
-          <a:xfrm>
-            <a:off x="685800" y="4343400"/>
-            <a:ext cx="5486400" cy="4114800"/>
-          </a:xfrm>
           <a:noFill/>
           <a:ln/>
         </p:spPr>
@@ -1043,7 +1038,7 @@
     </p:spTree>
     <p:extLst>
       <p:ext uri="{BB962C8B-B14F-4D97-AF65-F5344CB8AC3E}">
-        <p14:creationId xmlns:p14="http://schemas.microsoft.com/office/powerpoint/2010/main" val="51924202"/>
+        <p14:creationId xmlns:p14="http://schemas.microsoft.com/office/powerpoint/2010/main" val="2017669197"/>
       </p:ext>
     </p:extLst>
   </p:cSld>
@@ -1072,9 +1067,35 @@
       </p:grpSpPr>
       <p:sp>
         <p:nvSpPr>
-          <p:cNvPr id="82946" name="Slide Image Placeholder 1"/>
+          <p:cNvPr id="81922" name="Rectangle 7"/>
           <p:cNvSpPr>
-            <a:spLocks noGrp="1" noRot="1" noChangeAspect="1" noTextEdit="1"/>
+            <a:spLocks noGrp="1" noChangeArrowheads="1"/>
+          </p:cNvSpPr>
+          <p:nvPr>
+            <p:ph type="sldNum" sz="quarter" idx="5"/>
+          </p:nvPr>
+        </p:nvSpPr>
+        <p:spPr>
+          <a:noFill/>
+        </p:spPr>
+        <p:txBody>
+          <a:bodyPr/>
+          <a:lstStyle/>
+          <a:p>
+            <a:fld id="{4CDB0C43-A9C1-45E5-9F7C-5BB7E185D10B}" type="slidenum">
+              <a:rPr lang="en-US" smtClean="0"/>
+              <a:pPr/>
+              <a:t>17</a:t>
+            </a:fld>
+            <a:endParaRPr lang="en-US"/>
+          </a:p>
+        </p:txBody>
+      </p:sp>
+      <p:sp>
+        <p:nvSpPr>
+          <p:cNvPr id="81923" name="Rectangle 2"/>
+          <p:cNvSpPr>
+            <a:spLocks noGrp="1" noRot="1" noChangeAspect="1" noChangeArrowheads="1" noTextEdit="1"/>
           </p:cNvSpPr>
           <p:nvPr>
             <p:ph type="sldImg"/>
@@ -1086,15 +1107,19 @@
       </p:sp>
       <p:sp>
         <p:nvSpPr>
-          <p:cNvPr id="82947" name="Notes Placeholder 2"/>
+          <p:cNvPr id="81924" name="Rectangle 3"/>
           <p:cNvSpPr>
-            <a:spLocks noGrp="1"/>
+            <a:spLocks noGrp="1" noChangeArrowheads="1"/>
           </p:cNvSpPr>
           <p:nvPr>
             <p:ph type="body" idx="1"/>
           </p:nvPr>
         </p:nvSpPr>
         <p:spPr>
+          <a:xfrm>
+            <a:off x="685800" y="4343400"/>
+            <a:ext cx="5486400" cy="4114800"/>
+          </a:xfrm>
           <a:noFill/>
           <a:ln/>
         </p:spPr>
@@ -1102,40 +1127,15 @@
           <a:bodyPr/>
           <a:lstStyle/>
           <a:p>
+            <a:pPr eaLnBrk="1" hangingPunct="1"/>
             <a:endParaRPr lang="nl-NL"/>
-          </a:p>
-        </p:txBody>
-      </p:sp>
-      <p:sp>
-        <p:nvSpPr>
-          <p:cNvPr id="82948" name="Slide Number Placeholder 3"/>
-          <p:cNvSpPr>
-            <a:spLocks noGrp="1"/>
-          </p:cNvSpPr>
-          <p:nvPr>
-            <p:ph type="sldNum" sz="quarter" idx="5"/>
-          </p:nvPr>
-        </p:nvSpPr>
-        <p:spPr>
-          <a:noFill/>
-        </p:spPr>
-        <p:txBody>
-          <a:bodyPr/>
-          <a:lstStyle/>
-          <a:p>
-            <a:fld id="{EA47B6D4-58F2-4A3C-AE3F-EC86997EBECA}" type="slidenum">
-              <a:rPr lang="en-US" smtClean="0"/>
-              <a:pPr/>
-              <a:t>18</a:t>
-            </a:fld>
-            <a:endParaRPr lang="en-US"/>
           </a:p>
         </p:txBody>
       </p:sp>
     </p:spTree>
     <p:extLst>
       <p:ext uri="{BB962C8B-B14F-4D97-AF65-F5344CB8AC3E}">
-        <p14:creationId xmlns:p14="http://schemas.microsoft.com/office/powerpoint/2010/main" val="811702332"/>
+        <p14:creationId xmlns:p14="http://schemas.microsoft.com/office/powerpoint/2010/main" val="51924202"/>
       </p:ext>
     </p:extLst>
   </p:cSld>
@@ -1164,7 +1164,7 @@
       </p:grpSpPr>
       <p:sp>
         <p:nvSpPr>
-          <p:cNvPr id="83970" name="Tijdelijke aanduiding voor dia-afbeelding 1"/>
+          <p:cNvPr id="82946" name="Slide Image Placeholder 1"/>
           <p:cNvSpPr>
             <a:spLocks noGrp="1" noRot="1" noChangeAspect="1" noTextEdit="1"/>
           </p:cNvSpPr>
@@ -1178,7 +1178,7 @@
       </p:sp>
       <p:sp>
         <p:nvSpPr>
-          <p:cNvPr id="83971" name="Tijdelijke aanduiding voor notities 2"/>
+          <p:cNvPr id="82947" name="Notes Placeholder 2"/>
           <p:cNvSpPr>
             <a:spLocks noGrp="1"/>
           </p:cNvSpPr>
@@ -1200,7 +1200,7 @@
       </p:sp>
       <p:sp>
         <p:nvSpPr>
-          <p:cNvPr id="83972" name="Tijdelijke aanduiding voor dianummer 3"/>
+          <p:cNvPr id="82948" name="Slide Number Placeholder 3"/>
           <p:cNvSpPr>
             <a:spLocks noGrp="1"/>
           </p:cNvSpPr>
@@ -1215,10 +1215,10 @@
           <a:bodyPr/>
           <a:lstStyle/>
           <a:p>
-            <a:fld id="{2439C13D-1199-4BF1-AA12-CCD94936A740}" type="slidenum">
+            <a:fld id="{EA47B6D4-58F2-4A3C-AE3F-EC86997EBECA}" type="slidenum">
               <a:rPr lang="en-US" smtClean="0"/>
               <a:pPr/>
-              <a:t>19</a:t>
+              <a:t>18</a:t>
             </a:fld>
             <a:endParaRPr lang="en-US"/>
           </a:p>
@@ -1227,7 +1227,7 @@
     </p:spTree>
     <p:extLst>
       <p:ext uri="{BB962C8B-B14F-4D97-AF65-F5344CB8AC3E}">
-        <p14:creationId xmlns:p14="http://schemas.microsoft.com/office/powerpoint/2010/main" val="1464968180"/>
+        <p14:creationId xmlns:p14="http://schemas.microsoft.com/office/powerpoint/2010/main" val="811702332"/>
       </p:ext>
     </p:extLst>
   </p:cSld>
@@ -1256,7 +1256,7 @@
       </p:grpSpPr>
       <p:sp>
         <p:nvSpPr>
-          <p:cNvPr id="84994" name="Tijdelijke aanduiding voor dia-afbeelding 1"/>
+          <p:cNvPr id="83970" name="Tijdelijke aanduiding voor dia-afbeelding 1"/>
           <p:cNvSpPr>
             <a:spLocks noGrp="1" noRot="1" noChangeAspect="1" noTextEdit="1"/>
           </p:cNvSpPr>
@@ -1270,7 +1270,7 @@
       </p:sp>
       <p:sp>
         <p:nvSpPr>
-          <p:cNvPr id="84995" name="Tijdelijke aanduiding voor notities 2"/>
+          <p:cNvPr id="83971" name="Tijdelijke aanduiding voor notities 2"/>
           <p:cNvSpPr>
             <a:spLocks noGrp="1"/>
           </p:cNvSpPr>
@@ -1292,7 +1292,7 @@
       </p:sp>
       <p:sp>
         <p:nvSpPr>
-          <p:cNvPr id="84996" name="Tijdelijke aanduiding voor dianummer 3"/>
+          <p:cNvPr id="83972" name="Tijdelijke aanduiding voor dianummer 3"/>
           <p:cNvSpPr>
             <a:spLocks noGrp="1"/>
           </p:cNvSpPr>
@@ -1307,10 +1307,10 @@
           <a:bodyPr/>
           <a:lstStyle/>
           <a:p>
-            <a:fld id="{B3966D7C-C46D-4E58-8AA2-F31A60335376}" type="slidenum">
+            <a:fld id="{2439C13D-1199-4BF1-AA12-CCD94936A740}" type="slidenum">
               <a:rPr lang="en-US" smtClean="0"/>
               <a:pPr/>
-              <a:t>20</a:t>
+              <a:t>19</a:t>
             </a:fld>
             <a:endParaRPr lang="en-US"/>
           </a:p>
@@ -1319,7 +1319,7 @@
     </p:spTree>
     <p:extLst>
       <p:ext uri="{BB962C8B-B14F-4D97-AF65-F5344CB8AC3E}">
-        <p14:creationId xmlns:p14="http://schemas.microsoft.com/office/powerpoint/2010/main" val="820188405"/>
+        <p14:creationId xmlns:p14="http://schemas.microsoft.com/office/powerpoint/2010/main" val="1464968180"/>
       </p:ext>
     </p:extLst>
   </p:cSld>
@@ -1348,7 +1348,7 @@
       </p:grpSpPr>
       <p:sp>
         <p:nvSpPr>
-          <p:cNvPr id="86018" name="Tijdelijke aanduiding voor dia-afbeelding 1"/>
+          <p:cNvPr id="84994" name="Tijdelijke aanduiding voor dia-afbeelding 1"/>
           <p:cNvSpPr>
             <a:spLocks noGrp="1" noRot="1" noChangeAspect="1" noTextEdit="1"/>
           </p:cNvSpPr>
@@ -1362,7 +1362,7 @@
       </p:sp>
       <p:sp>
         <p:nvSpPr>
-          <p:cNvPr id="86019" name="Tijdelijke aanduiding voor notities 2"/>
+          <p:cNvPr id="84995" name="Tijdelijke aanduiding voor notities 2"/>
           <p:cNvSpPr>
             <a:spLocks noGrp="1"/>
           </p:cNvSpPr>
@@ -1384,7 +1384,7 @@
       </p:sp>
       <p:sp>
         <p:nvSpPr>
-          <p:cNvPr id="86020" name="Tijdelijke aanduiding voor dianummer 3"/>
+          <p:cNvPr id="84996" name="Tijdelijke aanduiding voor dianummer 3"/>
           <p:cNvSpPr>
             <a:spLocks noGrp="1"/>
           </p:cNvSpPr>
@@ -1399,10 +1399,10 @@
           <a:bodyPr/>
           <a:lstStyle/>
           <a:p>
-            <a:fld id="{E16135D9-A281-4DB0-AA58-FFBB233A22F3}" type="slidenum">
+            <a:fld id="{B3966D7C-C46D-4E58-8AA2-F31A60335376}" type="slidenum">
               <a:rPr lang="en-US" smtClean="0"/>
               <a:pPr/>
-              <a:t>21</a:t>
+              <a:t>20</a:t>
             </a:fld>
             <a:endParaRPr lang="en-US"/>
           </a:p>
@@ -1411,7 +1411,7 @@
     </p:spTree>
     <p:extLst>
       <p:ext uri="{BB962C8B-B14F-4D97-AF65-F5344CB8AC3E}">
-        <p14:creationId xmlns:p14="http://schemas.microsoft.com/office/powerpoint/2010/main" val="208992742"/>
+        <p14:creationId xmlns:p14="http://schemas.microsoft.com/office/powerpoint/2010/main" val="820188405"/>
       </p:ext>
     </p:extLst>
   </p:cSld>
@@ -1440,7 +1440,7 @@
       </p:grpSpPr>
       <p:sp>
         <p:nvSpPr>
-          <p:cNvPr id="88066" name="Tijdelijke aanduiding voor dia-afbeelding 1"/>
+          <p:cNvPr id="86018" name="Tijdelijke aanduiding voor dia-afbeelding 1"/>
           <p:cNvSpPr>
             <a:spLocks noGrp="1" noRot="1" noChangeAspect="1" noTextEdit="1"/>
           </p:cNvSpPr>
@@ -1454,7 +1454,7 @@
       </p:sp>
       <p:sp>
         <p:nvSpPr>
-          <p:cNvPr id="88067" name="Tijdelijke aanduiding voor notities 2"/>
+          <p:cNvPr id="86019" name="Tijdelijke aanduiding voor notities 2"/>
           <p:cNvSpPr>
             <a:spLocks noGrp="1"/>
           </p:cNvSpPr>
@@ -1470,88 +1470,13 @@
           <a:bodyPr/>
           <a:lstStyle/>
           <a:p>
-            <a:pPr>
-              <a:buFontTx/>
-              <a:buChar char="•"/>
-            </a:pPr>
-            <a:r>
-              <a:rPr lang="en-US"/>
-              <a:t>“Weak until” aka “W” aka “unless” :</a:t>
-            </a:r>
-            <a:br>
-              <a:rPr lang="en-US"/>
-            </a:br>
-            <a:br>
-              <a:rPr lang="en-US"/>
-            </a:br>
-            <a:r>
-              <a:rPr lang="en-US"/>
-              <a:t>   f </a:t>
-            </a:r>
-            <a:r>
-              <a:rPr lang="en-US" u="sng"/>
-              <a:t>unless</a:t>
-            </a:r>
-            <a:r>
-              <a:rPr lang="en-US"/>
-              <a:t> g    =     f  </a:t>
-            </a:r>
-            <a:r>
-              <a:rPr lang="en-US" u="sng"/>
-              <a:t>until</a:t>
-            </a:r>
-            <a:r>
-              <a:rPr lang="en-US"/>
-              <a:t> g  \/   [] g </a:t>
-            </a:r>
-          </a:p>
-          <a:p>
-            <a:pPr>
-              <a:buFontTx/>
-              <a:buChar char="•"/>
-            </a:pPr>
-            <a:endParaRPr lang="en-US"/>
-          </a:p>
-          <a:p>
-            <a:pPr>
-              <a:buFontTx/>
-              <a:buChar char="•"/>
-            </a:pPr>
-            <a:r>
-              <a:rPr lang="en-US"/>
-              <a:t> until and release (aka “R”) can also be defined in terms of unless:</a:t>
-            </a:r>
-            <a:br>
-              <a:rPr lang="nl-NL"/>
-            </a:br>
-            <a:br>
-              <a:rPr lang="nl-NL"/>
-            </a:br>
-            <a:r>
-              <a:rPr lang="nl-NL"/>
-              <a:t>    f  releases  g   =    g unless f /</a:t>
-            </a:r>
-            <a:r>
-              <a:rPr lang="en-US"/>
-              <a:t>\ g     (g holds forever, or it is released by f; at the point of release both must hold)</a:t>
-            </a:r>
-            <a:br>
-              <a:rPr lang="en-US"/>
-            </a:br>
-            <a:r>
-              <a:rPr lang="en-US"/>
-              <a:t>    f  until g         =    f  unless g  /\  &lt;&gt;g</a:t>
-            </a:r>
             <a:endParaRPr lang="nl-NL"/>
           </a:p>
-          <a:p>
-            <a:endParaRPr lang="nl-NL"/>
-          </a:p>
-        </p:txBody>
-      </p:sp>
-      <p:sp>
-        <p:nvSpPr>
-          <p:cNvPr id="88068" name="Tijdelijke aanduiding voor dianummer 3"/>
+        </p:txBody>
+      </p:sp>
+      <p:sp>
+        <p:nvSpPr>
+          <p:cNvPr id="86020" name="Tijdelijke aanduiding voor dianummer 3"/>
           <p:cNvSpPr>
             <a:spLocks noGrp="1"/>
           </p:cNvSpPr>
@@ -1566,10 +1491,10 @@
           <a:bodyPr/>
           <a:lstStyle/>
           <a:p>
-            <a:fld id="{8079A49F-6E31-4B13-BF0C-525958E1C82E}" type="slidenum">
+            <a:fld id="{E16135D9-A281-4DB0-AA58-FFBB233A22F3}" type="slidenum">
               <a:rPr lang="en-US" smtClean="0"/>
               <a:pPr/>
-              <a:t>22</a:t>
+              <a:t>21</a:t>
             </a:fld>
             <a:endParaRPr lang="en-US"/>
           </a:p>
@@ -1578,7 +1503,7 @@
     </p:spTree>
     <p:extLst>
       <p:ext uri="{BB962C8B-B14F-4D97-AF65-F5344CB8AC3E}">
-        <p14:creationId xmlns:p14="http://schemas.microsoft.com/office/powerpoint/2010/main" val="1405251949"/>
+        <p14:creationId xmlns:p14="http://schemas.microsoft.com/office/powerpoint/2010/main" val="208992742"/>
       </p:ext>
     </p:extLst>
   </p:cSld>
@@ -1607,7 +1532,7 @@
       </p:grpSpPr>
       <p:sp>
         <p:nvSpPr>
-          <p:cNvPr id="87042" name="Tijdelijke aanduiding voor dia-afbeelding 1"/>
+          <p:cNvPr id="88066" name="Tijdelijke aanduiding voor dia-afbeelding 1"/>
           <p:cNvSpPr>
             <a:spLocks noGrp="1" noRot="1" noChangeAspect="1" noTextEdit="1"/>
           </p:cNvSpPr>
@@ -1621,7 +1546,7 @@
       </p:sp>
       <p:sp>
         <p:nvSpPr>
-          <p:cNvPr id="87043" name="Tijdelijke aanduiding voor notities 2"/>
+          <p:cNvPr id="88067" name="Tijdelijke aanduiding voor notities 2"/>
           <p:cNvSpPr>
             <a:spLocks noGrp="1"/>
           </p:cNvSpPr>
@@ -1641,13 +1566,84 @@
               <a:buFontTx/>
               <a:buChar char="•"/>
             </a:pPr>
+            <a:r>
+              <a:rPr lang="en-US"/>
+              <a:t>“Weak until” aka “W” aka “unless” :</a:t>
+            </a:r>
+            <a:br>
+              <a:rPr lang="en-US"/>
+            </a:br>
+            <a:br>
+              <a:rPr lang="en-US"/>
+            </a:br>
+            <a:r>
+              <a:rPr lang="en-US"/>
+              <a:t>   f </a:t>
+            </a:r>
+            <a:r>
+              <a:rPr lang="en-US" u="sng"/>
+              <a:t>unless</a:t>
+            </a:r>
+            <a:r>
+              <a:rPr lang="en-US"/>
+              <a:t> g    =     f  </a:t>
+            </a:r>
+            <a:r>
+              <a:rPr lang="en-US" u="sng"/>
+              <a:t>until</a:t>
+            </a:r>
+            <a:r>
+              <a:rPr lang="en-US"/>
+              <a:t> g  \/   [] g </a:t>
+            </a:r>
+          </a:p>
+          <a:p>
+            <a:pPr>
+              <a:buFontTx/>
+              <a:buChar char="•"/>
+            </a:pPr>
+            <a:endParaRPr lang="en-US"/>
+          </a:p>
+          <a:p>
+            <a:pPr>
+              <a:buFontTx/>
+              <a:buChar char="•"/>
+            </a:pPr>
+            <a:r>
+              <a:rPr lang="en-US"/>
+              <a:t> until and release (aka “R”) can also be defined in terms of unless:</a:t>
+            </a:r>
+            <a:br>
+              <a:rPr lang="nl-NL"/>
+            </a:br>
+            <a:br>
+              <a:rPr lang="nl-NL"/>
+            </a:br>
+            <a:r>
+              <a:rPr lang="nl-NL"/>
+              <a:t>    f  releases  g   =    g unless f /</a:t>
+            </a:r>
+            <a:r>
+              <a:rPr lang="en-US"/>
+              <a:t>\ g     (g holds forever, or it is released by f; at the point of release both must hold)</a:t>
+            </a:r>
+            <a:br>
+              <a:rPr lang="en-US"/>
+            </a:br>
+            <a:r>
+              <a:rPr lang="en-US"/>
+              <a:t>    f  until g         =    f  unless g  /\  &lt;&gt;g</a:t>
+            </a:r>
             <a:endParaRPr lang="nl-NL"/>
           </a:p>
-        </p:txBody>
-      </p:sp>
-      <p:sp>
-        <p:nvSpPr>
-          <p:cNvPr id="87044" name="Tijdelijke aanduiding voor dianummer 3"/>
+          <a:p>
+            <a:endParaRPr lang="nl-NL"/>
+          </a:p>
+        </p:txBody>
+      </p:sp>
+      <p:sp>
+        <p:nvSpPr>
+          <p:cNvPr id="88068" name="Tijdelijke aanduiding voor dianummer 3"/>
           <p:cNvSpPr>
             <a:spLocks noGrp="1"/>
           </p:cNvSpPr>
@@ -1662,10 +1658,10 @@
           <a:bodyPr/>
           <a:lstStyle/>
           <a:p>
-            <a:fld id="{19FDDC4F-1414-42AB-9905-FD1E937D6BD7}" type="slidenum">
+            <a:fld id="{8079A49F-6E31-4B13-BF0C-525958E1C82E}" type="slidenum">
               <a:rPr lang="en-US" smtClean="0"/>
               <a:pPr/>
-              <a:t>23</a:t>
+              <a:t>22</a:t>
             </a:fld>
             <a:endParaRPr lang="en-US"/>
           </a:p>
@@ -1674,7 +1670,7 @@
     </p:spTree>
     <p:extLst>
       <p:ext uri="{BB962C8B-B14F-4D97-AF65-F5344CB8AC3E}">
-        <p14:creationId xmlns:p14="http://schemas.microsoft.com/office/powerpoint/2010/main" val="44357137"/>
+        <p14:creationId xmlns:p14="http://schemas.microsoft.com/office/powerpoint/2010/main" val="1405251949"/>
       </p:ext>
     </p:extLst>
   </p:cSld>
@@ -1703,7 +1699,7 @@
       </p:grpSpPr>
       <p:sp>
         <p:nvSpPr>
-          <p:cNvPr id="89090" name="Tijdelijke aanduiding voor dia-afbeelding 1"/>
+          <p:cNvPr id="87042" name="Tijdelijke aanduiding voor dia-afbeelding 1"/>
           <p:cNvSpPr>
             <a:spLocks noGrp="1" noRot="1" noChangeAspect="1" noTextEdit="1"/>
           </p:cNvSpPr>
@@ -1717,7 +1713,7 @@
       </p:sp>
       <p:sp>
         <p:nvSpPr>
-          <p:cNvPr id="89091" name="Tijdelijke aanduiding voor notities 2"/>
+          <p:cNvPr id="87043" name="Tijdelijke aanduiding voor notities 2"/>
           <p:cNvSpPr>
             <a:spLocks noGrp="1"/>
           </p:cNvSpPr>
@@ -1733,141 +1729,17 @@
           <a:bodyPr/>
           <a:lstStyle/>
           <a:p>
-            <a:pPr marL="171450" indent="-171450">
-              <a:buFont typeface="Arial" charset="0"/>
+            <a:pPr>
+              <a:buFontTx/>
               <a:buChar char="•"/>
             </a:pPr>
-            <a:r>
-              <a:rPr lang="nl-NL" dirty="0" err="1"/>
-              <a:t>Can</a:t>
-            </a:r>
-            <a:r>
-              <a:rPr lang="nl-NL" dirty="0"/>
-              <a:t> </a:t>
-            </a:r>
-            <a:r>
-              <a:rPr lang="nl-NL" dirty="0" err="1"/>
-              <a:t>simplify</a:t>
-            </a:r>
-            <a:r>
-              <a:rPr lang="nl-NL" dirty="0"/>
-              <a:t> </a:t>
-            </a:r>
-            <a:r>
-              <a:rPr lang="nl-NL" dirty="0" err="1"/>
-              <a:t>expressing</a:t>
-            </a:r>
-            <a:r>
-              <a:rPr lang="nl-NL" dirty="0"/>
-              <a:t> </a:t>
-            </a:r>
-            <a:r>
-              <a:rPr lang="nl-NL" dirty="0" err="1"/>
-              <a:t>certain</a:t>
-            </a:r>
-            <a:r>
-              <a:rPr lang="nl-NL" baseline="0" dirty="0"/>
-              <a:t> </a:t>
-            </a:r>
-            <a:r>
-              <a:rPr lang="nl-NL" baseline="0" dirty="0" err="1"/>
-              <a:t>properties</a:t>
-            </a:r>
-            <a:br>
-              <a:rPr lang="nl-NL" baseline="0" dirty="0"/>
-            </a:br>
-            <a:r>
-              <a:rPr lang="nl-NL" baseline="0" dirty="0"/>
-              <a:t>* </a:t>
-            </a:r>
-            <a:r>
-              <a:rPr lang="nl-NL" dirty="0"/>
-              <a:t>LTL </a:t>
-            </a:r>
-            <a:r>
-              <a:rPr lang="nl-NL" dirty="0" err="1"/>
-              <a:t>with</a:t>
-            </a:r>
-            <a:r>
-              <a:rPr lang="nl-NL" baseline="0" dirty="0"/>
-              <a:t> past </a:t>
-            </a:r>
-            <a:r>
-              <a:rPr lang="nl-NL" baseline="0" dirty="0" err="1"/>
-              <a:t>formulas</a:t>
-            </a:r>
-            <a:r>
-              <a:rPr lang="nl-NL" baseline="0" dirty="0"/>
-              <a:t> </a:t>
-            </a:r>
-            <a:r>
-              <a:rPr lang="nl-NL" baseline="0" dirty="0" err="1"/>
-              <a:t>can</a:t>
-            </a:r>
-            <a:r>
-              <a:rPr lang="nl-NL" baseline="0" dirty="0"/>
-              <a:t> </a:t>
-            </a:r>
-            <a:r>
-              <a:rPr lang="nl-NL" baseline="0" dirty="0" err="1"/>
-              <a:t>be</a:t>
-            </a:r>
-            <a:r>
-              <a:rPr lang="nl-NL" baseline="0" dirty="0"/>
-              <a:t> </a:t>
-            </a:r>
-            <a:r>
-              <a:rPr lang="nl-NL" baseline="0" dirty="0" err="1"/>
-              <a:t>expressed</a:t>
-            </a:r>
-            <a:r>
-              <a:rPr lang="nl-NL" baseline="0" dirty="0"/>
-              <a:t> </a:t>
-            </a:r>
-            <a:r>
-              <a:rPr lang="nl-NL" baseline="0" dirty="0" err="1"/>
-              <a:t>with</a:t>
-            </a:r>
-            <a:r>
-              <a:rPr lang="nl-NL" baseline="0" dirty="0"/>
-              <a:t> standard LTL [</a:t>
-            </a:r>
-            <a:r>
-              <a:rPr lang="nl-NL" baseline="0" dirty="0" err="1"/>
-              <a:t>Princp</a:t>
-            </a:r>
-            <a:r>
-              <a:rPr lang="nl-NL" baseline="0" dirty="0"/>
-              <a:t>. of MC, </a:t>
-            </a:r>
-            <a:r>
-              <a:rPr lang="nl-NL" baseline="0" dirty="0" err="1"/>
-              <a:t>Baier</a:t>
-            </a:r>
-            <a:r>
-              <a:rPr lang="nl-NL" baseline="0" dirty="0"/>
-              <a:t> – Katoen]</a:t>
-            </a:r>
-          </a:p>
-          <a:p>
-            <a:pPr marL="171450" indent="-171450">
-              <a:buFont typeface="Arial" charset="0"/>
-              <a:buChar char="•"/>
-            </a:pPr>
-            <a:endParaRPr lang="nl-NL" baseline="0" dirty="0"/>
-          </a:p>
-          <a:p>
-            <a:pPr marL="171450" indent="-171450">
-              <a:buFont typeface="Arial" charset="0"/>
-              <a:buChar char="•"/>
-            </a:pPr>
-            <a:endParaRPr lang="nl-NL" dirty="0"/>
-          </a:p>
-        </p:txBody>
-      </p:sp>
-      <p:sp>
-        <p:nvSpPr>
-          <p:cNvPr id="89092" name="Tijdelijke aanduiding voor dianummer 3"/>
+            <a:endParaRPr lang="nl-NL"/>
+          </a:p>
+        </p:txBody>
+      </p:sp>
+      <p:sp>
+        <p:nvSpPr>
+          <p:cNvPr id="87044" name="Tijdelijke aanduiding voor dianummer 3"/>
           <p:cNvSpPr>
             <a:spLocks noGrp="1"/>
           </p:cNvSpPr>
@@ -1882,10 +1754,10 @@
           <a:bodyPr/>
           <a:lstStyle/>
           <a:p>
-            <a:fld id="{14A94E9D-BF03-4354-ABDA-24E32E6484DA}" type="slidenum">
+            <a:fld id="{19FDDC4F-1414-42AB-9905-FD1E937D6BD7}" type="slidenum">
               <a:rPr lang="en-US" smtClean="0"/>
               <a:pPr/>
-              <a:t>24</a:t>
+              <a:t>23</a:t>
             </a:fld>
             <a:endParaRPr lang="en-US"/>
           </a:p>
@@ -1894,7 +1766,7 @@
     </p:spTree>
     <p:extLst>
       <p:ext uri="{BB962C8B-B14F-4D97-AF65-F5344CB8AC3E}">
-        <p14:creationId xmlns:p14="http://schemas.microsoft.com/office/powerpoint/2010/main" val="333576050"/>
+        <p14:creationId xmlns:p14="http://schemas.microsoft.com/office/powerpoint/2010/main" val="44357137"/>
       </p:ext>
     </p:extLst>
   </p:cSld>
@@ -2016,7 +1888,7 @@
       </p:grpSpPr>
       <p:sp>
         <p:nvSpPr>
-          <p:cNvPr id="90114" name="Tijdelijke aanduiding voor dia-afbeelding 1"/>
+          <p:cNvPr id="89090" name="Tijdelijke aanduiding voor dia-afbeelding 1"/>
           <p:cNvSpPr>
             <a:spLocks noGrp="1" noRot="1" noChangeAspect="1" noTextEdit="1"/>
           </p:cNvSpPr>
@@ -2030,7 +1902,7 @@
       </p:sp>
       <p:sp>
         <p:nvSpPr>
-          <p:cNvPr id="90115" name="Tijdelijke aanduiding voor notities 2"/>
+          <p:cNvPr id="89091" name="Tijdelijke aanduiding voor notities 2"/>
           <p:cNvSpPr>
             <a:spLocks noGrp="1"/>
           </p:cNvSpPr>
@@ -2046,82 +1918,141 @@
           <a:bodyPr/>
           <a:lstStyle/>
           <a:p>
-            <a:r>
-              <a:rPr lang="en-US" dirty="0">
-                <a:latin typeface="Arial" charset="0"/>
-                <a:cs typeface="Arial" charset="0"/>
-              </a:rPr>
-              <a:t>But temporal property must hold on </a:t>
-            </a:r>
-            <a:r>
-              <a:rPr lang="en-US" u="sng" dirty="0">
-                <a:latin typeface="Arial" charset="0"/>
-                <a:cs typeface="Arial" charset="0"/>
-              </a:rPr>
-              <a:t>all</a:t>
-            </a:r>
-            <a:r>
-              <a:rPr lang="en-US" dirty="0">
-                <a:latin typeface="Arial" charset="0"/>
-                <a:cs typeface="Arial" charset="0"/>
-              </a:rPr>
-              <a:t> executions of M !</a:t>
-            </a:r>
-          </a:p>
-          <a:p>
-            <a:pPr lvl="1"/>
-            <a:endParaRPr lang="en-US" dirty="0">
-              <a:latin typeface="Arial" charset="0"/>
-              <a:cs typeface="Arial" charset="0"/>
-            </a:endParaRPr>
-          </a:p>
-          <a:p>
-            <a:pPr lvl="1"/>
-            <a:r>
-              <a:rPr lang="en-US" dirty="0">
-                <a:latin typeface="Arial" charset="0"/>
-                <a:cs typeface="Arial" charset="0"/>
-              </a:rPr>
-              <a:t>** </a:t>
-            </a:r>
-            <a:r>
-              <a:rPr lang="en-US" sz="2000" dirty="0">
-                <a:latin typeface="Arial" charset="0"/>
-                <a:cs typeface="Arial" charset="0"/>
-              </a:rPr>
-              <a:t>perhaps infinitely many executions.</a:t>
-            </a:r>
-          </a:p>
-          <a:p>
-            <a:pPr lvl="1"/>
-            <a:endParaRPr lang="en-US" sz="2000" dirty="0">
-              <a:latin typeface="Arial" charset="0"/>
-              <a:cs typeface="Arial" charset="0"/>
-            </a:endParaRPr>
-          </a:p>
-          <a:p>
-            <a:pPr lvl="1"/>
-            <a:r>
-              <a:rPr lang="en-US" sz="2000" dirty="0">
-                <a:latin typeface="Arial" charset="0"/>
-                <a:cs typeface="Arial" charset="0"/>
-                <a:sym typeface="Symbol" pitchFamily="18" charset="2"/>
-              </a:rPr>
-              <a:t>** some executions may be infinite.</a:t>
-            </a:r>
-            <a:endParaRPr lang="en-US" sz="2000" dirty="0">
-              <a:latin typeface="Arial" charset="0"/>
-              <a:cs typeface="Arial" charset="0"/>
-            </a:endParaRPr>
-          </a:p>
-          <a:p>
+            <a:pPr marL="171450" indent="-171450">
+              <a:buFont typeface="Arial" charset="0"/>
+              <a:buChar char="•"/>
+            </a:pPr>
+            <a:r>
+              <a:rPr lang="nl-NL" dirty="0" err="1"/>
+              <a:t>Can</a:t>
+            </a:r>
+            <a:r>
+              <a:rPr lang="nl-NL" dirty="0"/>
+              <a:t> </a:t>
+            </a:r>
+            <a:r>
+              <a:rPr lang="nl-NL" dirty="0" err="1"/>
+              <a:t>simplify</a:t>
+            </a:r>
+            <a:r>
+              <a:rPr lang="nl-NL" dirty="0"/>
+              <a:t> </a:t>
+            </a:r>
+            <a:r>
+              <a:rPr lang="nl-NL" dirty="0" err="1"/>
+              <a:t>expressing</a:t>
+            </a:r>
+            <a:r>
+              <a:rPr lang="nl-NL" dirty="0"/>
+              <a:t> </a:t>
+            </a:r>
+            <a:r>
+              <a:rPr lang="nl-NL" dirty="0" err="1"/>
+              <a:t>certain</a:t>
+            </a:r>
+            <a:r>
+              <a:rPr lang="nl-NL" baseline="0" dirty="0"/>
+              <a:t> </a:t>
+            </a:r>
+            <a:r>
+              <a:rPr lang="nl-NL" baseline="0" dirty="0" err="1"/>
+              <a:t>properties</a:t>
+            </a:r>
+            <a:br>
+              <a:rPr lang="nl-NL" baseline="0" dirty="0"/>
+            </a:br>
+            <a:r>
+              <a:rPr lang="nl-NL" baseline="0" dirty="0"/>
+              <a:t>* </a:t>
+            </a:r>
+            <a:r>
+              <a:rPr lang="nl-NL" dirty="0"/>
+              <a:t>LTL </a:t>
+            </a:r>
+            <a:r>
+              <a:rPr lang="nl-NL" dirty="0" err="1"/>
+              <a:t>with</a:t>
+            </a:r>
+            <a:r>
+              <a:rPr lang="nl-NL" baseline="0" dirty="0"/>
+              <a:t> past </a:t>
+            </a:r>
+            <a:r>
+              <a:rPr lang="nl-NL" baseline="0" dirty="0" err="1"/>
+              <a:t>formulas</a:t>
+            </a:r>
+            <a:r>
+              <a:rPr lang="nl-NL" baseline="0" dirty="0"/>
+              <a:t> </a:t>
+            </a:r>
+            <a:r>
+              <a:rPr lang="nl-NL" baseline="0" dirty="0" err="1"/>
+              <a:t>can</a:t>
+            </a:r>
+            <a:r>
+              <a:rPr lang="nl-NL" baseline="0" dirty="0"/>
+              <a:t> </a:t>
+            </a:r>
+            <a:r>
+              <a:rPr lang="nl-NL" baseline="0" dirty="0" err="1"/>
+              <a:t>be</a:t>
+            </a:r>
+            <a:r>
+              <a:rPr lang="nl-NL" baseline="0" dirty="0"/>
+              <a:t> </a:t>
+            </a:r>
+            <a:r>
+              <a:rPr lang="nl-NL" baseline="0" dirty="0" err="1"/>
+              <a:t>expressed</a:t>
+            </a:r>
+            <a:r>
+              <a:rPr lang="nl-NL" baseline="0" dirty="0"/>
+              <a:t> </a:t>
+            </a:r>
+            <a:r>
+              <a:rPr lang="nl-NL" baseline="0" dirty="0" err="1"/>
+              <a:t>with</a:t>
+            </a:r>
+            <a:r>
+              <a:rPr lang="nl-NL" baseline="0" dirty="0"/>
+              <a:t> standard LTL [</a:t>
+            </a:r>
+            <a:r>
+              <a:rPr lang="nl-NL" baseline="0" dirty="0" err="1"/>
+              <a:t>Princp</a:t>
+            </a:r>
+            <a:r>
+              <a:rPr lang="nl-NL" baseline="0" dirty="0"/>
+              <a:t>. of MC, </a:t>
+            </a:r>
+            <a:r>
+              <a:rPr lang="nl-NL" baseline="0" dirty="0" err="1"/>
+              <a:t>Baier</a:t>
+            </a:r>
+            <a:r>
+              <a:rPr lang="nl-NL" baseline="0" dirty="0"/>
+              <a:t> – Katoen]</a:t>
+            </a:r>
+          </a:p>
+          <a:p>
+            <a:pPr marL="171450" indent="-171450">
+              <a:buFont typeface="Arial" charset="0"/>
+              <a:buChar char="•"/>
+            </a:pPr>
+            <a:endParaRPr lang="nl-NL" baseline="0" dirty="0"/>
+          </a:p>
+          <a:p>
+            <a:pPr marL="171450" indent="-171450">
+              <a:buFont typeface="Arial" charset="0"/>
+              <a:buChar char="•"/>
+            </a:pPr>
             <a:endParaRPr lang="nl-NL" dirty="0"/>
           </a:p>
         </p:txBody>
       </p:sp>
       <p:sp>
         <p:nvSpPr>
-          <p:cNvPr id="90116" name="Tijdelijke aanduiding voor dianummer 3"/>
+          <p:cNvPr id="89092" name="Tijdelijke aanduiding voor dianummer 3"/>
           <p:cNvSpPr>
             <a:spLocks noGrp="1"/>
           </p:cNvSpPr>
@@ -2136,10 +2067,10 @@
           <a:bodyPr/>
           <a:lstStyle/>
           <a:p>
-            <a:fld id="{C4585348-7A3F-4C4B-8204-7561305CE502}" type="slidenum">
+            <a:fld id="{14A94E9D-BF03-4354-ABDA-24E32E6484DA}" type="slidenum">
               <a:rPr lang="en-US" smtClean="0"/>
               <a:pPr/>
-              <a:t>25</a:t>
+              <a:t>24</a:t>
             </a:fld>
             <a:endParaRPr lang="en-US"/>
           </a:p>
@@ -2148,7 +2079,7 @@
     </p:spTree>
     <p:extLst>
       <p:ext uri="{BB962C8B-B14F-4D97-AF65-F5344CB8AC3E}">
-        <p14:creationId xmlns:p14="http://schemas.microsoft.com/office/powerpoint/2010/main" val="1480353680"/>
+        <p14:creationId xmlns:p14="http://schemas.microsoft.com/office/powerpoint/2010/main" val="333576050"/>
       </p:ext>
     </p:extLst>
   </p:cSld>
@@ -2177,7 +2108,7 @@
       </p:grpSpPr>
       <p:sp>
         <p:nvSpPr>
-          <p:cNvPr id="91138" name="Tijdelijke aanduiding voor dia-afbeelding 1"/>
+          <p:cNvPr id="90114" name="Tijdelijke aanduiding voor dia-afbeelding 1"/>
           <p:cNvSpPr>
             <a:spLocks noGrp="1" noRot="1" noChangeAspect="1" noTextEdit="1"/>
           </p:cNvSpPr>
@@ -2191,7 +2122,7 @@
       </p:sp>
       <p:sp>
         <p:nvSpPr>
-          <p:cNvPr id="91139" name="Tijdelijke aanduiding voor notities 2"/>
+          <p:cNvPr id="90115" name="Tijdelijke aanduiding voor notities 2"/>
           <p:cNvSpPr>
             <a:spLocks noGrp="1"/>
           </p:cNvSpPr>
@@ -2207,13 +2138,82 @@
           <a:bodyPr/>
           <a:lstStyle/>
           <a:p>
-            <a:endParaRPr lang="nl-NL"/>
-          </a:p>
-        </p:txBody>
-      </p:sp>
-      <p:sp>
-        <p:nvSpPr>
-          <p:cNvPr id="91140" name="Tijdelijke aanduiding voor dianummer 3"/>
+            <a:r>
+              <a:rPr lang="en-US" dirty="0">
+                <a:latin typeface="Arial" charset="0"/>
+                <a:cs typeface="Arial" charset="0"/>
+              </a:rPr>
+              <a:t>But temporal property must hold on </a:t>
+            </a:r>
+            <a:r>
+              <a:rPr lang="en-US" u="sng" dirty="0">
+                <a:latin typeface="Arial" charset="0"/>
+                <a:cs typeface="Arial" charset="0"/>
+              </a:rPr>
+              <a:t>all</a:t>
+            </a:r>
+            <a:r>
+              <a:rPr lang="en-US" dirty="0">
+                <a:latin typeface="Arial" charset="0"/>
+                <a:cs typeface="Arial" charset="0"/>
+              </a:rPr>
+              <a:t> executions of M !</a:t>
+            </a:r>
+          </a:p>
+          <a:p>
+            <a:pPr lvl="1"/>
+            <a:endParaRPr lang="en-US" dirty="0">
+              <a:latin typeface="Arial" charset="0"/>
+              <a:cs typeface="Arial" charset="0"/>
+            </a:endParaRPr>
+          </a:p>
+          <a:p>
+            <a:pPr lvl="1"/>
+            <a:r>
+              <a:rPr lang="en-US" dirty="0">
+                <a:latin typeface="Arial" charset="0"/>
+                <a:cs typeface="Arial" charset="0"/>
+              </a:rPr>
+              <a:t>** </a:t>
+            </a:r>
+            <a:r>
+              <a:rPr lang="en-US" sz="2000" dirty="0">
+                <a:latin typeface="Arial" charset="0"/>
+                <a:cs typeface="Arial" charset="0"/>
+              </a:rPr>
+              <a:t>perhaps infinitely many executions.</a:t>
+            </a:r>
+          </a:p>
+          <a:p>
+            <a:pPr lvl="1"/>
+            <a:endParaRPr lang="en-US" sz="2000" dirty="0">
+              <a:latin typeface="Arial" charset="0"/>
+              <a:cs typeface="Arial" charset="0"/>
+            </a:endParaRPr>
+          </a:p>
+          <a:p>
+            <a:pPr lvl="1"/>
+            <a:r>
+              <a:rPr lang="en-US" sz="2000" dirty="0">
+                <a:latin typeface="Arial" charset="0"/>
+                <a:cs typeface="Arial" charset="0"/>
+                <a:sym typeface="Symbol" pitchFamily="18" charset="2"/>
+              </a:rPr>
+              <a:t>** some executions may be infinite.</a:t>
+            </a:r>
+            <a:endParaRPr lang="en-US" sz="2000" dirty="0">
+              <a:latin typeface="Arial" charset="0"/>
+              <a:cs typeface="Arial" charset="0"/>
+            </a:endParaRPr>
+          </a:p>
+          <a:p>
+            <a:endParaRPr lang="nl-NL" dirty="0"/>
+          </a:p>
+        </p:txBody>
+      </p:sp>
+      <p:sp>
+        <p:nvSpPr>
+          <p:cNvPr id="90116" name="Tijdelijke aanduiding voor dianummer 3"/>
           <p:cNvSpPr>
             <a:spLocks noGrp="1"/>
           </p:cNvSpPr>
@@ -2228,10 +2228,10 @@
           <a:bodyPr/>
           <a:lstStyle/>
           <a:p>
-            <a:fld id="{FF2BF3A5-1D96-4D4F-9500-7E3FBF2FD087}" type="slidenum">
+            <a:fld id="{C4585348-7A3F-4C4B-8204-7561305CE502}" type="slidenum">
               <a:rPr lang="en-US" smtClean="0"/>
               <a:pPr/>
-              <a:t>26</a:t>
+              <a:t>25</a:t>
             </a:fld>
             <a:endParaRPr lang="en-US"/>
           </a:p>
@@ -2240,7 +2240,7 @@
     </p:spTree>
     <p:extLst>
       <p:ext uri="{BB962C8B-B14F-4D97-AF65-F5344CB8AC3E}">
-        <p14:creationId xmlns:p14="http://schemas.microsoft.com/office/powerpoint/2010/main" val="1706249265"/>
+        <p14:creationId xmlns:p14="http://schemas.microsoft.com/office/powerpoint/2010/main" val="1480353680"/>
       </p:ext>
     </p:extLst>
   </p:cSld>
@@ -2269,9 +2269,45 @@
       </p:grpSpPr>
       <p:sp>
         <p:nvSpPr>
-          <p:cNvPr id="92162" name="Rectangle 7"/>
+          <p:cNvPr id="91138" name="Tijdelijke aanduiding voor dia-afbeelding 1"/>
           <p:cNvSpPr>
-            <a:spLocks noGrp="1" noChangeArrowheads="1"/>
+            <a:spLocks noGrp="1" noRot="1" noChangeAspect="1" noTextEdit="1"/>
+          </p:cNvSpPr>
+          <p:nvPr>
+            <p:ph type="sldImg"/>
+          </p:nvPr>
+        </p:nvSpPr>
+        <p:spPr>
+          <a:ln/>
+        </p:spPr>
+      </p:sp>
+      <p:sp>
+        <p:nvSpPr>
+          <p:cNvPr id="91139" name="Tijdelijke aanduiding voor notities 2"/>
+          <p:cNvSpPr>
+            <a:spLocks noGrp="1"/>
+          </p:cNvSpPr>
+          <p:nvPr>
+            <p:ph type="body" idx="1"/>
+          </p:nvPr>
+        </p:nvSpPr>
+        <p:spPr>
+          <a:noFill/>
+          <a:ln/>
+        </p:spPr>
+        <p:txBody>
+          <a:bodyPr/>
+          <a:lstStyle/>
+          <a:p>
+            <a:endParaRPr lang="nl-NL"/>
+          </a:p>
+        </p:txBody>
+      </p:sp>
+      <p:sp>
+        <p:nvSpPr>
+          <p:cNvPr id="91140" name="Tijdelijke aanduiding voor dianummer 3"/>
+          <p:cNvSpPr>
+            <a:spLocks noGrp="1"/>
           </p:cNvSpPr>
           <p:nvPr>
             <p:ph type="sldNum" sz="quarter" idx="5"/>
@@ -2284,56 +2320,19 @@
           <a:bodyPr/>
           <a:lstStyle/>
           <a:p>
-            <a:fld id="{57851DF5-B5B6-4B58-AF40-2876301197B4}" type="slidenum">
+            <a:fld id="{FF2BF3A5-1D96-4D4F-9500-7E3FBF2FD087}" type="slidenum">
               <a:rPr lang="en-US" smtClean="0"/>
               <a:pPr/>
-              <a:t>27</a:t>
+              <a:t>26</a:t>
             </a:fld>
             <a:endParaRPr lang="en-US"/>
-          </a:p>
-        </p:txBody>
-      </p:sp>
-      <p:sp>
-        <p:nvSpPr>
-          <p:cNvPr id="92163" name="Rectangle 2"/>
-          <p:cNvSpPr>
-            <a:spLocks noGrp="1" noRot="1" noChangeAspect="1" noChangeArrowheads="1" noTextEdit="1"/>
-          </p:cNvSpPr>
-          <p:nvPr>
-            <p:ph type="sldImg"/>
-          </p:nvPr>
-        </p:nvSpPr>
-        <p:spPr>
-          <a:ln/>
-        </p:spPr>
-      </p:sp>
-      <p:sp>
-        <p:nvSpPr>
-          <p:cNvPr id="92164" name="Rectangle 3"/>
-          <p:cNvSpPr>
-            <a:spLocks noGrp="1" noChangeArrowheads="1"/>
-          </p:cNvSpPr>
-          <p:nvPr>
-            <p:ph type="body" idx="1"/>
-          </p:nvPr>
-        </p:nvSpPr>
-        <p:spPr>
-          <a:noFill/>
-          <a:ln/>
-        </p:spPr>
-        <p:txBody>
-          <a:bodyPr/>
-          <a:lstStyle/>
-          <a:p>
-            <a:pPr eaLnBrk="1" hangingPunct="1"/>
-            <a:endParaRPr lang="nl-NL"/>
           </a:p>
         </p:txBody>
       </p:sp>
     </p:spTree>
     <p:extLst>
       <p:ext uri="{BB962C8B-B14F-4D97-AF65-F5344CB8AC3E}">
-        <p14:creationId xmlns:p14="http://schemas.microsoft.com/office/powerpoint/2010/main" val="1582258464"/>
+        <p14:creationId xmlns:p14="http://schemas.microsoft.com/office/powerpoint/2010/main" val="1706249265"/>
       </p:ext>
     </p:extLst>
   </p:cSld>
@@ -2362,9 +2361,35 @@
       </p:grpSpPr>
       <p:sp>
         <p:nvSpPr>
-          <p:cNvPr id="93186" name="Tijdelijke aanduiding voor dia-afbeelding 1"/>
+          <p:cNvPr id="92162" name="Rectangle 7"/>
           <p:cNvSpPr>
-            <a:spLocks noGrp="1" noRot="1" noChangeAspect="1" noTextEdit="1"/>
+            <a:spLocks noGrp="1" noChangeArrowheads="1"/>
+          </p:cNvSpPr>
+          <p:nvPr>
+            <p:ph type="sldNum" sz="quarter" idx="5"/>
+          </p:nvPr>
+        </p:nvSpPr>
+        <p:spPr>
+          <a:noFill/>
+        </p:spPr>
+        <p:txBody>
+          <a:bodyPr/>
+          <a:lstStyle/>
+          <a:p>
+            <a:fld id="{57851DF5-B5B6-4B58-AF40-2876301197B4}" type="slidenum">
+              <a:rPr lang="en-US" smtClean="0"/>
+              <a:pPr/>
+              <a:t>27</a:t>
+            </a:fld>
+            <a:endParaRPr lang="en-US"/>
+          </a:p>
+        </p:txBody>
+      </p:sp>
+      <p:sp>
+        <p:nvSpPr>
+          <p:cNvPr id="92163" name="Rectangle 2"/>
+          <p:cNvSpPr>
+            <a:spLocks noGrp="1" noRot="1" noChangeAspect="1" noChangeArrowheads="1" noTextEdit="1"/>
           </p:cNvSpPr>
           <p:nvPr>
             <p:ph type="sldImg"/>
@@ -2376,9 +2401,9 @@
       </p:sp>
       <p:sp>
         <p:nvSpPr>
-          <p:cNvPr id="93187" name="Tijdelijke aanduiding voor notities 2"/>
+          <p:cNvPr id="92164" name="Rectangle 3"/>
           <p:cNvSpPr>
-            <a:spLocks noGrp="1"/>
+            <a:spLocks noGrp="1" noChangeArrowheads="1"/>
           </p:cNvSpPr>
           <p:nvPr>
             <p:ph type="body" idx="1"/>
@@ -2392,40 +2417,15 @@
           <a:bodyPr/>
           <a:lstStyle/>
           <a:p>
+            <a:pPr eaLnBrk="1" hangingPunct="1"/>
             <a:endParaRPr lang="nl-NL"/>
-          </a:p>
-        </p:txBody>
-      </p:sp>
-      <p:sp>
-        <p:nvSpPr>
-          <p:cNvPr id="93188" name="Tijdelijke aanduiding voor dianummer 3"/>
-          <p:cNvSpPr>
-            <a:spLocks noGrp="1"/>
-          </p:cNvSpPr>
-          <p:nvPr>
-            <p:ph type="sldNum" sz="quarter" idx="5"/>
-          </p:nvPr>
-        </p:nvSpPr>
-        <p:spPr>
-          <a:noFill/>
-        </p:spPr>
-        <p:txBody>
-          <a:bodyPr/>
-          <a:lstStyle/>
-          <a:p>
-            <a:fld id="{70ABDE57-088E-484E-A5AE-5BABD419A942}" type="slidenum">
-              <a:rPr lang="en-US" smtClean="0"/>
-              <a:pPr/>
-              <a:t>29</a:t>
-            </a:fld>
-            <a:endParaRPr lang="en-US"/>
           </a:p>
         </p:txBody>
       </p:sp>
     </p:spTree>
     <p:extLst>
       <p:ext uri="{BB962C8B-B14F-4D97-AF65-F5344CB8AC3E}">
-        <p14:creationId xmlns:p14="http://schemas.microsoft.com/office/powerpoint/2010/main" val="728003647"/>
+        <p14:creationId xmlns:p14="http://schemas.microsoft.com/office/powerpoint/2010/main" val="1582258464"/>
       </p:ext>
     </p:extLst>
   </p:cSld>
@@ -2454,7 +2454,7 @@
       </p:grpSpPr>
       <p:sp>
         <p:nvSpPr>
-          <p:cNvPr id="94210" name="Tijdelijke aanduiding voor dia-afbeelding 1"/>
+          <p:cNvPr id="93186" name="Tijdelijke aanduiding voor dia-afbeelding 1"/>
           <p:cNvSpPr>
             <a:spLocks noGrp="1" noRot="1" noChangeAspect="1" noTextEdit="1"/>
           </p:cNvSpPr>
@@ -2468,7 +2468,7 @@
       </p:sp>
       <p:sp>
         <p:nvSpPr>
-          <p:cNvPr id="94211" name="Tijdelijke aanduiding voor notities 2"/>
+          <p:cNvPr id="93187" name="Tijdelijke aanduiding voor notities 2"/>
           <p:cNvSpPr>
             <a:spLocks noGrp="1"/>
           </p:cNvSpPr>
@@ -2490,7 +2490,7 @@
       </p:sp>
       <p:sp>
         <p:nvSpPr>
-          <p:cNvPr id="94212" name="Tijdelijke aanduiding voor dianummer 3"/>
+          <p:cNvPr id="93188" name="Tijdelijke aanduiding voor dianummer 3"/>
           <p:cNvSpPr>
             <a:spLocks noGrp="1"/>
           </p:cNvSpPr>
@@ -2505,10 +2505,10 @@
           <a:bodyPr/>
           <a:lstStyle/>
           <a:p>
-            <a:fld id="{15887A10-9D43-45AB-87BB-F50E2DF1AF9B}" type="slidenum">
+            <a:fld id="{70ABDE57-088E-484E-A5AE-5BABD419A942}" type="slidenum">
               <a:rPr lang="en-US" smtClean="0"/>
               <a:pPr/>
-              <a:t>30</a:t>
+              <a:t>29</a:t>
             </a:fld>
             <a:endParaRPr lang="en-US"/>
           </a:p>
@@ -2517,7 +2517,7 @@
     </p:spTree>
     <p:extLst>
       <p:ext uri="{BB962C8B-B14F-4D97-AF65-F5344CB8AC3E}">
-        <p14:creationId xmlns:p14="http://schemas.microsoft.com/office/powerpoint/2010/main" val="1342958170"/>
+        <p14:creationId xmlns:p14="http://schemas.microsoft.com/office/powerpoint/2010/main" val="728003647"/>
       </p:ext>
     </p:extLst>
   </p:cSld>
@@ -2546,7 +2546,7 @@
       </p:grpSpPr>
       <p:sp>
         <p:nvSpPr>
-          <p:cNvPr id="95234" name="Tijdelijke aanduiding voor dia-afbeelding 1"/>
+          <p:cNvPr id="94210" name="Tijdelijke aanduiding voor dia-afbeelding 1"/>
           <p:cNvSpPr>
             <a:spLocks noGrp="1" noRot="1" noChangeAspect="1" noTextEdit="1"/>
           </p:cNvSpPr>
@@ -2560,7 +2560,7 @@
       </p:sp>
       <p:sp>
         <p:nvSpPr>
-          <p:cNvPr id="95235" name="Tijdelijke aanduiding voor notities 2"/>
+          <p:cNvPr id="94211" name="Tijdelijke aanduiding voor notities 2"/>
           <p:cNvSpPr>
             <a:spLocks noGrp="1"/>
           </p:cNvSpPr>
@@ -2576,35 +2576,13 @@
           <a:bodyPr/>
           <a:lstStyle/>
           <a:p>
-            <a:r>
-              <a:rPr lang="en-US"/>
-              <a:t>We will also write p,q </a:t>
-            </a:r>
-            <a:r>
-              <a:rPr lang="en-US">
-                <a:sym typeface="Symbol" pitchFamily="18" charset="2"/>
-              </a:rPr>
-              <a:t>  to mean all subsets of  that do </a:t>
-            </a:r>
-            <a:r>
-              <a:rPr lang="en-US" u="sng">
-                <a:sym typeface="Symbol" pitchFamily="18" charset="2"/>
-              </a:rPr>
-              <a:t>not</a:t>
-            </a:r>
-            <a:r>
-              <a:rPr lang="en-US">
-                <a:sym typeface="Symbol" pitchFamily="18" charset="2"/>
-              </a:rPr>
-              <a:t> contain both p and q.  Similarly we define p,q  .</a:t>
-            </a:r>
             <a:endParaRPr lang="nl-NL"/>
           </a:p>
         </p:txBody>
       </p:sp>
       <p:sp>
         <p:nvSpPr>
-          <p:cNvPr id="95236" name="Tijdelijke aanduiding voor dianummer 3"/>
+          <p:cNvPr id="94212" name="Tijdelijke aanduiding voor dianummer 3"/>
           <p:cNvSpPr>
             <a:spLocks noGrp="1"/>
           </p:cNvSpPr>
@@ -2619,10 +2597,10 @@
           <a:bodyPr/>
           <a:lstStyle/>
           <a:p>
-            <a:fld id="{CE9A4E9E-D1F3-4B67-86F8-09D73FBDAC66}" type="slidenum">
+            <a:fld id="{15887A10-9D43-45AB-87BB-F50E2DF1AF9B}" type="slidenum">
               <a:rPr lang="en-US" smtClean="0"/>
               <a:pPr/>
-              <a:t>31</a:t>
+              <a:t>30</a:t>
             </a:fld>
             <a:endParaRPr lang="en-US"/>
           </a:p>
@@ -2631,7 +2609,7 @@
     </p:spTree>
     <p:extLst>
       <p:ext uri="{BB962C8B-B14F-4D97-AF65-F5344CB8AC3E}">
-        <p14:creationId xmlns:p14="http://schemas.microsoft.com/office/powerpoint/2010/main" val="1044833220"/>
+        <p14:creationId xmlns:p14="http://schemas.microsoft.com/office/powerpoint/2010/main" val="1342958170"/>
       </p:ext>
     </p:extLst>
   </p:cSld>
@@ -2660,7 +2638,7 @@
       </p:grpSpPr>
       <p:sp>
         <p:nvSpPr>
-          <p:cNvPr id="96258" name="Tijdelijke aanduiding voor dia-afbeelding 1"/>
+          <p:cNvPr id="95234" name="Tijdelijke aanduiding voor dia-afbeelding 1"/>
           <p:cNvSpPr>
             <a:spLocks noGrp="1" noRot="1" noChangeAspect="1" noTextEdit="1"/>
           </p:cNvSpPr>
@@ -2674,7 +2652,7 @@
       </p:sp>
       <p:sp>
         <p:nvSpPr>
-          <p:cNvPr id="96259" name="Tijdelijke aanduiding voor notities 2"/>
+          <p:cNvPr id="95235" name="Tijdelijke aanduiding voor notities 2"/>
           <p:cNvSpPr>
             <a:spLocks noGrp="1"/>
           </p:cNvSpPr>
@@ -2690,13 +2668,35 @@
           <a:bodyPr/>
           <a:lstStyle/>
           <a:p>
+            <a:r>
+              <a:rPr lang="en-US"/>
+              <a:t>We will also write p,q </a:t>
+            </a:r>
+            <a:r>
+              <a:rPr lang="en-US">
+                <a:sym typeface="Symbol" pitchFamily="18" charset="2"/>
+              </a:rPr>
+              <a:t>  to mean all subsets of  that do </a:t>
+            </a:r>
+            <a:r>
+              <a:rPr lang="en-US" u="sng">
+                <a:sym typeface="Symbol" pitchFamily="18" charset="2"/>
+              </a:rPr>
+              <a:t>not</a:t>
+            </a:r>
+            <a:r>
+              <a:rPr lang="en-US">
+                <a:sym typeface="Symbol" pitchFamily="18" charset="2"/>
+              </a:rPr>
+              <a:t> contain both p and q.  Similarly we define p,q  .</a:t>
+            </a:r>
             <a:endParaRPr lang="nl-NL"/>
           </a:p>
         </p:txBody>
       </p:sp>
       <p:sp>
         <p:nvSpPr>
-          <p:cNvPr id="96260" name="Tijdelijke aanduiding voor dianummer 3"/>
+          <p:cNvPr id="95236" name="Tijdelijke aanduiding voor dianummer 3"/>
           <p:cNvSpPr>
             <a:spLocks noGrp="1"/>
           </p:cNvSpPr>
@@ -2711,10 +2711,10 @@
           <a:bodyPr/>
           <a:lstStyle/>
           <a:p>
-            <a:fld id="{98D1FDD3-9BC7-40AB-A70E-098DDEC92EE8}" type="slidenum">
+            <a:fld id="{CE9A4E9E-D1F3-4B67-86F8-09D73FBDAC66}" type="slidenum">
               <a:rPr lang="en-US" smtClean="0"/>
               <a:pPr/>
-              <a:t>32</a:t>
+              <a:t>31</a:t>
             </a:fld>
             <a:endParaRPr lang="en-US"/>
           </a:p>
@@ -2723,7 +2723,7 @@
     </p:spTree>
     <p:extLst>
       <p:ext uri="{BB962C8B-B14F-4D97-AF65-F5344CB8AC3E}">
-        <p14:creationId xmlns:p14="http://schemas.microsoft.com/office/powerpoint/2010/main" val="538147021"/>
+        <p14:creationId xmlns:p14="http://schemas.microsoft.com/office/powerpoint/2010/main" val="1044833220"/>
       </p:ext>
     </p:extLst>
   </p:cSld>
@@ -2752,7 +2752,7 @@
       </p:grpSpPr>
       <p:sp>
         <p:nvSpPr>
-          <p:cNvPr id="97282" name="Tijdelijke aanduiding voor dia-afbeelding 1"/>
+          <p:cNvPr id="96258" name="Tijdelijke aanduiding voor dia-afbeelding 1"/>
           <p:cNvSpPr>
             <a:spLocks noGrp="1" noRot="1" noChangeAspect="1" noTextEdit="1"/>
           </p:cNvSpPr>
@@ -2766,7 +2766,7 @@
       </p:sp>
       <p:sp>
         <p:nvSpPr>
-          <p:cNvPr id="97283" name="Tijdelijke aanduiding voor notities 2"/>
+          <p:cNvPr id="96259" name="Tijdelijke aanduiding voor notities 2"/>
           <p:cNvSpPr>
             <a:spLocks noGrp="1"/>
           </p:cNvSpPr>
@@ -2788,7 +2788,7 @@
       </p:sp>
       <p:sp>
         <p:nvSpPr>
-          <p:cNvPr id="97284" name="Tijdelijke aanduiding voor dianummer 3"/>
+          <p:cNvPr id="96260" name="Tijdelijke aanduiding voor dianummer 3"/>
           <p:cNvSpPr>
             <a:spLocks noGrp="1"/>
           </p:cNvSpPr>
@@ -2803,10 +2803,10 @@
           <a:bodyPr/>
           <a:lstStyle/>
           <a:p>
-            <a:fld id="{62A68318-C132-4604-A687-6DD865616B72}" type="slidenum">
+            <a:fld id="{98D1FDD3-9BC7-40AB-A70E-098DDEC92EE8}" type="slidenum">
               <a:rPr lang="en-US" smtClean="0"/>
               <a:pPr/>
-              <a:t>33</a:t>
+              <a:t>32</a:t>
             </a:fld>
             <a:endParaRPr lang="en-US"/>
           </a:p>
@@ -2815,7 +2815,7 @@
     </p:spTree>
     <p:extLst>
       <p:ext uri="{BB962C8B-B14F-4D97-AF65-F5344CB8AC3E}">
-        <p14:creationId xmlns:p14="http://schemas.microsoft.com/office/powerpoint/2010/main" val="1583344430"/>
+        <p14:creationId xmlns:p14="http://schemas.microsoft.com/office/powerpoint/2010/main" val="538147021"/>
       </p:ext>
     </p:extLst>
   </p:cSld>
@@ -2844,7 +2844,7 @@
       </p:grpSpPr>
       <p:sp>
         <p:nvSpPr>
-          <p:cNvPr id="98306" name="Tijdelijke aanduiding voor dia-afbeelding 1"/>
+          <p:cNvPr id="97282" name="Tijdelijke aanduiding voor dia-afbeelding 1"/>
           <p:cNvSpPr>
             <a:spLocks noGrp="1" noRot="1" noChangeAspect="1" noTextEdit="1"/>
           </p:cNvSpPr>
@@ -2858,7 +2858,7 @@
       </p:sp>
       <p:sp>
         <p:nvSpPr>
-          <p:cNvPr id="98307" name="Tijdelijke aanduiding voor notities 2"/>
+          <p:cNvPr id="97283" name="Tijdelijke aanduiding voor notities 2"/>
           <p:cNvSpPr>
             <a:spLocks noGrp="1"/>
           </p:cNvSpPr>
@@ -2874,182 +2874,13 @@
           <a:bodyPr/>
           <a:lstStyle/>
           <a:p>
-            <a:r>
-              <a:rPr lang="en-US" dirty="0">
-                <a:latin typeface="Arial" charset="0"/>
-                <a:cs typeface="Arial" charset="0"/>
-                <a:sym typeface="Symbol" pitchFamily="18" charset="2"/>
-              </a:rPr>
-              <a:t>(p U q)          =   p/\q  </a:t>
-            </a:r>
-            <a:r>
-              <a:rPr lang="en-US" b="1" dirty="0">
-                <a:latin typeface="Arial" charset="0"/>
-                <a:cs typeface="Arial" charset="0"/>
-                <a:sym typeface="Symbol" pitchFamily="18" charset="2"/>
-              </a:rPr>
-              <a:t>W</a:t>
-            </a:r>
-            <a:r>
-              <a:rPr lang="en-US" dirty="0">
-                <a:latin typeface="Arial" charset="0"/>
-                <a:cs typeface="Arial" charset="0"/>
-                <a:sym typeface="Symbol" pitchFamily="18" charset="2"/>
-              </a:rPr>
-              <a:t>  p /\ q</a:t>
-            </a:r>
-          </a:p>
-          <a:p>
-            <a:endParaRPr lang="nl-NL" dirty="0"/>
-          </a:p>
-          <a:p>
-            <a:r>
-              <a:rPr lang="nl-NL" dirty="0" err="1"/>
-              <a:t>which</a:t>
-            </a:r>
-            <a:r>
-              <a:rPr lang="nl-NL" dirty="0"/>
-              <a:t> </a:t>
-            </a:r>
-            <a:r>
-              <a:rPr lang="nl-NL" dirty="0" err="1"/>
-              <a:t>should</a:t>
-            </a:r>
-            <a:r>
-              <a:rPr lang="nl-NL" dirty="0"/>
-              <a:t> </a:t>
-            </a:r>
-            <a:r>
-              <a:rPr lang="nl-NL" dirty="0" err="1"/>
-              <a:t>also</a:t>
-            </a:r>
-            <a:r>
-              <a:rPr lang="nl-NL" dirty="0"/>
-              <a:t> </a:t>
-            </a:r>
-            <a:r>
-              <a:rPr lang="nl-NL" dirty="0" err="1"/>
-              <a:t>be</a:t>
-            </a:r>
-            <a:r>
-              <a:rPr lang="nl-NL" dirty="0"/>
-              <a:t> equivalent </a:t>
-            </a:r>
-            <a:r>
-              <a:rPr lang="nl-NL" dirty="0" err="1"/>
-              <a:t>to</a:t>
-            </a:r>
-            <a:r>
-              <a:rPr lang="nl-NL" dirty="0"/>
-              <a:t> </a:t>
-            </a:r>
-            <a:r>
-              <a:rPr lang="nl-NL" dirty="0" err="1"/>
-              <a:t>just</a:t>
-            </a:r>
-            <a:r>
-              <a:rPr lang="nl-NL" dirty="0"/>
-              <a:t> </a:t>
-            </a:r>
-            <a:r>
-              <a:rPr lang="en-US" dirty="0">
-                <a:latin typeface="Arial" charset="0"/>
-                <a:cs typeface="Arial" charset="0"/>
-                <a:sym typeface="Symbol" pitchFamily="18" charset="2"/>
-              </a:rPr>
-              <a:t>q  </a:t>
-            </a:r>
-            <a:r>
-              <a:rPr lang="en-US" b="1" dirty="0">
-                <a:latin typeface="Arial" charset="0"/>
-                <a:cs typeface="Arial" charset="0"/>
-                <a:sym typeface="Symbol" pitchFamily="18" charset="2"/>
-              </a:rPr>
-              <a:t>W</a:t>
-            </a:r>
-            <a:r>
-              <a:rPr lang="en-US" dirty="0">
-                <a:latin typeface="Arial" charset="0"/>
-                <a:cs typeface="Arial" charset="0"/>
-                <a:sym typeface="Symbol" pitchFamily="18" charset="2"/>
-              </a:rPr>
-              <a:t>  p /\ q</a:t>
-            </a:r>
-          </a:p>
-          <a:p>
-            <a:br>
-              <a:rPr lang="nl-NL" dirty="0"/>
-            </a:br>
-            <a:r>
-              <a:rPr lang="nl-NL" dirty="0" err="1"/>
-              <a:t>Either</a:t>
-            </a:r>
-            <a:r>
-              <a:rPr lang="nl-NL" dirty="0"/>
-              <a:t> q never </a:t>
-            </a:r>
-            <a:r>
-              <a:rPr lang="nl-NL" dirty="0" err="1"/>
-              <a:t>holds</a:t>
-            </a:r>
-            <a:r>
-              <a:rPr lang="nl-NL" dirty="0"/>
-              <a:t>; or p </a:t>
-            </a:r>
-            <a:r>
-              <a:rPr lang="nl-NL" dirty="0" err="1"/>
-              <a:t>becomes</a:t>
-            </a:r>
-            <a:r>
-              <a:rPr lang="nl-NL" dirty="0"/>
-              <a:t> </a:t>
-            </a:r>
-            <a:r>
-              <a:rPr lang="nl-NL" dirty="0" err="1"/>
-              <a:t>false</a:t>
-            </a:r>
-            <a:r>
-              <a:rPr lang="nl-NL" dirty="0"/>
-              <a:t> </a:t>
-            </a:r>
-            <a:r>
-              <a:rPr lang="nl-NL" dirty="0" err="1"/>
-              <a:t>too</a:t>
-            </a:r>
-            <a:r>
-              <a:rPr lang="nl-NL" dirty="0"/>
-              <a:t> </a:t>
-            </a:r>
-            <a:r>
-              <a:rPr lang="nl-NL" dirty="0" err="1"/>
-              <a:t>early</a:t>
-            </a:r>
-            <a:r>
-              <a:rPr lang="nl-NL" dirty="0"/>
-              <a:t> (without setting q </a:t>
-            </a:r>
-            <a:r>
-              <a:rPr lang="nl-NL" dirty="0" err="1"/>
-              <a:t>to</a:t>
-            </a:r>
-            <a:r>
-              <a:rPr lang="nl-NL" dirty="0"/>
-              <a:t> </a:t>
-            </a:r>
-            <a:r>
-              <a:rPr lang="nl-NL" dirty="0" err="1"/>
-              <a:t>true</a:t>
-            </a:r>
-            <a:r>
-              <a:rPr lang="nl-NL" dirty="0"/>
-              <a:t>)</a:t>
-            </a:r>
-          </a:p>
-        </p:txBody>
-      </p:sp>
-      <p:sp>
-        <p:nvSpPr>
-          <p:cNvPr id="98308" name="Tijdelijke aanduiding voor dianummer 3"/>
+            <a:endParaRPr lang="nl-NL"/>
+          </a:p>
+        </p:txBody>
+      </p:sp>
+      <p:sp>
+        <p:nvSpPr>
+          <p:cNvPr id="97284" name="Tijdelijke aanduiding voor dianummer 3"/>
           <p:cNvSpPr>
             <a:spLocks noGrp="1"/>
           </p:cNvSpPr>
@@ -3064,10 +2895,10 @@
           <a:bodyPr/>
           <a:lstStyle/>
           <a:p>
-            <a:fld id="{9BC36AAB-8E9D-4BF2-AEA8-9992888C1827}" type="slidenum">
+            <a:fld id="{62A68318-C132-4604-A687-6DD865616B72}" type="slidenum">
               <a:rPr lang="en-US" smtClean="0"/>
               <a:pPr/>
-              <a:t>34</a:t>
+              <a:t>33</a:t>
             </a:fld>
             <a:endParaRPr lang="en-US"/>
           </a:p>
@@ -3076,7 +2907,7 @@
     </p:spTree>
     <p:extLst>
       <p:ext uri="{BB962C8B-B14F-4D97-AF65-F5344CB8AC3E}">
-        <p14:creationId xmlns:p14="http://schemas.microsoft.com/office/powerpoint/2010/main" val="1799965033"/>
+        <p14:creationId xmlns:p14="http://schemas.microsoft.com/office/powerpoint/2010/main" val="1583344430"/>
       </p:ext>
     </p:extLst>
   </p:cSld>
@@ -3105,7 +2936,7 @@
       </p:grpSpPr>
       <p:sp>
         <p:nvSpPr>
-          <p:cNvPr id="99330" name="Tijdelijke aanduiding voor dia-afbeelding 1"/>
+          <p:cNvPr id="98306" name="Tijdelijke aanduiding voor dia-afbeelding 1"/>
           <p:cNvSpPr>
             <a:spLocks noGrp="1" noRot="1" noChangeAspect="1" noTextEdit="1"/>
           </p:cNvSpPr>
@@ -3119,7 +2950,7 @@
       </p:sp>
       <p:sp>
         <p:nvSpPr>
-          <p:cNvPr id="99331" name="Tijdelijke aanduiding voor notities 2"/>
+          <p:cNvPr id="98307" name="Tijdelijke aanduiding voor notities 2"/>
           <p:cNvSpPr>
             <a:spLocks noGrp="1"/>
           </p:cNvSpPr>
@@ -3135,13 +2966,182 @@
           <a:bodyPr/>
           <a:lstStyle/>
           <a:p>
-            <a:endParaRPr lang="nl-NL"/>
-          </a:p>
-        </p:txBody>
-      </p:sp>
-      <p:sp>
-        <p:nvSpPr>
-          <p:cNvPr id="99332" name="Tijdelijke aanduiding voor dianummer 3"/>
+            <a:r>
+              <a:rPr lang="en-US" dirty="0">
+                <a:latin typeface="Arial" charset="0"/>
+                <a:cs typeface="Arial" charset="0"/>
+                <a:sym typeface="Symbol" pitchFamily="18" charset="2"/>
+              </a:rPr>
+              <a:t>(p U q)          =   p/\q  </a:t>
+            </a:r>
+            <a:r>
+              <a:rPr lang="en-US" b="1" dirty="0">
+                <a:latin typeface="Arial" charset="0"/>
+                <a:cs typeface="Arial" charset="0"/>
+                <a:sym typeface="Symbol" pitchFamily="18" charset="2"/>
+              </a:rPr>
+              <a:t>W</a:t>
+            </a:r>
+            <a:r>
+              <a:rPr lang="en-US" dirty="0">
+                <a:latin typeface="Arial" charset="0"/>
+                <a:cs typeface="Arial" charset="0"/>
+                <a:sym typeface="Symbol" pitchFamily="18" charset="2"/>
+              </a:rPr>
+              <a:t>  p /\ q</a:t>
+            </a:r>
+          </a:p>
+          <a:p>
+            <a:endParaRPr lang="nl-NL" dirty="0"/>
+          </a:p>
+          <a:p>
+            <a:r>
+              <a:rPr lang="nl-NL" dirty="0" err="1"/>
+              <a:t>which</a:t>
+            </a:r>
+            <a:r>
+              <a:rPr lang="nl-NL" dirty="0"/>
+              <a:t> </a:t>
+            </a:r>
+            <a:r>
+              <a:rPr lang="nl-NL" dirty="0" err="1"/>
+              <a:t>should</a:t>
+            </a:r>
+            <a:r>
+              <a:rPr lang="nl-NL" dirty="0"/>
+              <a:t> </a:t>
+            </a:r>
+            <a:r>
+              <a:rPr lang="nl-NL" dirty="0" err="1"/>
+              <a:t>also</a:t>
+            </a:r>
+            <a:r>
+              <a:rPr lang="nl-NL" dirty="0"/>
+              <a:t> </a:t>
+            </a:r>
+            <a:r>
+              <a:rPr lang="nl-NL" dirty="0" err="1"/>
+              <a:t>be</a:t>
+            </a:r>
+            <a:r>
+              <a:rPr lang="nl-NL" dirty="0"/>
+              <a:t> equivalent </a:t>
+            </a:r>
+            <a:r>
+              <a:rPr lang="nl-NL" dirty="0" err="1"/>
+              <a:t>to</a:t>
+            </a:r>
+            <a:r>
+              <a:rPr lang="nl-NL" dirty="0"/>
+              <a:t> </a:t>
+            </a:r>
+            <a:r>
+              <a:rPr lang="nl-NL" dirty="0" err="1"/>
+              <a:t>just</a:t>
+            </a:r>
+            <a:r>
+              <a:rPr lang="nl-NL" dirty="0"/>
+              <a:t> </a:t>
+            </a:r>
+            <a:r>
+              <a:rPr lang="en-US" dirty="0">
+                <a:latin typeface="Arial" charset="0"/>
+                <a:cs typeface="Arial" charset="0"/>
+                <a:sym typeface="Symbol" pitchFamily="18" charset="2"/>
+              </a:rPr>
+              <a:t>q  </a:t>
+            </a:r>
+            <a:r>
+              <a:rPr lang="en-US" b="1" dirty="0">
+                <a:latin typeface="Arial" charset="0"/>
+                <a:cs typeface="Arial" charset="0"/>
+                <a:sym typeface="Symbol" pitchFamily="18" charset="2"/>
+              </a:rPr>
+              <a:t>W</a:t>
+            </a:r>
+            <a:r>
+              <a:rPr lang="en-US" dirty="0">
+                <a:latin typeface="Arial" charset="0"/>
+                <a:cs typeface="Arial" charset="0"/>
+                <a:sym typeface="Symbol" pitchFamily="18" charset="2"/>
+              </a:rPr>
+              <a:t>  p /\ q</a:t>
+            </a:r>
+          </a:p>
+          <a:p>
+            <a:br>
+              <a:rPr lang="nl-NL" dirty="0"/>
+            </a:br>
+            <a:r>
+              <a:rPr lang="nl-NL" dirty="0" err="1"/>
+              <a:t>Either</a:t>
+            </a:r>
+            <a:r>
+              <a:rPr lang="nl-NL" dirty="0"/>
+              <a:t> q never </a:t>
+            </a:r>
+            <a:r>
+              <a:rPr lang="nl-NL" dirty="0" err="1"/>
+              <a:t>holds</a:t>
+            </a:r>
+            <a:r>
+              <a:rPr lang="nl-NL" dirty="0"/>
+              <a:t>; or p </a:t>
+            </a:r>
+            <a:r>
+              <a:rPr lang="nl-NL" dirty="0" err="1"/>
+              <a:t>becomes</a:t>
+            </a:r>
+            <a:r>
+              <a:rPr lang="nl-NL" dirty="0"/>
+              <a:t> </a:t>
+            </a:r>
+            <a:r>
+              <a:rPr lang="nl-NL" dirty="0" err="1"/>
+              <a:t>false</a:t>
+            </a:r>
+            <a:r>
+              <a:rPr lang="nl-NL" dirty="0"/>
+              <a:t> </a:t>
+            </a:r>
+            <a:r>
+              <a:rPr lang="nl-NL" dirty="0" err="1"/>
+              <a:t>too</a:t>
+            </a:r>
+            <a:r>
+              <a:rPr lang="nl-NL" dirty="0"/>
+              <a:t> </a:t>
+            </a:r>
+            <a:r>
+              <a:rPr lang="nl-NL" dirty="0" err="1"/>
+              <a:t>early</a:t>
+            </a:r>
+            <a:r>
+              <a:rPr lang="nl-NL" dirty="0"/>
+              <a:t> (without setting q </a:t>
+            </a:r>
+            <a:r>
+              <a:rPr lang="nl-NL" dirty="0" err="1"/>
+              <a:t>to</a:t>
+            </a:r>
+            <a:r>
+              <a:rPr lang="nl-NL" dirty="0"/>
+              <a:t> </a:t>
+            </a:r>
+            <a:r>
+              <a:rPr lang="nl-NL" dirty="0" err="1"/>
+              <a:t>true</a:t>
+            </a:r>
+            <a:r>
+              <a:rPr lang="nl-NL" dirty="0"/>
+              <a:t>)</a:t>
+            </a:r>
+          </a:p>
+        </p:txBody>
+      </p:sp>
+      <p:sp>
+        <p:nvSpPr>
+          <p:cNvPr id="98308" name="Tijdelijke aanduiding voor dianummer 3"/>
           <p:cNvSpPr>
             <a:spLocks noGrp="1"/>
           </p:cNvSpPr>
@@ -3156,10 +3156,10 @@
           <a:bodyPr/>
           <a:lstStyle/>
           <a:p>
-            <a:fld id="{9B28A700-4857-448C-B8A1-7D72A2A13606}" type="slidenum">
+            <a:fld id="{9BC36AAB-8E9D-4BF2-AEA8-9992888C1827}" type="slidenum">
               <a:rPr lang="en-US" smtClean="0"/>
               <a:pPr/>
-              <a:t>35</a:t>
+              <a:t>34</a:t>
             </a:fld>
             <a:endParaRPr lang="en-US"/>
           </a:p>
@@ -3168,7 +3168,7 @@
     </p:spTree>
     <p:extLst>
       <p:ext uri="{BB962C8B-B14F-4D97-AF65-F5344CB8AC3E}">
-        <p14:creationId xmlns:p14="http://schemas.microsoft.com/office/powerpoint/2010/main" val="410174342"/>
+        <p14:creationId xmlns:p14="http://schemas.microsoft.com/office/powerpoint/2010/main" val="1799965033"/>
       </p:ext>
     </p:extLst>
   </p:cSld>
@@ -3290,7 +3290,7 @@
       </p:grpSpPr>
       <p:sp>
         <p:nvSpPr>
-          <p:cNvPr id="100354" name="Tijdelijke aanduiding voor dia-afbeelding 1"/>
+          <p:cNvPr id="99330" name="Tijdelijke aanduiding voor dia-afbeelding 1"/>
           <p:cNvSpPr>
             <a:spLocks noGrp="1" noRot="1" noChangeAspect="1" noTextEdit="1"/>
           </p:cNvSpPr>
@@ -3304,7 +3304,7 @@
       </p:sp>
       <p:sp>
         <p:nvSpPr>
-          <p:cNvPr id="100355" name="Tijdelijke aanduiding voor notities 2"/>
+          <p:cNvPr id="99331" name="Tijdelijke aanduiding voor notities 2"/>
           <p:cNvSpPr>
             <a:spLocks noGrp="1"/>
           </p:cNvSpPr>
@@ -3320,55 +3320,13 @@
           <a:bodyPr/>
           <a:lstStyle/>
           <a:p>
-            <a:r>
-              <a:rPr lang="nl-NL" dirty="0"/>
-              <a:t>(p U q) U r   </a:t>
-            </a:r>
-            <a:r>
-              <a:rPr lang="nl-NL" dirty="0" err="1"/>
-              <a:t>convert</a:t>
-            </a:r>
-            <a:r>
-              <a:rPr lang="nl-NL" dirty="0"/>
-              <a:t> </a:t>
-            </a:r>
-            <a:r>
-              <a:rPr lang="nl-NL" dirty="0" err="1"/>
-              <a:t>to</a:t>
-            </a:r>
-            <a:endParaRPr lang="nl-NL" dirty="0"/>
-          </a:p>
-          <a:p>
-            <a:r>
-              <a:rPr lang="nl-NL" dirty="0"/>
-              <a:t>   * r, or</a:t>
-            </a:r>
-          </a:p>
-          <a:p>
-            <a:r>
-              <a:rPr lang="nl-NL" dirty="0"/>
-              <a:t>   * (p \/ q)  U  (q /\  </a:t>
-            </a:r>
-            <a:r>
-              <a:rPr lang="nl-NL" dirty="0" err="1"/>
-              <a:t>Xr</a:t>
-            </a:r>
-            <a:r>
-              <a:rPr lang="nl-NL" dirty="0"/>
-              <a:t>)</a:t>
-            </a:r>
-          </a:p>
-          <a:p>
-            <a:r>
-              <a:rPr lang="nl-NL" dirty="0"/>
-              <a:t>  *  (p \/ q)  U  (p /\ ~q /\ X(r /\ (p U q)))</a:t>
-            </a:r>
-          </a:p>
-        </p:txBody>
-      </p:sp>
-      <p:sp>
-        <p:nvSpPr>
-          <p:cNvPr id="100356" name="Tijdelijke aanduiding voor dianummer 3"/>
+            <a:endParaRPr lang="nl-NL"/>
+          </a:p>
+        </p:txBody>
+      </p:sp>
+      <p:sp>
+        <p:nvSpPr>
+          <p:cNvPr id="99332" name="Tijdelijke aanduiding voor dianummer 3"/>
           <p:cNvSpPr>
             <a:spLocks noGrp="1"/>
           </p:cNvSpPr>
@@ -3383,10 +3341,10 @@
           <a:bodyPr/>
           <a:lstStyle/>
           <a:p>
-            <a:fld id="{905EC075-D3C7-48C8-805B-4AC612B0E8B2}" type="slidenum">
+            <a:fld id="{9B28A700-4857-448C-B8A1-7D72A2A13606}" type="slidenum">
               <a:rPr lang="en-US" smtClean="0"/>
               <a:pPr/>
-              <a:t>36</a:t>
+              <a:t>35</a:t>
             </a:fld>
             <a:endParaRPr lang="en-US"/>
           </a:p>
@@ -3395,7 +3353,7 @@
     </p:spTree>
     <p:extLst>
       <p:ext uri="{BB962C8B-B14F-4D97-AF65-F5344CB8AC3E}">
-        <p14:creationId xmlns:p14="http://schemas.microsoft.com/office/powerpoint/2010/main" val="377659124"/>
+        <p14:creationId xmlns:p14="http://schemas.microsoft.com/office/powerpoint/2010/main" val="410174342"/>
       </p:ext>
     </p:extLst>
   </p:cSld>
@@ -3424,9 +3382,87 @@
       </p:grpSpPr>
       <p:sp>
         <p:nvSpPr>
-          <p:cNvPr id="101378" name="Rectangle 7"/>
+          <p:cNvPr id="100354" name="Tijdelijke aanduiding voor dia-afbeelding 1"/>
           <p:cNvSpPr>
-            <a:spLocks noGrp="1" noChangeArrowheads="1"/>
+            <a:spLocks noGrp="1" noRot="1" noChangeAspect="1" noTextEdit="1"/>
+          </p:cNvSpPr>
+          <p:nvPr>
+            <p:ph type="sldImg"/>
+          </p:nvPr>
+        </p:nvSpPr>
+        <p:spPr>
+          <a:ln/>
+        </p:spPr>
+      </p:sp>
+      <p:sp>
+        <p:nvSpPr>
+          <p:cNvPr id="100355" name="Tijdelijke aanduiding voor notities 2"/>
+          <p:cNvSpPr>
+            <a:spLocks noGrp="1"/>
+          </p:cNvSpPr>
+          <p:nvPr>
+            <p:ph type="body" idx="1"/>
+          </p:nvPr>
+        </p:nvSpPr>
+        <p:spPr>
+          <a:noFill/>
+          <a:ln/>
+        </p:spPr>
+        <p:txBody>
+          <a:bodyPr/>
+          <a:lstStyle/>
+          <a:p>
+            <a:r>
+              <a:rPr lang="nl-NL" dirty="0"/>
+              <a:t>(p U q) U r   </a:t>
+            </a:r>
+            <a:r>
+              <a:rPr lang="nl-NL" dirty="0" err="1"/>
+              <a:t>convert</a:t>
+            </a:r>
+            <a:r>
+              <a:rPr lang="nl-NL" dirty="0"/>
+              <a:t> </a:t>
+            </a:r>
+            <a:r>
+              <a:rPr lang="nl-NL" dirty="0" err="1"/>
+              <a:t>to</a:t>
+            </a:r>
+            <a:endParaRPr lang="nl-NL" dirty="0"/>
+          </a:p>
+          <a:p>
+            <a:r>
+              <a:rPr lang="nl-NL" dirty="0"/>
+              <a:t>   * r, or</a:t>
+            </a:r>
+          </a:p>
+          <a:p>
+            <a:r>
+              <a:rPr lang="nl-NL" dirty="0"/>
+              <a:t>   * (p \/ q)  U  (q /\  </a:t>
+            </a:r>
+            <a:r>
+              <a:rPr lang="nl-NL" dirty="0" err="1"/>
+              <a:t>Xr</a:t>
+            </a:r>
+            <a:r>
+              <a:rPr lang="nl-NL" dirty="0"/>
+              <a:t>)</a:t>
+            </a:r>
+          </a:p>
+          <a:p>
+            <a:r>
+              <a:rPr lang="nl-NL" dirty="0"/>
+              <a:t>  *  (p \/ q)  U  (p /\ ~q /\ X(r /\ (p U q)))</a:t>
+            </a:r>
+          </a:p>
+        </p:txBody>
+      </p:sp>
+      <p:sp>
+        <p:nvSpPr>
+          <p:cNvPr id="100356" name="Tijdelijke aanduiding voor dianummer 3"/>
+          <p:cNvSpPr>
+            <a:spLocks noGrp="1"/>
           </p:cNvSpPr>
           <p:nvPr>
             <p:ph type="sldNum" sz="quarter" idx="5"/>
@@ -3439,56 +3475,19 @@
           <a:bodyPr/>
           <a:lstStyle/>
           <a:p>
-            <a:fld id="{6F18534A-07C0-4C7F-B817-0AFFA413F30D}" type="slidenum">
+            <a:fld id="{905EC075-D3C7-48C8-805B-4AC612B0E8B2}" type="slidenum">
               <a:rPr lang="en-US" smtClean="0"/>
               <a:pPr/>
-              <a:t>37</a:t>
+              <a:t>36</a:t>
             </a:fld>
             <a:endParaRPr lang="en-US"/>
-          </a:p>
-        </p:txBody>
-      </p:sp>
-      <p:sp>
-        <p:nvSpPr>
-          <p:cNvPr id="101379" name="Rectangle 2"/>
-          <p:cNvSpPr>
-            <a:spLocks noGrp="1" noRot="1" noChangeAspect="1" noChangeArrowheads="1" noTextEdit="1"/>
-          </p:cNvSpPr>
-          <p:nvPr>
-            <p:ph type="sldImg"/>
-          </p:nvPr>
-        </p:nvSpPr>
-        <p:spPr>
-          <a:ln/>
-        </p:spPr>
-      </p:sp>
-      <p:sp>
-        <p:nvSpPr>
-          <p:cNvPr id="101380" name="Rectangle 3"/>
-          <p:cNvSpPr>
-            <a:spLocks noGrp="1" noChangeArrowheads="1"/>
-          </p:cNvSpPr>
-          <p:nvPr>
-            <p:ph type="body" idx="1"/>
-          </p:nvPr>
-        </p:nvSpPr>
-        <p:spPr>
-          <a:noFill/>
-          <a:ln/>
-        </p:spPr>
-        <p:txBody>
-          <a:bodyPr/>
-          <a:lstStyle/>
-          <a:p>
-            <a:pPr eaLnBrk="1" hangingPunct="1"/>
-            <a:endParaRPr lang="nl-NL" dirty="0"/>
           </a:p>
         </p:txBody>
       </p:sp>
     </p:spTree>
     <p:extLst>
       <p:ext uri="{BB962C8B-B14F-4D97-AF65-F5344CB8AC3E}">
-        <p14:creationId xmlns:p14="http://schemas.microsoft.com/office/powerpoint/2010/main" val="1502720183"/>
+        <p14:creationId xmlns:p14="http://schemas.microsoft.com/office/powerpoint/2010/main" val="377659124"/>
       </p:ext>
     </p:extLst>
   </p:cSld>
@@ -3517,9 +3516,35 @@
       </p:grpSpPr>
       <p:sp>
         <p:nvSpPr>
-          <p:cNvPr id="102402" name="Tijdelijke aanduiding voor dia-afbeelding 1"/>
+          <p:cNvPr id="101378" name="Rectangle 7"/>
           <p:cNvSpPr>
-            <a:spLocks noGrp="1" noRot="1" noChangeAspect="1" noTextEdit="1"/>
+            <a:spLocks noGrp="1" noChangeArrowheads="1"/>
+          </p:cNvSpPr>
+          <p:nvPr>
+            <p:ph type="sldNum" sz="quarter" idx="5"/>
+          </p:nvPr>
+        </p:nvSpPr>
+        <p:spPr>
+          <a:noFill/>
+        </p:spPr>
+        <p:txBody>
+          <a:bodyPr/>
+          <a:lstStyle/>
+          <a:p>
+            <a:fld id="{6F18534A-07C0-4C7F-B817-0AFFA413F30D}" type="slidenum">
+              <a:rPr lang="en-US" smtClean="0"/>
+              <a:pPr/>
+              <a:t>37</a:t>
+            </a:fld>
+            <a:endParaRPr lang="en-US"/>
+          </a:p>
+        </p:txBody>
+      </p:sp>
+      <p:sp>
+        <p:nvSpPr>
+          <p:cNvPr id="101379" name="Rectangle 2"/>
+          <p:cNvSpPr>
+            <a:spLocks noGrp="1" noRot="1" noChangeAspect="1" noChangeArrowheads="1" noTextEdit="1"/>
           </p:cNvSpPr>
           <p:nvPr>
             <p:ph type="sldImg"/>
@@ -3531,9 +3556,9 @@
       </p:sp>
       <p:sp>
         <p:nvSpPr>
-          <p:cNvPr id="102403" name="Tijdelijke aanduiding voor notities 2"/>
+          <p:cNvPr id="101380" name="Rectangle 3"/>
           <p:cNvSpPr>
-            <a:spLocks noGrp="1"/>
+            <a:spLocks noGrp="1" noChangeArrowheads="1"/>
           </p:cNvSpPr>
           <p:nvPr>
             <p:ph type="body" idx="1"/>
@@ -3547,40 +3572,15 @@
           <a:bodyPr/>
           <a:lstStyle/>
           <a:p>
-            <a:endParaRPr lang="nl-NL"/>
-          </a:p>
-        </p:txBody>
-      </p:sp>
-      <p:sp>
-        <p:nvSpPr>
-          <p:cNvPr id="102404" name="Tijdelijke aanduiding voor dianummer 3"/>
-          <p:cNvSpPr>
-            <a:spLocks noGrp="1"/>
-          </p:cNvSpPr>
-          <p:nvPr>
-            <p:ph type="sldNum" sz="quarter" idx="5"/>
-          </p:nvPr>
-        </p:nvSpPr>
-        <p:spPr>
-          <a:noFill/>
-        </p:spPr>
-        <p:txBody>
-          <a:bodyPr/>
-          <a:lstStyle/>
-          <a:p>
-            <a:fld id="{B6A0C89C-0291-496B-A898-C39B039F48B1}" type="slidenum">
-              <a:rPr lang="en-US" smtClean="0"/>
-              <a:pPr/>
-              <a:t>38</a:t>
-            </a:fld>
-            <a:endParaRPr lang="en-US"/>
+            <a:pPr eaLnBrk="1" hangingPunct="1"/>
+            <a:endParaRPr lang="nl-NL" dirty="0"/>
           </a:p>
         </p:txBody>
       </p:sp>
     </p:spTree>
     <p:extLst>
       <p:ext uri="{BB962C8B-B14F-4D97-AF65-F5344CB8AC3E}">
-        <p14:creationId xmlns:p14="http://schemas.microsoft.com/office/powerpoint/2010/main" val="95980263"/>
+        <p14:creationId xmlns:p14="http://schemas.microsoft.com/office/powerpoint/2010/main" val="1502720183"/>
       </p:ext>
     </p:extLst>
   </p:cSld>
@@ -3609,7 +3609,7 @@
       </p:grpSpPr>
       <p:sp>
         <p:nvSpPr>
-          <p:cNvPr id="103426" name="Tijdelijke aanduiding voor dia-afbeelding 1"/>
+          <p:cNvPr id="102402" name="Tijdelijke aanduiding voor dia-afbeelding 1"/>
           <p:cNvSpPr>
             <a:spLocks noGrp="1" noRot="1" noChangeAspect="1" noTextEdit="1"/>
           </p:cNvSpPr>
@@ -3623,7 +3623,7 @@
       </p:sp>
       <p:sp>
         <p:nvSpPr>
-          <p:cNvPr id="103427" name="Tijdelijke aanduiding voor notities 2"/>
+          <p:cNvPr id="102403" name="Tijdelijke aanduiding voor notities 2"/>
           <p:cNvSpPr>
             <a:spLocks noGrp="1"/>
           </p:cNvSpPr>
@@ -3639,13 +3639,13 @@
           <a:bodyPr/>
           <a:lstStyle/>
           <a:p>
-            <a:endParaRPr lang="nl-NL" dirty="0"/>
-          </a:p>
-        </p:txBody>
-      </p:sp>
-      <p:sp>
-        <p:nvSpPr>
-          <p:cNvPr id="103428" name="Tijdelijke aanduiding voor dianummer 3"/>
+            <a:endParaRPr lang="nl-NL"/>
+          </a:p>
+        </p:txBody>
+      </p:sp>
+      <p:sp>
+        <p:nvSpPr>
+          <p:cNvPr id="102404" name="Tijdelijke aanduiding voor dianummer 3"/>
           <p:cNvSpPr>
             <a:spLocks noGrp="1"/>
           </p:cNvSpPr>
@@ -3660,10 +3660,10 @@
           <a:bodyPr/>
           <a:lstStyle/>
           <a:p>
-            <a:fld id="{266B9EA1-B225-4913-A847-E6C9DA61B5E7}" type="slidenum">
+            <a:fld id="{B6A0C89C-0291-496B-A898-C39B039F48B1}" type="slidenum">
               <a:rPr lang="en-US" smtClean="0"/>
               <a:pPr/>
-              <a:t>39</a:t>
+              <a:t>38</a:t>
             </a:fld>
             <a:endParaRPr lang="en-US"/>
           </a:p>
@@ -3672,7 +3672,7 @@
     </p:spTree>
     <p:extLst>
       <p:ext uri="{BB962C8B-B14F-4D97-AF65-F5344CB8AC3E}">
-        <p14:creationId xmlns:p14="http://schemas.microsoft.com/office/powerpoint/2010/main" val="380061344"/>
+        <p14:creationId xmlns:p14="http://schemas.microsoft.com/office/powerpoint/2010/main" val="95980263"/>
       </p:ext>
     </p:extLst>
   </p:cSld>
@@ -3701,7 +3701,7 @@
       </p:grpSpPr>
       <p:sp>
         <p:nvSpPr>
-          <p:cNvPr id="104450" name="Tijdelijke aanduiding voor dia-afbeelding 1"/>
+          <p:cNvPr id="103426" name="Tijdelijke aanduiding voor dia-afbeelding 1"/>
           <p:cNvSpPr>
             <a:spLocks noGrp="1" noRot="1" noChangeAspect="1" noTextEdit="1"/>
           </p:cNvSpPr>
@@ -3715,7 +3715,7 @@
       </p:sp>
       <p:sp>
         <p:nvSpPr>
-          <p:cNvPr id="104451" name="Tijdelijke aanduiding voor notities 2"/>
+          <p:cNvPr id="103427" name="Tijdelijke aanduiding voor notities 2"/>
           <p:cNvSpPr>
             <a:spLocks noGrp="1"/>
           </p:cNvSpPr>
@@ -3731,13 +3731,13 @@
           <a:bodyPr/>
           <a:lstStyle/>
           <a:p>
-            <a:endParaRPr lang="nl-NL"/>
-          </a:p>
-        </p:txBody>
-      </p:sp>
-      <p:sp>
-        <p:nvSpPr>
-          <p:cNvPr id="104452" name="Tijdelijke aanduiding voor dianummer 3"/>
+            <a:endParaRPr lang="nl-NL" dirty="0"/>
+          </a:p>
+        </p:txBody>
+      </p:sp>
+      <p:sp>
+        <p:nvSpPr>
+          <p:cNvPr id="103428" name="Tijdelijke aanduiding voor dianummer 3"/>
           <p:cNvSpPr>
             <a:spLocks noGrp="1"/>
           </p:cNvSpPr>
@@ -3752,10 +3752,10 @@
           <a:bodyPr/>
           <a:lstStyle/>
           <a:p>
-            <a:fld id="{6C4F49A9-162C-4A8C-93B4-95768DEB562D}" type="slidenum">
+            <a:fld id="{266B9EA1-B225-4913-A847-E6C9DA61B5E7}" type="slidenum">
               <a:rPr lang="en-US" smtClean="0"/>
               <a:pPr/>
-              <a:t>40</a:t>
+              <a:t>39</a:t>
             </a:fld>
             <a:endParaRPr lang="en-US"/>
           </a:p>
@@ -3764,7 +3764,7 @@
     </p:spTree>
     <p:extLst>
       <p:ext uri="{BB962C8B-B14F-4D97-AF65-F5344CB8AC3E}">
-        <p14:creationId xmlns:p14="http://schemas.microsoft.com/office/powerpoint/2010/main" val="1074642430"/>
+        <p14:creationId xmlns:p14="http://schemas.microsoft.com/office/powerpoint/2010/main" val="380061344"/>
       </p:ext>
     </p:extLst>
   </p:cSld>
@@ -3793,7 +3793,7 @@
       </p:grpSpPr>
       <p:sp>
         <p:nvSpPr>
-          <p:cNvPr id="105474" name="Tijdelijke aanduiding voor dia-afbeelding 1"/>
+          <p:cNvPr id="104450" name="Tijdelijke aanduiding voor dia-afbeelding 1"/>
           <p:cNvSpPr>
             <a:spLocks noGrp="1" noRot="1" noChangeAspect="1" noTextEdit="1"/>
           </p:cNvSpPr>
@@ -3807,7 +3807,7 @@
       </p:sp>
       <p:sp>
         <p:nvSpPr>
-          <p:cNvPr id="105475" name="Tijdelijke aanduiding voor notities 2"/>
+          <p:cNvPr id="104451" name="Tijdelijke aanduiding voor notities 2"/>
           <p:cNvSpPr>
             <a:spLocks noGrp="1"/>
           </p:cNvSpPr>
@@ -3829,7 +3829,7 @@
       </p:sp>
       <p:sp>
         <p:nvSpPr>
-          <p:cNvPr id="105476" name="Tijdelijke aanduiding voor dianummer 3"/>
+          <p:cNvPr id="104452" name="Tijdelijke aanduiding voor dianummer 3"/>
           <p:cNvSpPr>
             <a:spLocks noGrp="1"/>
           </p:cNvSpPr>
@@ -3844,10 +3844,10 @@
           <a:bodyPr/>
           <a:lstStyle/>
           <a:p>
-            <a:fld id="{A1A2BF66-92EA-4A31-BF60-2D9EEA6A122D}" type="slidenum">
+            <a:fld id="{6C4F49A9-162C-4A8C-93B4-95768DEB562D}" type="slidenum">
               <a:rPr lang="en-US" smtClean="0"/>
               <a:pPr/>
-              <a:t>42</a:t>
+              <a:t>40</a:t>
             </a:fld>
             <a:endParaRPr lang="en-US"/>
           </a:p>
@@ -3856,7 +3856,7 @@
     </p:spTree>
     <p:extLst>
       <p:ext uri="{BB962C8B-B14F-4D97-AF65-F5344CB8AC3E}">
-        <p14:creationId xmlns:p14="http://schemas.microsoft.com/office/powerpoint/2010/main" val="1177849740"/>
+        <p14:creationId xmlns:p14="http://schemas.microsoft.com/office/powerpoint/2010/main" val="1074642430"/>
       </p:ext>
     </p:extLst>
   </p:cSld>
@@ -3885,9 +3885,45 @@
       </p:grpSpPr>
       <p:sp>
         <p:nvSpPr>
-          <p:cNvPr id="106498" name="Rectangle 7"/>
+          <p:cNvPr id="105474" name="Tijdelijke aanduiding voor dia-afbeelding 1"/>
           <p:cNvSpPr>
-            <a:spLocks noGrp="1" noChangeArrowheads="1"/>
+            <a:spLocks noGrp="1" noRot="1" noChangeAspect="1" noTextEdit="1"/>
+          </p:cNvSpPr>
+          <p:nvPr>
+            <p:ph type="sldImg"/>
+          </p:nvPr>
+        </p:nvSpPr>
+        <p:spPr>
+          <a:ln/>
+        </p:spPr>
+      </p:sp>
+      <p:sp>
+        <p:nvSpPr>
+          <p:cNvPr id="105475" name="Tijdelijke aanduiding voor notities 2"/>
+          <p:cNvSpPr>
+            <a:spLocks noGrp="1"/>
+          </p:cNvSpPr>
+          <p:nvPr>
+            <p:ph type="body" idx="1"/>
+          </p:nvPr>
+        </p:nvSpPr>
+        <p:spPr>
+          <a:noFill/>
+          <a:ln/>
+        </p:spPr>
+        <p:txBody>
+          <a:bodyPr/>
+          <a:lstStyle/>
+          <a:p>
+            <a:endParaRPr lang="nl-NL"/>
+          </a:p>
+        </p:txBody>
+      </p:sp>
+      <p:sp>
+        <p:nvSpPr>
+          <p:cNvPr id="105476" name="Tijdelijke aanduiding voor dianummer 3"/>
+          <p:cNvSpPr>
+            <a:spLocks noGrp="1"/>
           </p:cNvSpPr>
           <p:nvPr>
             <p:ph type="sldNum" sz="quarter" idx="5"/>
@@ -3900,56 +3936,19 @@
           <a:bodyPr/>
           <a:lstStyle/>
           <a:p>
-            <a:fld id="{4768AE87-7159-4328-B518-3F9E216D8005}" type="slidenum">
+            <a:fld id="{A1A2BF66-92EA-4A31-BF60-2D9EEA6A122D}" type="slidenum">
               <a:rPr lang="en-US" smtClean="0"/>
               <a:pPr/>
-              <a:t>43</a:t>
+              <a:t>42</a:t>
             </a:fld>
             <a:endParaRPr lang="en-US"/>
-          </a:p>
-        </p:txBody>
-      </p:sp>
-      <p:sp>
-        <p:nvSpPr>
-          <p:cNvPr id="106499" name="Rectangle 2"/>
-          <p:cNvSpPr>
-            <a:spLocks noGrp="1" noRot="1" noChangeAspect="1" noChangeArrowheads="1" noTextEdit="1"/>
-          </p:cNvSpPr>
-          <p:nvPr>
-            <p:ph type="sldImg"/>
-          </p:nvPr>
-        </p:nvSpPr>
-        <p:spPr>
-          <a:ln/>
-        </p:spPr>
-      </p:sp>
-      <p:sp>
-        <p:nvSpPr>
-          <p:cNvPr id="106500" name="Rectangle 3"/>
-          <p:cNvSpPr>
-            <a:spLocks noGrp="1" noChangeArrowheads="1"/>
-          </p:cNvSpPr>
-          <p:nvPr>
-            <p:ph type="body" idx="1"/>
-          </p:nvPr>
-        </p:nvSpPr>
-        <p:spPr>
-          <a:noFill/>
-          <a:ln/>
-        </p:spPr>
-        <p:txBody>
-          <a:bodyPr/>
-          <a:lstStyle/>
-          <a:p>
-            <a:pPr eaLnBrk="1" hangingPunct="1"/>
-            <a:endParaRPr lang="nl-NL"/>
           </a:p>
         </p:txBody>
       </p:sp>
     </p:spTree>
     <p:extLst>
       <p:ext uri="{BB962C8B-B14F-4D97-AF65-F5344CB8AC3E}">
-        <p14:creationId xmlns:p14="http://schemas.microsoft.com/office/powerpoint/2010/main" val="616322134"/>
+        <p14:creationId xmlns:p14="http://schemas.microsoft.com/office/powerpoint/2010/main" val="1177849740"/>
       </p:ext>
     </p:extLst>
   </p:cSld>
@@ -3978,7 +3977,7 @@
       </p:grpSpPr>
       <p:sp>
         <p:nvSpPr>
-          <p:cNvPr id="107522" name="Rectangle 7"/>
+          <p:cNvPr id="106498" name="Rectangle 7"/>
           <p:cNvSpPr>
             <a:spLocks noGrp="1" noChangeArrowheads="1"/>
           </p:cNvSpPr>
@@ -3993,10 +3992,10 @@
           <a:bodyPr/>
           <a:lstStyle/>
           <a:p>
-            <a:fld id="{BC7F5079-B626-426E-9B91-F239217B8397}" type="slidenum">
+            <a:fld id="{4768AE87-7159-4328-B518-3F9E216D8005}" type="slidenum">
               <a:rPr lang="en-US" smtClean="0"/>
               <a:pPr/>
-              <a:t>44</a:t>
+              <a:t>43</a:t>
             </a:fld>
             <a:endParaRPr lang="en-US"/>
           </a:p>
@@ -4004,7 +4003,7 @@
       </p:sp>
       <p:sp>
         <p:nvSpPr>
-          <p:cNvPr id="107523" name="Rectangle 2"/>
+          <p:cNvPr id="106499" name="Rectangle 2"/>
           <p:cNvSpPr>
             <a:spLocks noGrp="1" noRot="1" noChangeAspect="1" noChangeArrowheads="1" noTextEdit="1"/>
           </p:cNvSpPr>
@@ -4018,7 +4017,7 @@
       </p:sp>
       <p:sp>
         <p:nvSpPr>
-          <p:cNvPr id="107524" name="Rectangle 3"/>
+          <p:cNvPr id="106500" name="Rectangle 3"/>
           <p:cNvSpPr>
             <a:spLocks noGrp="1" noChangeArrowheads="1"/>
           </p:cNvSpPr>
@@ -4042,7 +4041,7 @@
     </p:spTree>
     <p:extLst>
       <p:ext uri="{BB962C8B-B14F-4D97-AF65-F5344CB8AC3E}">
-        <p14:creationId xmlns:p14="http://schemas.microsoft.com/office/powerpoint/2010/main" val="1212476657"/>
+        <p14:creationId xmlns:p14="http://schemas.microsoft.com/office/powerpoint/2010/main" val="616322134"/>
       </p:ext>
     </p:extLst>
   </p:cSld>
@@ -4071,7 +4070,7 @@
       </p:grpSpPr>
       <p:sp>
         <p:nvSpPr>
-          <p:cNvPr id="108546" name="Rectangle 7"/>
+          <p:cNvPr id="107522" name="Rectangle 7"/>
           <p:cNvSpPr>
             <a:spLocks noGrp="1" noChangeArrowheads="1"/>
           </p:cNvSpPr>
@@ -4086,10 +4085,10 @@
           <a:bodyPr/>
           <a:lstStyle/>
           <a:p>
-            <a:fld id="{C7F41B37-5C23-4400-8EE0-1E71919A8AE8}" type="slidenum">
+            <a:fld id="{BC7F5079-B626-426E-9B91-F239217B8397}" type="slidenum">
               <a:rPr lang="en-US" smtClean="0"/>
               <a:pPr/>
-              <a:t>45</a:t>
+              <a:t>44</a:t>
             </a:fld>
             <a:endParaRPr lang="en-US"/>
           </a:p>
@@ -4097,7 +4096,7 @@
       </p:sp>
       <p:sp>
         <p:nvSpPr>
-          <p:cNvPr id="108547" name="Rectangle 2"/>
+          <p:cNvPr id="107523" name="Rectangle 2"/>
           <p:cNvSpPr>
             <a:spLocks noGrp="1" noRot="1" noChangeAspect="1" noChangeArrowheads="1" noTextEdit="1"/>
           </p:cNvSpPr>
@@ -4111,7 +4110,7 @@
       </p:sp>
       <p:sp>
         <p:nvSpPr>
-          <p:cNvPr id="108548" name="Rectangle 3"/>
+          <p:cNvPr id="107524" name="Rectangle 3"/>
           <p:cNvSpPr>
             <a:spLocks noGrp="1" noChangeArrowheads="1"/>
           </p:cNvSpPr>
@@ -4135,7 +4134,7 @@
     </p:spTree>
     <p:extLst>
       <p:ext uri="{BB962C8B-B14F-4D97-AF65-F5344CB8AC3E}">
-        <p14:creationId xmlns:p14="http://schemas.microsoft.com/office/powerpoint/2010/main" val="622847816"/>
+        <p14:creationId xmlns:p14="http://schemas.microsoft.com/office/powerpoint/2010/main" val="1212476657"/>
       </p:ext>
     </p:extLst>
   </p:cSld>
@@ -4164,9 +4163,35 @@
       </p:grpSpPr>
       <p:sp>
         <p:nvSpPr>
-          <p:cNvPr id="109570" name="Tijdelijke aanduiding voor dia-afbeelding 1"/>
+          <p:cNvPr id="108546" name="Rectangle 7"/>
           <p:cNvSpPr>
-            <a:spLocks noGrp="1" noRot="1" noChangeAspect="1" noTextEdit="1"/>
+            <a:spLocks noGrp="1" noChangeArrowheads="1"/>
+          </p:cNvSpPr>
+          <p:nvPr>
+            <p:ph type="sldNum" sz="quarter" idx="5"/>
+          </p:nvPr>
+        </p:nvSpPr>
+        <p:spPr>
+          <a:noFill/>
+        </p:spPr>
+        <p:txBody>
+          <a:bodyPr/>
+          <a:lstStyle/>
+          <a:p>
+            <a:fld id="{C7F41B37-5C23-4400-8EE0-1E71919A8AE8}" type="slidenum">
+              <a:rPr lang="en-US" smtClean="0"/>
+              <a:pPr/>
+              <a:t>45</a:t>
+            </a:fld>
+            <a:endParaRPr lang="en-US"/>
+          </a:p>
+        </p:txBody>
+      </p:sp>
+      <p:sp>
+        <p:nvSpPr>
+          <p:cNvPr id="108547" name="Rectangle 2"/>
+          <p:cNvSpPr>
+            <a:spLocks noGrp="1" noRot="1" noChangeAspect="1" noChangeArrowheads="1" noTextEdit="1"/>
           </p:cNvSpPr>
           <p:nvPr>
             <p:ph type="sldImg"/>
@@ -4178,9 +4203,9 @@
       </p:sp>
       <p:sp>
         <p:nvSpPr>
-          <p:cNvPr id="109571" name="Tijdelijke aanduiding voor notities 2"/>
+          <p:cNvPr id="108548" name="Rectangle 3"/>
           <p:cNvSpPr>
-            <a:spLocks noGrp="1"/>
+            <a:spLocks noGrp="1" noChangeArrowheads="1"/>
           </p:cNvSpPr>
           <p:nvPr>
             <p:ph type="body" idx="1"/>
@@ -4194,40 +4219,15 @@
           <a:bodyPr/>
           <a:lstStyle/>
           <a:p>
+            <a:pPr eaLnBrk="1" hangingPunct="1"/>
             <a:endParaRPr lang="nl-NL"/>
-          </a:p>
-        </p:txBody>
-      </p:sp>
-      <p:sp>
-        <p:nvSpPr>
-          <p:cNvPr id="109572" name="Tijdelijke aanduiding voor dianummer 3"/>
-          <p:cNvSpPr>
-            <a:spLocks noGrp="1"/>
-          </p:cNvSpPr>
-          <p:nvPr>
-            <p:ph type="sldNum" sz="quarter" idx="5"/>
-          </p:nvPr>
-        </p:nvSpPr>
-        <p:spPr>
-          <a:noFill/>
-        </p:spPr>
-        <p:txBody>
-          <a:bodyPr/>
-          <a:lstStyle/>
-          <a:p>
-            <a:fld id="{A375E6E3-E3CB-4183-9A9A-5B81E30AF77B}" type="slidenum">
-              <a:rPr lang="en-US" smtClean="0"/>
-              <a:pPr/>
-              <a:t>46</a:t>
-            </a:fld>
-            <a:endParaRPr lang="en-US"/>
           </a:p>
         </p:txBody>
       </p:sp>
     </p:spTree>
     <p:extLst>
       <p:ext uri="{BB962C8B-B14F-4D97-AF65-F5344CB8AC3E}">
-        <p14:creationId xmlns:p14="http://schemas.microsoft.com/office/powerpoint/2010/main" val="1367948034"/>
+        <p14:creationId xmlns:p14="http://schemas.microsoft.com/office/powerpoint/2010/main" val="622847816"/>
       </p:ext>
     </p:extLst>
   </p:cSld>
@@ -4348,9 +4348,45 @@
       </p:grpSpPr>
       <p:sp>
         <p:nvSpPr>
-          <p:cNvPr id="110594" name="Rectangle 7"/>
+          <p:cNvPr id="109570" name="Tijdelijke aanduiding voor dia-afbeelding 1"/>
           <p:cNvSpPr>
-            <a:spLocks noGrp="1" noChangeArrowheads="1"/>
+            <a:spLocks noGrp="1" noRot="1" noChangeAspect="1" noTextEdit="1"/>
+          </p:cNvSpPr>
+          <p:nvPr>
+            <p:ph type="sldImg"/>
+          </p:nvPr>
+        </p:nvSpPr>
+        <p:spPr>
+          <a:ln/>
+        </p:spPr>
+      </p:sp>
+      <p:sp>
+        <p:nvSpPr>
+          <p:cNvPr id="109571" name="Tijdelijke aanduiding voor notities 2"/>
+          <p:cNvSpPr>
+            <a:spLocks noGrp="1"/>
+          </p:cNvSpPr>
+          <p:nvPr>
+            <p:ph type="body" idx="1"/>
+          </p:nvPr>
+        </p:nvSpPr>
+        <p:spPr>
+          <a:noFill/>
+          <a:ln/>
+        </p:spPr>
+        <p:txBody>
+          <a:bodyPr/>
+          <a:lstStyle/>
+          <a:p>
+            <a:endParaRPr lang="nl-NL"/>
+          </a:p>
+        </p:txBody>
+      </p:sp>
+      <p:sp>
+        <p:nvSpPr>
+          <p:cNvPr id="109572" name="Tijdelijke aanduiding voor dianummer 3"/>
+          <p:cNvSpPr>
+            <a:spLocks noGrp="1"/>
           </p:cNvSpPr>
           <p:nvPr>
             <p:ph type="sldNum" sz="quarter" idx="5"/>
@@ -4363,56 +4399,19 @@
           <a:bodyPr/>
           <a:lstStyle/>
           <a:p>
-            <a:fld id="{17B187A0-0462-4F52-96CD-25011BA9EAEC}" type="slidenum">
+            <a:fld id="{A375E6E3-E3CB-4183-9A9A-5B81E30AF77B}" type="slidenum">
               <a:rPr lang="en-US" smtClean="0"/>
               <a:pPr/>
-              <a:t>47</a:t>
+              <a:t>46</a:t>
             </a:fld>
             <a:endParaRPr lang="en-US"/>
-          </a:p>
-        </p:txBody>
-      </p:sp>
-      <p:sp>
-        <p:nvSpPr>
-          <p:cNvPr id="110595" name="Rectangle 2"/>
-          <p:cNvSpPr>
-            <a:spLocks noGrp="1" noRot="1" noChangeAspect="1" noChangeArrowheads="1" noTextEdit="1"/>
-          </p:cNvSpPr>
-          <p:nvPr>
-            <p:ph type="sldImg"/>
-          </p:nvPr>
-        </p:nvSpPr>
-        <p:spPr>
-          <a:ln/>
-        </p:spPr>
-      </p:sp>
-      <p:sp>
-        <p:nvSpPr>
-          <p:cNvPr id="110596" name="Rectangle 3"/>
-          <p:cNvSpPr>
-            <a:spLocks noGrp="1" noChangeArrowheads="1"/>
-          </p:cNvSpPr>
-          <p:nvPr>
-            <p:ph type="body" idx="1"/>
-          </p:nvPr>
-        </p:nvSpPr>
-        <p:spPr>
-          <a:noFill/>
-          <a:ln/>
-        </p:spPr>
-        <p:txBody>
-          <a:bodyPr/>
-          <a:lstStyle/>
-          <a:p>
-            <a:pPr eaLnBrk="1" hangingPunct="1"/>
-            <a:endParaRPr lang="nl-NL"/>
           </a:p>
         </p:txBody>
       </p:sp>
     </p:spTree>
     <p:extLst>
       <p:ext uri="{BB962C8B-B14F-4D97-AF65-F5344CB8AC3E}">
-        <p14:creationId xmlns:p14="http://schemas.microsoft.com/office/powerpoint/2010/main" val="142682656"/>
+        <p14:creationId xmlns:p14="http://schemas.microsoft.com/office/powerpoint/2010/main" val="1367948034"/>
       </p:ext>
     </p:extLst>
   </p:cSld>
@@ -4441,9 +4440,35 @@
       </p:grpSpPr>
       <p:sp>
         <p:nvSpPr>
-          <p:cNvPr id="111618" name="Tijdelijke aanduiding voor dia-afbeelding 1"/>
+          <p:cNvPr id="110594" name="Rectangle 7"/>
           <p:cNvSpPr>
-            <a:spLocks noGrp="1" noRot="1" noChangeAspect="1" noTextEdit="1"/>
+            <a:spLocks noGrp="1" noChangeArrowheads="1"/>
+          </p:cNvSpPr>
+          <p:nvPr>
+            <p:ph type="sldNum" sz="quarter" idx="5"/>
+          </p:nvPr>
+        </p:nvSpPr>
+        <p:spPr>
+          <a:noFill/>
+        </p:spPr>
+        <p:txBody>
+          <a:bodyPr/>
+          <a:lstStyle/>
+          <a:p>
+            <a:fld id="{17B187A0-0462-4F52-96CD-25011BA9EAEC}" type="slidenum">
+              <a:rPr lang="en-US" smtClean="0"/>
+              <a:pPr/>
+              <a:t>47</a:t>
+            </a:fld>
+            <a:endParaRPr lang="en-US"/>
+          </a:p>
+        </p:txBody>
+      </p:sp>
+      <p:sp>
+        <p:nvSpPr>
+          <p:cNvPr id="110595" name="Rectangle 2"/>
+          <p:cNvSpPr>
+            <a:spLocks noGrp="1" noRot="1" noChangeAspect="1" noChangeArrowheads="1" noTextEdit="1"/>
           </p:cNvSpPr>
           <p:nvPr>
             <p:ph type="sldImg"/>
@@ -4455,9 +4480,9 @@
       </p:sp>
       <p:sp>
         <p:nvSpPr>
-          <p:cNvPr id="111619" name="Tijdelijke aanduiding voor notities 2"/>
+          <p:cNvPr id="110596" name="Rectangle 3"/>
           <p:cNvSpPr>
-            <a:spLocks noGrp="1"/>
+            <a:spLocks noGrp="1" noChangeArrowheads="1"/>
           </p:cNvSpPr>
           <p:nvPr>
             <p:ph type="body" idx="1"/>
@@ -4471,40 +4496,15 @@
           <a:bodyPr/>
           <a:lstStyle/>
           <a:p>
+            <a:pPr eaLnBrk="1" hangingPunct="1"/>
             <a:endParaRPr lang="nl-NL"/>
-          </a:p>
-        </p:txBody>
-      </p:sp>
-      <p:sp>
-        <p:nvSpPr>
-          <p:cNvPr id="111620" name="Tijdelijke aanduiding voor dianummer 3"/>
-          <p:cNvSpPr>
-            <a:spLocks noGrp="1"/>
-          </p:cNvSpPr>
-          <p:nvPr>
-            <p:ph type="sldNum" sz="quarter" idx="5"/>
-          </p:nvPr>
-        </p:nvSpPr>
-        <p:spPr>
-          <a:noFill/>
-        </p:spPr>
-        <p:txBody>
-          <a:bodyPr/>
-          <a:lstStyle/>
-          <a:p>
-            <a:fld id="{70652362-626B-4747-986E-E85F353D8BCD}" type="slidenum">
-              <a:rPr lang="en-US" smtClean="0"/>
-              <a:pPr/>
-              <a:t>48</a:t>
-            </a:fld>
-            <a:endParaRPr lang="en-US"/>
           </a:p>
         </p:txBody>
       </p:sp>
     </p:spTree>
     <p:extLst>
       <p:ext uri="{BB962C8B-B14F-4D97-AF65-F5344CB8AC3E}">
-        <p14:creationId xmlns:p14="http://schemas.microsoft.com/office/powerpoint/2010/main" val="1475649340"/>
+        <p14:creationId xmlns:p14="http://schemas.microsoft.com/office/powerpoint/2010/main" val="142682656"/>
       </p:ext>
     </p:extLst>
   </p:cSld>
@@ -4533,7 +4533,7 @@
       </p:grpSpPr>
       <p:sp>
         <p:nvSpPr>
-          <p:cNvPr id="112642" name="Tijdelijke aanduiding voor dia-afbeelding 1"/>
+          <p:cNvPr id="111618" name="Tijdelijke aanduiding voor dia-afbeelding 1"/>
           <p:cNvSpPr>
             <a:spLocks noGrp="1" noRot="1" noChangeAspect="1" noTextEdit="1"/>
           </p:cNvSpPr>
@@ -4547,7 +4547,7 @@
       </p:sp>
       <p:sp>
         <p:nvSpPr>
-          <p:cNvPr id="112643" name="Tijdelijke aanduiding voor notities 2"/>
+          <p:cNvPr id="111619" name="Tijdelijke aanduiding voor notities 2"/>
           <p:cNvSpPr>
             <a:spLocks noGrp="1"/>
           </p:cNvSpPr>
@@ -4569,7 +4569,7 @@
       </p:sp>
       <p:sp>
         <p:nvSpPr>
-          <p:cNvPr id="112644" name="Tijdelijke aanduiding voor dianummer 3"/>
+          <p:cNvPr id="111620" name="Tijdelijke aanduiding voor dianummer 3"/>
           <p:cNvSpPr>
             <a:spLocks noGrp="1"/>
           </p:cNvSpPr>
@@ -4584,10 +4584,10 @@
           <a:bodyPr/>
           <a:lstStyle/>
           <a:p>
-            <a:fld id="{603B5E4C-1876-45A5-8FB0-B5A5E2A52F80}" type="slidenum">
+            <a:fld id="{70652362-626B-4747-986E-E85F353D8BCD}" type="slidenum">
               <a:rPr lang="en-US" smtClean="0"/>
               <a:pPr/>
-              <a:t>49</a:t>
+              <a:t>48</a:t>
             </a:fld>
             <a:endParaRPr lang="en-US"/>
           </a:p>
@@ -4596,7 +4596,7 @@
     </p:spTree>
     <p:extLst>
       <p:ext uri="{BB962C8B-B14F-4D97-AF65-F5344CB8AC3E}">
-        <p14:creationId xmlns:p14="http://schemas.microsoft.com/office/powerpoint/2010/main" val="2097301824"/>
+        <p14:creationId xmlns:p14="http://schemas.microsoft.com/office/powerpoint/2010/main" val="1475649340"/>
       </p:ext>
     </p:extLst>
   </p:cSld>
@@ -4625,7 +4625,7 @@
       </p:grpSpPr>
       <p:sp>
         <p:nvSpPr>
-          <p:cNvPr id="113666" name="Tijdelijke aanduiding voor dia-afbeelding 1"/>
+          <p:cNvPr id="112642" name="Tijdelijke aanduiding voor dia-afbeelding 1"/>
           <p:cNvSpPr>
             <a:spLocks noGrp="1" noRot="1" noChangeAspect="1" noTextEdit="1"/>
           </p:cNvSpPr>
@@ -4639,7 +4639,7 @@
       </p:sp>
       <p:sp>
         <p:nvSpPr>
-          <p:cNvPr id="113667" name="Tijdelijke aanduiding voor notities 2"/>
+          <p:cNvPr id="112643" name="Tijdelijke aanduiding voor notities 2"/>
           <p:cNvSpPr>
             <a:spLocks noGrp="1"/>
           </p:cNvSpPr>
@@ -4661,7 +4661,7 @@
       </p:sp>
       <p:sp>
         <p:nvSpPr>
-          <p:cNvPr id="113668" name="Tijdelijke aanduiding voor dianummer 3"/>
+          <p:cNvPr id="112644" name="Tijdelijke aanduiding voor dianummer 3"/>
           <p:cNvSpPr>
             <a:spLocks noGrp="1"/>
           </p:cNvSpPr>
@@ -4676,10 +4676,10 @@
           <a:bodyPr/>
           <a:lstStyle/>
           <a:p>
-            <a:fld id="{1BDC71E3-D10D-4176-BF66-FE742F89A658}" type="slidenum">
+            <a:fld id="{603B5E4C-1876-45A5-8FB0-B5A5E2A52F80}" type="slidenum">
               <a:rPr lang="en-US" smtClean="0"/>
               <a:pPr/>
-              <a:t>50</a:t>
+              <a:t>49</a:t>
             </a:fld>
             <a:endParaRPr lang="en-US"/>
           </a:p>
@@ -4688,7 +4688,7 @@
     </p:spTree>
     <p:extLst>
       <p:ext uri="{BB962C8B-B14F-4D97-AF65-F5344CB8AC3E}">
-        <p14:creationId xmlns:p14="http://schemas.microsoft.com/office/powerpoint/2010/main" val="555174110"/>
+        <p14:creationId xmlns:p14="http://schemas.microsoft.com/office/powerpoint/2010/main" val="2097301824"/>
       </p:ext>
     </p:extLst>
   </p:cSld>
@@ -4717,7 +4717,7 @@
       </p:grpSpPr>
       <p:sp>
         <p:nvSpPr>
-          <p:cNvPr id="115714" name="Tijdelijke aanduiding voor dia-afbeelding 1"/>
+          <p:cNvPr id="113666" name="Tijdelijke aanduiding voor dia-afbeelding 1"/>
           <p:cNvSpPr>
             <a:spLocks noGrp="1" noRot="1" noChangeAspect="1" noTextEdit="1"/>
           </p:cNvSpPr>
@@ -4731,7 +4731,7 @@
       </p:sp>
       <p:sp>
         <p:nvSpPr>
-          <p:cNvPr id="115715" name="Tijdelijke aanduiding voor notities 2"/>
+          <p:cNvPr id="113667" name="Tijdelijke aanduiding voor notities 2"/>
           <p:cNvSpPr>
             <a:spLocks noGrp="1"/>
           </p:cNvSpPr>
@@ -4753,7 +4753,7 @@
       </p:sp>
       <p:sp>
         <p:nvSpPr>
-          <p:cNvPr id="115716" name="Tijdelijke aanduiding voor dianummer 3"/>
+          <p:cNvPr id="113668" name="Tijdelijke aanduiding voor dianummer 3"/>
           <p:cNvSpPr>
             <a:spLocks noGrp="1"/>
           </p:cNvSpPr>
@@ -4768,10 +4768,10 @@
           <a:bodyPr/>
           <a:lstStyle/>
           <a:p>
-            <a:fld id="{A77D9633-90A4-49FE-AC26-522C655D96CE}" type="slidenum">
+            <a:fld id="{1BDC71E3-D10D-4176-BF66-FE742F89A658}" type="slidenum">
               <a:rPr lang="en-US" smtClean="0"/>
               <a:pPr/>
-              <a:t>51</a:t>
+              <a:t>50</a:t>
             </a:fld>
             <a:endParaRPr lang="en-US"/>
           </a:p>
@@ -4780,7 +4780,7 @@
     </p:spTree>
     <p:extLst>
       <p:ext uri="{BB962C8B-B14F-4D97-AF65-F5344CB8AC3E}">
-        <p14:creationId xmlns:p14="http://schemas.microsoft.com/office/powerpoint/2010/main" val="2142304202"/>
+        <p14:creationId xmlns:p14="http://schemas.microsoft.com/office/powerpoint/2010/main" val="555174110"/>
       </p:ext>
     </p:extLst>
   </p:cSld>
@@ -4809,19 +4809,21 @@
       </p:grpSpPr>
       <p:sp>
         <p:nvSpPr>
-          <p:cNvPr id="2" name="Slide Image Placeholder 1"/>
+          <p:cNvPr id="115714" name="Tijdelijke aanduiding voor dia-afbeelding 1"/>
           <p:cNvSpPr>
-            <a:spLocks noGrp="1" noRot="1" noChangeAspect="1"/>
+            <a:spLocks noGrp="1" noRot="1" noChangeAspect="1" noTextEdit="1"/>
           </p:cNvSpPr>
           <p:nvPr>
             <p:ph type="sldImg"/>
           </p:nvPr>
         </p:nvSpPr>
-        <p:spPr/>
-      </p:sp>
-      <p:sp>
-        <p:nvSpPr>
-          <p:cNvPr id="3" name="Notes Placeholder 2"/>
+        <p:spPr>
+          <a:ln/>
+        </p:spPr>
+      </p:sp>
+      <p:sp>
+        <p:nvSpPr>
+          <p:cNvPr id="115715" name="Tijdelijke aanduiding voor notities 2"/>
           <p:cNvSpPr>
             <a:spLocks noGrp="1"/>
           </p:cNvSpPr>
@@ -4829,18 +4831,21 @@
             <p:ph type="body" idx="1"/>
           </p:nvPr>
         </p:nvSpPr>
-        <p:spPr/>
+        <p:spPr>
+          <a:noFill/>
+          <a:ln/>
+        </p:spPr>
         <p:txBody>
           <a:bodyPr/>
           <a:lstStyle/>
           <a:p>
-            <a:endParaRPr lang="en-US" dirty="0"/>
-          </a:p>
-        </p:txBody>
-      </p:sp>
-      <p:sp>
-        <p:nvSpPr>
-          <p:cNvPr id="4" name="Slide Number Placeholder 3"/>
+            <a:endParaRPr lang="nl-NL"/>
+          </a:p>
+        </p:txBody>
+      </p:sp>
+      <p:sp>
+        <p:nvSpPr>
+          <p:cNvPr id="115716" name="Tijdelijke aanduiding voor dianummer 3"/>
           <p:cNvSpPr>
             <a:spLocks noGrp="1"/>
           </p:cNvSpPr>
@@ -4848,20 +4853,17 @@
             <p:ph type="sldNum" sz="quarter" idx="5"/>
           </p:nvPr>
         </p:nvSpPr>
-        <p:spPr/>
+        <p:spPr>
+          <a:noFill/>
+        </p:spPr>
         <p:txBody>
           <a:bodyPr/>
           <a:lstStyle/>
           <a:p>
-            <a:pPr>
-              <a:defRPr/>
-            </a:pPr>
-            <a:fld id="{E4FD2488-61E9-4305-95A4-37BD235A24E9}" type="slidenum">
+            <a:fld id="{A77D9633-90A4-49FE-AC26-522C655D96CE}" type="slidenum">
               <a:rPr lang="en-US" smtClean="0"/>
-              <a:pPr>
-                <a:defRPr/>
-              </a:pPr>
-              <a:t>53</a:t>
+              <a:pPr/>
+              <a:t>51</a:t>
             </a:fld>
             <a:endParaRPr lang="en-US"/>
           </a:p>
@@ -4870,7 +4872,7 @@
     </p:spTree>
     <p:extLst>
       <p:ext uri="{BB962C8B-B14F-4D97-AF65-F5344CB8AC3E}">
-        <p14:creationId xmlns:p14="http://schemas.microsoft.com/office/powerpoint/2010/main" val="4086328724"/>
+        <p14:creationId xmlns:p14="http://schemas.microsoft.com/office/powerpoint/2010/main" val="2142304202"/>
       </p:ext>
     </p:extLst>
   </p:cSld>
@@ -4899,71 +4901,68 @@
       </p:grpSpPr>
       <p:sp>
         <p:nvSpPr>
-          <p:cNvPr id="119810" name="Rectangle 7"/>
+          <p:cNvPr id="2" name="Slide Image Placeholder 1"/>
           <p:cNvSpPr>
-            <a:spLocks noGrp="1" noChangeArrowheads="1"/>
+            <a:spLocks noGrp="1" noRot="1" noChangeAspect="1"/>
+          </p:cNvSpPr>
+          <p:nvPr>
+            <p:ph type="sldImg"/>
+          </p:nvPr>
+        </p:nvSpPr>
+        <p:spPr/>
+      </p:sp>
+      <p:sp>
+        <p:nvSpPr>
+          <p:cNvPr id="3" name="Notes Placeholder 2"/>
+          <p:cNvSpPr>
+            <a:spLocks noGrp="1"/>
+          </p:cNvSpPr>
+          <p:nvPr>
+            <p:ph type="body" idx="1"/>
+          </p:nvPr>
+        </p:nvSpPr>
+        <p:spPr/>
+        <p:txBody>
+          <a:bodyPr/>
+          <a:lstStyle/>
+          <a:p>
+            <a:endParaRPr lang="en-US" dirty="0"/>
+          </a:p>
+        </p:txBody>
+      </p:sp>
+      <p:sp>
+        <p:nvSpPr>
+          <p:cNvPr id="4" name="Slide Number Placeholder 3"/>
+          <p:cNvSpPr>
+            <a:spLocks noGrp="1"/>
           </p:cNvSpPr>
           <p:nvPr>
             <p:ph type="sldNum" sz="quarter" idx="5"/>
           </p:nvPr>
         </p:nvSpPr>
-        <p:spPr>
-          <a:noFill/>
-        </p:spPr>
+        <p:spPr/>
         <p:txBody>
           <a:bodyPr/>
           <a:lstStyle/>
           <a:p>
-            <a:fld id="{2D25DDB0-FBFB-4841-A524-4E89D475E17A}" type="slidenum">
+            <a:pPr>
+              <a:defRPr/>
+            </a:pPr>
+            <a:fld id="{E4FD2488-61E9-4305-95A4-37BD235A24E9}" type="slidenum">
               <a:rPr lang="en-US" smtClean="0"/>
-              <a:pPr/>
-              <a:t>57</a:t>
+              <a:pPr>
+                <a:defRPr/>
+              </a:pPr>
+              <a:t>53</a:t>
             </a:fld>
             <a:endParaRPr lang="en-US"/>
-          </a:p>
-        </p:txBody>
-      </p:sp>
-      <p:sp>
-        <p:nvSpPr>
-          <p:cNvPr id="119811" name="Rectangle 2"/>
-          <p:cNvSpPr>
-            <a:spLocks noGrp="1" noRot="1" noChangeAspect="1" noChangeArrowheads="1" noTextEdit="1"/>
-          </p:cNvSpPr>
-          <p:nvPr>
-            <p:ph type="sldImg"/>
-          </p:nvPr>
-        </p:nvSpPr>
-        <p:spPr>
-          <a:ln/>
-        </p:spPr>
-      </p:sp>
-      <p:sp>
-        <p:nvSpPr>
-          <p:cNvPr id="119812" name="Rectangle 3"/>
-          <p:cNvSpPr>
-            <a:spLocks noGrp="1" noChangeArrowheads="1"/>
-          </p:cNvSpPr>
-          <p:nvPr>
-            <p:ph type="body" idx="1"/>
-          </p:nvPr>
-        </p:nvSpPr>
-        <p:spPr>
-          <a:noFill/>
-          <a:ln/>
-        </p:spPr>
-        <p:txBody>
-          <a:bodyPr/>
-          <a:lstStyle/>
-          <a:p>
-            <a:pPr eaLnBrk="1" hangingPunct="1"/>
-            <a:endParaRPr lang="nl-NL"/>
           </a:p>
         </p:txBody>
       </p:sp>
     </p:spTree>
     <p:extLst>
       <p:ext uri="{BB962C8B-B14F-4D97-AF65-F5344CB8AC3E}">
-        <p14:creationId xmlns:p14="http://schemas.microsoft.com/office/powerpoint/2010/main" val="995897412"/>
+        <p14:creationId xmlns:p14="http://schemas.microsoft.com/office/powerpoint/2010/main" val="4086328724"/>
       </p:ext>
     </p:extLst>
   </p:cSld>
@@ -4992,6 +4991,99 @@
       </p:grpSpPr>
       <p:sp>
         <p:nvSpPr>
+          <p:cNvPr id="119810" name="Rectangle 7"/>
+          <p:cNvSpPr>
+            <a:spLocks noGrp="1" noChangeArrowheads="1"/>
+          </p:cNvSpPr>
+          <p:nvPr>
+            <p:ph type="sldNum" sz="quarter" idx="5"/>
+          </p:nvPr>
+        </p:nvSpPr>
+        <p:spPr>
+          <a:noFill/>
+        </p:spPr>
+        <p:txBody>
+          <a:bodyPr/>
+          <a:lstStyle/>
+          <a:p>
+            <a:fld id="{2D25DDB0-FBFB-4841-A524-4E89D475E17A}" type="slidenum">
+              <a:rPr lang="en-US" smtClean="0"/>
+              <a:pPr/>
+              <a:t>57</a:t>
+            </a:fld>
+            <a:endParaRPr lang="en-US"/>
+          </a:p>
+        </p:txBody>
+      </p:sp>
+      <p:sp>
+        <p:nvSpPr>
+          <p:cNvPr id="119811" name="Rectangle 2"/>
+          <p:cNvSpPr>
+            <a:spLocks noGrp="1" noRot="1" noChangeAspect="1" noChangeArrowheads="1" noTextEdit="1"/>
+          </p:cNvSpPr>
+          <p:nvPr>
+            <p:ph type="sldImg"/>
+          </p:nvPr>
+        </p:nvSpPr>
+        <p:spPr>
+          <a:ln/>
+        </p:spPr>
+      </p:sp>
+      <p:sp>
+        <p:nvSpPr>
+          <p:cNvPr id="119812" name="Rectangle 3"/>
+          <p:cNvSpPr>
+            <a:spLocks noGrp="1" noChangeArrowheads="1"/>
+          </p:cNvSpPr>
+          <p:nvPr>
+            <p:ph type="body" idx="1"/>
+          </p:nvPr>
+        </p:nvSpPr>
+        <p:spPr>
+          <a:noFill/>
+          <a:ln/>
+        </p:spPr>
+        <p:txBody>
+          <a:bodyPr/>
+          <a:lstStyle/>
+          <a:p>
+            <a:pPr eaLnBrk="1" hangingPunct="1"/>
+            <a:endParaRPr lang="nl-NL"/>
+          </a:p>
+        </p:txBody>
+      </p:sp>
+    </p:spTree>
+    <p:extLst>
+      <p:ext uri="{BB962C8B-B14F-4D97-AF65-F5344CB8AC3E}">
+        <p14:creationId xmlns:p14="http://schemas.microsoft.com/office/powerpoint/2010/main" val="995897412"/>
+      </p:ext>
+    </p:extLst>
+  </p:cSld>
+  <p:clrMapOvr>
+    <a:masterClrMapping/>
+  </p:clrMapOvr>
+</p:notes>
+</file>
+
+<file path=ppt/notesSlides/notesSlide48.xml><?xml version="1.0" encoding="utf-8"?>
+<p:notes xmlns:a="http://schemas.openxmlformats.org/drawingml/2006/main" xmlns:r="http://schemas.openxmlformats.org/officeDocument/2006/relationships" xmlns:p="http://schemas.openxmlformats.org/presentationml/2006/main">
+  <p:cSld>
+    <p:spTree>
+      <p:nvGrpSpPr>
+        <p:cNvPr id="1" name=""/>
+        <p:cNvGrpSpPr/>
+        <p:nvPr/>
+      </p:nvGrpSpPr>
+      <p:grpSpPr>
+        <a:xfrm>
+          <a:off x="0" y="0"/>
+          <a:ext cx="0" cy="0"/>
+          <a:chOff x="0" y="0"/>
+          <a:chExt cx="0" cy="0"/>
+        </a:xfrm>
+      </p:grpSpPr>
+      <p:sp>
+        <p:nvSpPr>
           <p:cNvPr id="2" name="Slide Image Placeholder 1"/>
           <p:cNvSpPr>
             <a:spLocks noGrp="1" noRot="1" noChangeAspect="1"/>
@@ -5063,7 +5155,7 @@
 </p:notes>
 </file>
 
-<file path=ppt/notesSlides/notesSlide48.xml><?xml version="1.0" encoding="utf-8"?>
+<file path=ppt/notesSlides/notesSlide49.xml><?xml version="1.0" encoding="utf-8"?>
 <p:notes xmlns:a="http://schemas.openxmlformats.org/drawingml/2006/main" xmlns:r="http://schemas.openxmlformats.org/officeDocument/2006/relationships" xmlns:p="http://schemas.openxmlformats.org/presentationml/2006/main">
   <p:cSld>
     <p:spTree>
@@ -5275,21 +5367,19 @@
       </p:grpSpPr>
       <p:sp>
         <p:nvSpPr>
-          <p:cNvPr id="73730" name="Tijdelijke aanduiding voor dia-afbeelding 1"/>
+          <p:cNvPr id="2" name="Slide Image Placeholder 1"/>
           <p:cNvSpPr>
-            <a:spLocks noGrp="1" noRot="1" noChangeAspect="1" noTextEdit="1"/>
+            <a:spLocks noGrp="1" noRot="1" noChangeAspect="1"/>
           </p:cNvSpPr>
           <p:nvPr>
             <p:ph type="sldImg"/>
           </p:nvPr>
         </p:nvSpPr>
-        <p:spPr>
-          <a:ln/>
-        </p:spPr>
-      </p:sp>
-      <p:sp>
-        <p:nvSpPr>
-          <p:cNvPr id="73731" name="Tijdelijke aanduiding voor notities 2"/>
+        <p:spPr/>
+      </p:sp>
+      <p:sp>
+        <p:nvSpPr>
+          <p:cNvPr id="3" name="Notes Placeholder 2"/>
           <p:cNvSpPr>
             <a:spLocks noGrp="1"/>
           </p:cNvSpPr>
@@ -5297,21 +5387,18 @@
             <p:ph type="body" idx="1"/>
           </p:nvPr>
         </p:nvSpPr>
-        <p:spPr>
-          <a:noFill/>
-          <a:ln/>
-        </p:spPr>
+        <p:spPr/>
         <p:txBody>
           <a:bodyPr/>
           <a:lstStyle/>
           <a:p>
-            <a:endParaRPr lang="nl-NL"/>
-          </a:p>
-        </p:txBody>
-      </p:sp>
-      <p:sp>
-        <p:nvSpPr>
-          <p:cNvPr id="73732" name="Tijdelijke aanduiding voor dianummer 3"/>
+            <a:endParaRPr lang="en-NL"/>
+          </a:p>
+        </p:txBody>
+      </p:sp>
+      <p:sp>
+        <p:nvSpPr>
+          <p:cNvPr id="4" name="Slide Number Placeholder 3"/>
           <p:cNvSpPr>
             <a:spLocks noGrp="1"/>
           </p:cNvSpPr>
@@ -5319,17 +5406,20 @@
             <p:ph type="sldNum" sz="quarter" idx="5"/>
           </p:nvPr>
         </p:nvSpPr>
-        <p:spPr>
-          <a:noFill/>
-        </p:spPr>
+        <p:spPr/>
         <p:txBody>
           <a:bodyPr/>
           <a:lstStyle/>
           <a:p>
-            <a:fld id="{0D6AA3CB-8A9D-49CB-91DE-D5685D84EAF4}" type="slidenum">
+            <a:pPr>
+              <a:defRPr/>
+            </a:pPr>
+            <a:fld id="{E4FD2488-61E9-4305-95A4-37BD235A24E9}" type="slidenum">
               <a:rPr lang="en-US" smtClean="0"/>
-              <a:pPr/>
-              <a:t>10</a:t>
+              <a:pPr>
+                <a:defRPr/>
+              </a:pPr>
+              <a:t>8</a:t>
             </a:fld>
             <a:endParaRPr lang="en-US"/>
           </a:p>
@@ -5338,7 +5428,7 @@
     </p:spTree>
     <p:extLst>
       <p:ext uri="{BB962C8B-B14F-4D97-AF65-F5344CB8AC3E}">
-        <p14:creationId xmlns:p14="http://schemas.microsoft.com/office/powerpoint/2010/main" val="1227900973"/>
+        <p14:creationId xmlns:p14="http://schemas.microsoft.com/office/powerpoint/2010/main" val="1512662484"/>
       </p:ext>
     </p:extLst>
   </p:cSld>
@@ -5367,7 +5457,7 @@
       </p:grpSpPr>
       <p:sp>
         <p:nvSpPr>
-          <p:cNvPr id="74754" name="Tijdelijke aanduiding voor dia-afbeelding 1"/>
+          <p:cNvPr id="73730" name="Tijdelijke aanduiding voor dia-afbeelding 1"/>
           <p:cNvSpPr>
             <a:spLocks noGrp="1" noRot="1" noChangeAspect="1" noTextEdit="1"/>
           </p:cNvSpPr>
@@ -5381,7 +5471,7 @@
       </p:sp>
       <p:sp>
         <p:nvSpPr>
-          <p:cNvPr id="74755" name="Tijdelijke aanduiding voor notities 2"/>
+          <p:cNvPr id="73731" name="Tijdelijke aanduiding voor notities 2"/>
           <p:cNvSpPr>
             <a:spLocks noGrp="1"/>
           </p:cNvSpPr>
@@ -5397,22 +5487,13 @@
           <a:bodyPr/>
           <a:lstStyle/>
           <a:p>
-            <a:r>
-              <a:rPr lang="nl-NL"/>
-              <a:t>Single initial state to make the discussion simpler; more generally we may want to allow multiple initial states.</a:t>
-            </a:r>
-          </a:p>
-          <a:p>
             <a:endParaRPr lang="nl-NL"/>
           </a:p>
-          <a:p>
-            <a:endParaRPr lang="nl-NL"/>
-          </a:p>
-        </p:txBody>
-      </p:sp>
-      <p:sp>
-        <p:nvSpPr>
-          <p:cNvPr id="74756" name="Tijdelijke aanduiding voor dianummer 3"/>
+        </p:txBody>
+      </p:sp>
+      <p:sp>
+        <p:nvSpPr>
+          <p:cNvPr id="73732" name="Tijdelijke aanduiding voor dianummer 3"/>
           <p:cNvSpPr>
             <a:spLocks noGrp="1"/>
           </p:cNvSpPr>
@@ -5427,10 +5508,10 @@
           <a:bodyPr/>
           <a:lstStyle/>
           <a:p>
-            <a:fld id="{B77C0B06-DFA4-484A-8B70-E8DD1C4AA51F}" type="slidenum">
+            <a:fld id="{0D6AA3CB-8A9D-49CB-91DE-D5685D84EAF4}" type="slidenum">
               <a:rPr lang="en-US" smtClean="0"/>
               <a:pPr/>
-              <a:t>11</a:t>
+              <a:t>10</a:t>
             </a:fld>
             <a:endParaRPr lang="en-US"/>
           </a:p>
@@ -5439,7 +5520,7 @@
     </p:spTree>
     <p:extLst>
       <p:ext uri="{BB962C8B-B14F-4D97-AF65-F5344CB8AC3E}">
-        <p14:creationId xmlns:p14="http://schemas.microsoft.com/office/powerpoint/2010/main" val="2102197231"/>
+        <p14:creationId xmlns:p14="http://schemas.microsoft.com/office/powerpoint/2010/main" val="1227900973"/>
       </p:ext>
     </p:extLst>
   </p:cSld>
@@ -5468,7 +5549,7 @@
       </p:grpSpPr>
       <p:sp>
         <p:nvSpPr>
-          <p:cNvPr id="75778" name="Slide Image Placeholder 1"/>
+          <p:cNvPr id="74754" name="Tijdelijke aanduiding voor dia-afbeelding 1"/>
           <p:cNvSpPr>
             <a:spLocks noGrp="1" noRot="1" noChangeAspect="1" noTextEdit="1"/>
           </p:cNvSpPr>
@@ -5482,7 +5563,7 @@
       </p:sp>
       <p:sp>
         <p:nvSpPr>
-          <p:cNvPr id="75779" name="Notes Placeholder 2"/>
+          <p:cNvPr id="74755" name="Tijdelijke aanduiding voor notities 2"/>
           <p:cNvSpPr>
             <a:spLocks noGrp="1"/>
           </p:cNvSpPr>
@@ -5498,13 +5579,22 @@
           <a:bodyPr/>
           <a:lstStyle/>
           <a:p>
+            <a:r>
+              <a:rPr lang="nl-NL"/>
+              <a:t>Single initial state to make the discussion simpler; more generally we may want to allow multiple initial states.</a:t>
+            </a:r>
+          </a:p>
+          <a:p>
             <a:endParaRPr lang="nl-NL"/>
           </a:p>
-        </p:txBody>
-      </p:sp>
-      <p:sp>
-        <p:nvSpPr>
-          <p:cNvPr id="75780" name="Slide Number Placeholder 3"/>
+          <a:p>
+            <a:endParaRPr lang="nl-NL"/>
+          </a:p>
+        </p:txBody>
+      </p:sp>
+      <p:sp>
+        <p:nvSpPr>
+          <p:cNvPr id="74756" name="Tijdelijke aanduiding voor dianummer 3"/>
           <p:cNvSpPr>
             <a:spLocks noGrp="1"/>
           </p:cNvSpPr>
@@ -5519,10 +5609,10 @@
           <a:bodyPr/>
           <a:lstStyle/>
           <a:p>
-            <a:fld id="{C75C1CB5-14E7-447F-9883-B7519C145FBF}" type="slidenum">
+            <a:fld id="{B77C0B06-DFA4-484A-8B70-E8DD1C4AA51F}" type="slidenum">
               <a:rPr lang="en-US" smtClean="0"/>
               <a:pPr/>
-              <a:t>13</a:t>
+              <a:t>11</a:t>
             </a:fld>
             <a:endParaRPr lang="en-US"/>
           </a:p>
@@ -5531,7 +5621,7 @@
     </p:spTree>
     <p:extLst>
       <p:ext uri="{BB962C8B-B14F-4D97-AF65-F5344CB8AC3E}">
-        <p14:creationId xmlns:p14="http://schemas.microsoft.com/office/powerpoint/2010/main" val="101493711"/>
+        <p14:creationId xmlns:p14="http://schemas.microsoft.com/office/powerpoint/2010/main" val="2102197231"/>
       </p:ext>
     </p:extLst>
   </p:cSld>
@@ -5560,7 +5650,7 @@
       </p:grpSpPr>
       <p:sp>
         <p:nvSpPr>
-          <p:cNvPr id="73730" name="Tijdelijke aanduiding voor dia-afbeelding 1"/>
+          <p:cNvPr id="75778" name="Slide Image Placeholder 1"/>
           <p:cNvSpPr>
             <a:spLocks noGrp="1" noRot="1" noChangeAspect="1" noTextEdit="1"/>
           </p:cNvSpPr>
@@ -5574,7 +5664,7 @@
       </p:sp>
       <p:sp>
         <p:nvSpPr>
-          <p:cNvPr id="73731" name="Tijdelijke aanduiding voor notities 2"/>
+          <p:cNvPr id="75779" name="Notes Placeholder 2"/>
           <p:cNvSpPr>
             <a:spLocks noGrp="1"/>
           </p:cNvSpPr>
@@ -5596,7 +5686,7 @@
       </p:sp>
       <p:sp>
         <p:nvSpPr>
-          <p:cNvPr id="73732" name="Tijdelijke aanduiding voor dianummer 3"/>
+          <p:cNvPr id="75780" name="Slide Number Placeholder 3"/>
           <p:cNvSpPr>
             <a:spLocks noGrp="1"/>
           </p:cNvSpPr>
@@ -5611,10 +5701,10 @@
           <a:bodyPr/>
           <a:lstStyle/>
           <a:p>
-            <a:fld id="{0D6AA3CB-8A9D-49CB-91DE-D5685D84EAF4}" type="slidenum">
+            <a:fld id="{C75C1CB5-14E7-447F-9883-B7519C145FBF}" type="slidenum">
               <a:rPr lang="en-US" smtClean="0"/>
               <a:pPr/>
-              <a:t>14</a:t>
+              <a:t>13</a:t>
             </a:fld>
             <a:endParaRPr lang="en-US"/>
           </a:p>
@@ -5623,7 +5713,7 @@
     </p:spTree>
     <p:extLst>
       <p:ext uri="{BB962C8B-B14F-4D97-AF65-F5344CB8AC3E}">
-        <p14:creationId xmlns:p14="http://schemas.microsoft.com/office/powerpoint/2010/main" val="702785059"/>
+        <p14:creationId xmlns:p14="http://schemas.microsoft.com/office/powerpoint/2010/main" val="101493711"/>
       </p:ext>
     </p:extLst>
   </p:cSld>
@@ -9914,17 +10004,8 @@
               <a:rPr lang="nl-NL" dirty="0">
                 <a:cs typeface="Arial" charset="0"/>
               </a:rPr>
-              <a:t> </a:t>
-            </a:r>
-            <a:r>
-              <a:rPr lang="nl-NL" dirty="0" err="1">
-                <a:cs typeface="Arial" charset="0"/>
-              </a:rPr>
-              <a:t>labels</a:t>
-            </a:r>
-            <a:endParaRPr lang="nl-NL" dirty="0">
-              <a:cs typeface="Arial" charset="0"/>
-            </a:endParaRPr>
+              <a:t> state-labels</a:t>
+            </a:r>
           </a:p>
         </p:txBody>
       </p:sp>
@@ -10470,8 +10551,8 @@
         </p:nvSpPr>
         <p:spPr>
           <a:xfrm>
-            <a:off x="450849" y="4667250"/>
-            <a:ext cx="3276596" cy="1477328"/>
+            <a:off x="450848" y="4667250"/>
+            <a:ext cx="3819001" cy="1754326"/>
           </a:xfrm>
           <a:prstGeom prst="rect">
             <a:avLst/>
@@ -10486,7 +10567,7 @@
           <a:p>
             <a:r>
               <a:rPr lang="en-US" sz="1800" dirty="0"/>
-              <a:t>So far, the only things we know about the states is that they differ from each other. Let’s extend the available information with propositions.</a:t>
+              <a:t>So far, the only things we know about the states is that they differ from each other. Let’s extend the available information with propositions, expressing properties that we know to hold in each state.</a:t>
             </a:r>
           </a:p>
         </p:txBody>
@@ -27858,7 +27939,7 @@
                 <a:cs typeface="Arial" charset="0"/>
                 <a:sym typeface="Wingdings" pitchFamily="2" charset="2"/>
               </a:rPr>
-              <a:t>Based on a number of operators to express relation over time: “next”, “always”, “eventually”</a:t>
+              <a:t>Based on a number of operators/modalities to express relation over time: “next”, “always”, “eventually”</a:t>
             </a:r>
           </a:p>
           <a:p>
@@ -56169,7 +56250,7 @@
         </p:nvSpPr>
         <p:spPr>
           <a:xfrm>
-            <a:off x="2114550" y="1827213"/>
+            <a:off x="888997" y="1763713"/>
             <a:ext cx="703263" cy="593725"/>
           </a:xfrm>
           <a:prstGeom prst="roundRect">
@@ -56216,7 +56297,7 @@
         </p:nvSpPr>
         <p:spPr>
           <a:xfrm>
-            <a:off x="2152649" y="2841625"/>
+            <a:off x="927096" y="2778125"/>
             <a:ext cx="657225" cy="593725"/>
           </a:xfrm>
           <a:prstGeom prst="roundRect">
@@ -56265,7 +56346,7 @@
         </p:nvCxnSpPr>
         <p:spPr>
           <a:xfrm rot="10800000">
-            <a:off x="2466183" y="1827213"/>
+            <a:off x="1240630" y="1763713"/>
             <a:ext cx="351631" cy="296862"/>
           </a:xfrm>
           <a:prstGeom prst="curvedConnector4">
@@ -56277,7 +56358,7 @@
           <a:ln>
             <a:solidFill>
               <a:schemeClr val="bg2">
-                <a:lumMod val="10000"/>
+                <a:lumMod val="50000"/>
               </a:schemeClr>
             </a:solidFill>
             <a:tailEnd type="arrow"/>
@@ -56309,7 +56390,7 @@
         </p:nvCxnSpPr>
         <p:spPr>
           <a:xfrm>
-            <a:off x="2466182" y="2420938"/>
+            <a:off x="1240629" y="2357438"/>
             <a:ext cx="15080" cy="420687"/>
           </a:xfrm>
           <a:prstGeom prst="straightConnector1">
@@ -56347,7 +56428,7 @@
         </p:nvCxnSpPr>
         <p:spPr>
           <a:xfrm>
-            <a:off x="1828803" y="1771653"/>
+            <a:off x="603250" y="1708153"/>
             <a:ext cx="295273" cy="141285"/>
           </a:xfrm>
           <a:prstGeom prst="straightConnector1">
@@ -56380,7 +56461,7 @@
         </p:nvSpPr>
         <p:spPr>
           <a:xfrm>
-            <a:off x="4705350" y="1884363"/>
+            <a:off x="3455944" y="1757255"/>
             <a:ext cx="703263" cy="593725"/>
           </a:xfrm>
           <a:prstGeom prst="roundRect">
@@ -56427,7 +56508,7 @@
         </p:nvSpPr>
         <p:spPr>
           <a:xfrm>
-            <a:off x="4743449" y="2898775"/>
+            <a:off x="3494043" y="2771667"/>
             <a:ext cx="657225" cy="593725"/>
           </a:xfrm>
           <a:prstGeom prst="roundRect">
@@ -56477,7 +56558,7 @@
         </p:nvCxnSpPr>
         <p:spPr>
           <a:xfrm>
-            <a:off x="5056982" y="2478088"/>
+            <a:off x="3807576" y="2350980"/>
             <a:ext cx="15080" cy="420687"/>
           </a:xfrm>
           <a:prstGeom prst="straightConnector1">
@@ -56485,9 +56566,7 @@
           </a:prstGeom>
           <a:ln>
             <a:solidFill>
-              <a:schemeClr val="bg2">
-                <a:lumMod val="10000"/>
-              </a:schemeClr>
+              <a:srgbClr val="C00000"/>
             </a:solidFill>
             <a:tailEnd type="arrow"/>
           </a:ln>
@@ -56515,7 +56594,7 @@
         </p:nvCxnSpPr>
         <p:spPr>
           <a:xfrm>
-            <a:off x="4419603" y="1828803"/>
+            <a:off x="3170197" y="1701695"/>
             <a:ext cx="295273" cy="141285"/>
           </a:xfrm>
           <a:prstGeom prst="straightConnector1">
@@ -56548,7 +56627,7 @@
         </p:nvSpPr>
         <p:spPr>
           <a:xfrm>
-            <a:off x="2114550" y="2400300"/>
+            <a:off x="888997" y="2336800"/>
             <a:ext cx="338554" cy="461665"/>
           </a:xfrm>
           <a:prstGeom prst="rect">
@@ -56577,7 +56656,7 @@
         </p:nvSpPr>
         <p:spPr>
           <a:xfrm>
-            <a:off x="4667250" y="2419350"/>
+            <a:off x="3417844" y="2292242"/>
             <a:ext cx="338554" cy="461665"/>
           </a:xfrm>
           <a:prstGeom prst="rect">
@@ -56592,7 +56671,11 @@
           <a:lstStyle/>
           <a:p>
             <a:r>
-              <a:rPr lang="en-US" i="1" dirty="0"/>
+              <a:rPr lang="en-US" i="1" dirty="0">
+                <a:solidFill>
+                  <a:srgbClr val="C00000"/>
+                </a:solidFill>
+              </a:rPr>
               <a:t>b</a:t>
             </a:r>
           </a:p>
@@ -56606,7 +56689,7 @@
         </p:nvSpPr>
         <p:spPr>
           <a:xfrm>
-            <a:off x="3067050" y="1276350"/>
+            <a:off x="1841497" y="1212850"/>
             <a:ext cx="320922" cy="461665"/>
           </a:xfrm>
           <a:prstGeom prst="rect">
@@ -56635,7 +56718,7 @@
         </p:nvSpPr>
         <p:spPr>
           <a:xfrm>
-            <a:off x="3437335" y="1952113"/>
+            <a:off x="2211782" y="1888613"/>
             <a:ext cx="825501" cy="1015663"/>
           </a:xfrm>
           <a:prstGeom prst="rect">
@@ -56655,6 +56738,780 @@
               <a:t>||</a:t>
             </a:r>
             <a:endParaRPr lang="en-US" sz="6000" b="1" dirty="0"/>
+          </a:p>
+        </p:txBody>
+      </p:sp>
+      <p:sp>
+        <p:nvSpPr>
+          <p:cNvPr id="9" name="Rounded Rectangle 8">
+            <a:extLst>
+              <a:ext uri="{FF2B5EF4-FFF2-40B4-BE49-F238E27FC236}">
+                <a16:creationId xmlns:a16="http://schemas.microsoft.com/office/drawing/2014/main" id="{79F1EE62-1E14-3B16-8658-C43F2D4FD6E8}"/>
+              </a:ext>
+            </a:extLst>
+          </p:cNvPr>
+          <p:cNvSpPr/>
+          <p:nvPr/>
+        </p:nvSpPr>
+        <p:spPr>
+          <a:xfrm>
+            <a:off x="6116635" y="2138521"/>
+            <a:ext cx="505502" cy="294818"/>
+          </a:xfrm>
+          <a:prstGeom prst="roundRect">
+            <a:avLst>
+              <a:gd name="adj" fmla="val 37006"/>
+            </a:avLst>
+          </a:prstGeom>
+          <a:noFill/>
+        </p:spPr>
+        <p:style>
+          <a:lnRef idx="1">
+            <a:schemeClr val="accent5"/>
+          </a:lnRef>
+          <a:fillRef idx="3">
+            <a:schemeClr val="accent5"/>
+          </a:fillRef>
+          <a:effectRef idx="2">
+            <a:schemeClr val="accent5"/>
+          </a:effectRef>
+          <a:fontRef idx="minor">
+            <a:schemeClr val="lt1"/>
+          </a:fontRef>
+        </p:style>
+        <p:txBody>
+          <a:bodyPr anchor="ctr"/>
+          <a:lstStyle/>
+          <a:p>
+            <a:pPr algn="ctr">
+              <a:defRPr/>
+            </a:pPr>
+            <a:r>
+              <a:rPr lang="nl-NL" sz="1200" dirty="0">
+                <a:solidFill>
+                  <a:schemeClr val="tx1"/>
+                </a:solidFill>
+                <a:cs typeface="Arial" pitchFamily="34" charset="0"/>
+              </a:rPr>
+              <a:t>0,0</a:t>
+            </a:r>
+          </a:p>
+        </p:txBody>
+      </p:sp>
+      <p:sp>
+        <p:nvSpPr>
+          <p:cNvPr id="13" name="Rounded Rectangle 12">
+            <a:extLst>
+              <a:ext uri="{FF2B5EF4-FFF2-40B4-BE49-F238E27FC236}">
+                <a16:creationId xmlns:a16="http://schemas.microsoft.com/office/drawing/2014/main" id="{FB7261E0-B4CE-9EA9-9823-192560E01503}"/>
+              </a:ext>
+            </a:extLst>
+          </p:cNvPr>
+          <p:cNvSpPr/>
+          <p:nvPr/>
+        </p:nvSpPr>
+        <p:spPr>
+          <a:xfrm>
+            <a:off x="7178513" y="2138521"/>
+            <a:ext cx="505502" cy="294818"/>
+          </a:xfrm>
+          <a:prstGeom prst="roundRect">
+            <a:avLst>
+              <a:gd name="adj" fmla="val 37006"/>
+            </a:avLst>
+          </a:prstGeom>
+          <a:noFill/>
+        </p:spPr>
+        <p:style>
+          <a:lnRef idx="1">
+            <a:schemeClr val="accent5"/>
+          </a:lnRef>
+          <a:fillRef idx="3">
+            <a:schemeClr val="accent5"/>
+          </a:fillRef>
+          <a:effectRef idx="2">
+            <a:schemeClr val="accent5"/>
+          </a:effectRef>
+          <a:fontRef idx="minor">
+            <a:schemeClr val="lt1"/>
+          </a:fontRef>
+        </p:style>
+        <p:txBody>
+          <a:bodyPr anchor="ctr"/>
+          <a:lstStyle/>
+          <a:p>
+            <a:pPr algn="ctr">
+              <a:defRPr/>
+            </a:pPr>
+            <a:r>
+              <a:rPr lang="nl-NL" sz="1200" dirty="0">
+                <a:solidFill>
+                  <a:schemeClr val="tx1"/>
+                </a:solidFill>
+                <a:cs typeface="Arial" pitchFamily="34" charset="0"/>
+              </a:rPr>
+              <a:t>0,1</a:t>
+            </a:r>
+          </a:p>
+        </p:txBody>
+      </p:sp>
+      <p:cxnSp>
+        <p:nvCxnSpPr>
+          <p:cNvPr id="21" name="Straight Arrow Connector 20">
+            <a:extLst>
+              <a:ext uri="{FF2B5EF4-FFF2-40B4-BE49-F238E27FC236}">
+                <a16:creationId xmlns:a16="http://schemas.microsoft.com/office/drawing/2014/main" id="{CFD1F94E-AFCD-4DF2-C640-4AD5300B4B78}"/>
+              </a:ext>
+            </a:extLst>
+          </p:cNvPr>
+          <p:cNvCxnSpPr>
+            <a:stCxn id="9" idx="3"/>
+            <a:endCxn id="13" idx="1"/>
+          </p:cNvCxnSpPr>
+          <p:nvPr/>
+        </p:nvCxnSpPr>
+        <p:spPr>
+          <a:xfrm>
+            <a:off x="6622137" y="2285930"/>
+            <a:ext cx="556376" cy="0"/>
+          </a:xfrm>
+          <a:prstGeom prst="straightConnector1">
+            <a:avLst/>
+          </a:prstGeom>
+          <a:ln>
+            <a:solidFill>
+              <a:srgbClr val="C00000"/>
+            </a:solidFill>
+            <a:tailEnd type="triangle"/>
+          </a:ln>
+        </p:spPr>
+        <p:style>
+          <a:lnRef idx="1">
+            <a:schemeClr val="accent1"/>
+          </a:lnRef>
+          <a:fillRef idx="0">
+            <a:schemeClr val="accent1"/>
+          </a:fillRef>
+          <a:effectRef idx="0">
+            <a:schemeClr val="accent1"/>
+          </a:effectRef>
+          <a:fontRef idx="minor">
+            <a:schemeClr val="tx1"/>
+          </a:fontRef>
+        </p:style>
+      </p:cxnSp>
+      <p:cxnSp>
+        <p:nvCxnSpPr>
+          <p:cNvPr id="24" name="Curved Connector 23">
+            <a:extLst>
+              <a:ext uri="{FF2B5EF4-FFF2-40B4-BE49-F238E27FC236}">
+                <a16:creationId xmlns:a16="http://schemas.microsoft.com/office/drawing/2014/main" id="{9AFC16A1-7422-9922-9BA3-0652E8121783}"/>
+              </a:ext>
+            </a:extLst>
+          </p:cNvPr>
+          <p:cNvCxnSpPr>
+            <a:stCxn id="9" idx="3"/>
+            <a:endCxn id="9" idx="0"/>
+          </p:cNvCxnSpPr>
+          <p:nvPr/>
+        </p:nvCxnSpPr>
+        <p:spPr>
+          <a:xfrm flipH="1" flipV="1">
+            <a:off x="6369386" y="2138521"/>
+            <a:ext cx="252751" cy="147409"/>
+          </a:xfrm>
+          <a:prstGeom prst="curvedConnector4">
+            <a:avLst>
+              <a:gd name="adj1" fmla="val -90445"/>
+              <a:gd name="adj2" fmla="val 255079"/>
+            </a:avLst>
+          </a:prstGeom>
+          <a:ln>
+            <a:solidFill>
+              <a:schemeClr val="bg2">
+                <a:lumMod val="50000"/>
+              </a:schemeClr>
+            </a:solidFill>
+            <a:tailEnd type="triangle"/>
+          </a:ln>
+        </p:spPr>
+        <p:style>
+          <a:lnRef idx="1">
+            <a:schemeClr val="accent1"/>
+          </a:lnRef>
+          <a:fillRef idx="0">
+            <a:schemeClr val="accent1"/>
+          </a:fillRef>
+          <a:effectRef idx="0">
+            <a:schemeClr val="accent1"/>
+          </a:effectRef>
+          <a:fontRef idx="minor">
+            <a:schemeClr val="tx1"/>
+          </a:fontRef>
+        </p:style>
+      </p:cxnSp>
+      <p:cxnSp>
+        <p:nvCxnSpPr>
+          <p:cNvPr id="26" name="Curved Connector 25">
+            <a:extLst>
+              <a:ext uri="{FF2B5EF4-FFF2-40B4-BE49-F238E27FC236}">
+                <a16:creationId xmlns:a16="http://schemas.microsoft.com/office/drawing/2014/main" id="{58E3D40F-A6D5-1DBD-10BE-5E2FD79309AE}"/>
+              </a:ext>
+            </a:extLst>
+          </p:cNvPr>
+          <p:cNvCxnSpPr>
+            <a:cxnSpLocks/>
+            <a:stCxn id="13" idx="3"/>
+            <a:endCxn id="13" idx="0"/>
+          </p:cNvCxnSpPr>
+          <p:nvPr/>
+        </p:nvCxnSpPr>
+        <p:spPr>
+          <a:xfrm flipH="1" flipV="1">
+            <a:off x="7431264" y="2138521"/>
+            <a:ext cx="252751" cy="147409"/>
+          </a:xfrm>
+          <a:prstGeom prst="curvedConnector4">
+            <a:avLst>
+              <a:gd name="adj1" fmla="val -90445"/>
+              <a:gd name="adj2" fmla="val 255079"/>
+            </a:avLst>
+          </a:prstGeom>
+          <a:ln>
+            <a:solidFill>
+              <a:schemeClr val="bg2">
+                <a:lumMod val="50000"/>
+              </a:schemeClr>
+            </a:solidFill>
+            <a:tailEnd type="triangle"/>
+          </a:ln>
+        </p:spPr>
+        <p:style>
+          <a:lnRef idx="1">
+            <a:schemeClr val="accent1"/>
+          </a:lnRef>
+          <a:fillRef idx="0">
+            <a:schemeClr val="accent1"/>
+          </a:fillRef>
+          <a:effectRef idx="0">
+            <a:schemeClr val="accent1"/>
+          </a:effectRef>
+          <a:fontRef idx="minor">
+            <a:schemeClr val="tx1"/>
+          </a:fontRef>
+        </p:style>
+      </p:cxnSp>
+      <p:sp>
+        <p:nvSpPr>
+          <p:cNvPr id="29" name="Rounded Rectangle 28">
+            <a:extLst>
+              <a:ext uri="{FF2B5EF4-FFF2-40B4-BE49-F238E27FC236}">
+                <a16:creationId xmlns:a16="http://schemas.microsoft.com/office/drawing/2014/main" id="{5CBA54F9-EEB2-5D65-B982-C3D548A2C036}"/>
+              </a:ext>
+            </a:extLst>
+          </p:cNvPr>
+          <p:cNvSpPr/>
+          <p:nvPr/>
+        </p:nvSpPr>
+        <p:spPr>
+          <a:xfrm>
+            <a:off x="6116635" y="2736583"/>
+            <a:ext cx="505502" cy="294818"/>
+          </a:xfrm>
+          <a:prstGeom prst="roundRect">
+            <a:avLst>
+              <a:gd name="adj" fmla="val 37006"/>
+            </a:avLst>
+          </a:prstGeom>
+          <a:noFill/>
+        </p:spPr>
+        <p:style>
+          <a:lnRef idx="1">
+            <a:schemeClr val="accent5"/>
+          </a:lnRef>
+          <a:fillRef idx="3">
+            <a:schemeClr val="accent5"/>
+          </a:fillRef>
+          <a:effectRef idx="2">
+            <a:schemeClr val="accent5"/>
+          </a:effectRef>
+          <a:fontRef idx="minor">
+            <a:schemeClr val="lt1"/>
+          </a:fontRef>
+        </p:style>
+        <p:txBody>
+          <a:bodyPr anchor="ctr"/>
+          <a:lstStyle/>
+          <a:p>
+            <a:pPr algn="ctr">
+              <a:defRPr/>
+            </a:pPr>
+            <a:r>
+              <a:rPr lang="nl-NL" sz="1200" dirty="0">
+                <a:solidFill>
+                  <a:schemeClr val="tx1"/>
+                </a:solidFill>
+                <a:cs typeface="Arial" pitchFamily="34" charset="0"/>
+              </a:rPr>
+              <a:t>1,0</a:t>
+            </a:r>
+          </a:p>
+        </p:txBody>
+      </p:sp>
+      <p:cxnSp>
+        <p:nvCxnSpPr>
+          <p:cNvPr id="30" name="Straight Arrow Connector 29">
+            <a:extLst>
+              <a:ext uri="{FF2B5EF4-FFF2-40B4-BE49-F238E27FC236}">
+                <a16:creationId xmlns:a16="http://schemas.microsoft.com/office/drawing/2014/main" id="{B02A431D-54AA-7196-1726-A86311036FB2}"/>
+              </a:ext>
+            </a:extLst>
+          </p:cNvPr>
+          <p:cNvCxnSpPr>
+            <a:cxnSpLocks/>
+            <a:stCxn id="9" idx="2"/>
+            <a:endCxn id="29" idx="0"/>
+          </p:cNvCxnSpPr>
+          <p:nvPr/>
+        </p:nvCxnSpPr>
+        <p:spPr>
+          <a:xfrm>
+            <a:off x="6369386" y="2433339"/>
+            <a:ext cx="0" cy="303244"/>
+          </a:xfrm>
+          <a:prstGeom prst="straightConnector1">
+            <a:avLst/>
+          </a:prstGeom>
+          <a:ln>
+            <a:solidFill>
+              <a:schemeClr val="tx1"/>
+            </a:solidFill>
+            <a:tailEnd type="triangle"/>
+          </a:ln>
+        </p:spPr>
+        <p:style>
+          <a:lnRef idx="1">
+            <a:schemeClr val="accent1"/>
+          </a:lnRef>
+          <a:fillRef idx="0">
+            <a:schemeClr val="accent1"/>
+          </a:fillRef>
+          <a:effectRef idx="0">
+            <a:schemeClr val="accent1"/>
+          </a:effectRef>
+          <a:fontRef idx="minor">
+            <a:schemeClr val="tx1"/>
+          </a:fontRef>
+        </p:style>
+      </p:cxnSp>
+      <p:sp>
+        <p:nvSpPr>
+          <p:cNvPr id="33" name="Rounded Rectangle 32">
+            <a:extLst>
+              <a:ext uri="{FF2B5EF4-FFF2-40B4-BE49-F238E27FC236}">
+                <a16:creationId xmlns:a16="http://schemas.microsoft.com/office/drawing/2014/main" id="{D1A0F0FA-000F-EFB8-3B32-E919F76DBB23}"/>
+              </a:ext>
+            </a:extLst>
+          </p:cNvPr>
+          <p:cNvSpPr/>
+          <p:nvPr/>
+        </p:nvSpPr>
+        <p:spPr>
+          <a:xfrm>
+            <a:off x="7178513" y="2743657"/>
+            <a:ext cx="505502" cy="294818"/>
+          </a:xfrm>
+          <a:prstGeom prst="roundRect">
+            <a:avLst>
+              <a:gd name="adj" fmla="val 37006"/>
+            </a:avLst>
+          </a:prstGeom>
+          <a:noFill/>
+        </p:spPr>
+        <p:style>
+          <a:lnRef idx="1">
+            <a:schemeClr val="accent5"/>
+          </a:lnRef>
+          <a:fillRef idx="3">
+            <a:schemeClr val="accent5"/>
+          </a:fillRef>
+          <a:effectRef idx="2">
+            <a:schemeClr val="accent5"/>
+          </a:effectRef>
+          <a:fontRef idx="minor">
+            <a:schemeClr val="lt1"/>
+          </a:fontRef>
+        </p:style>
+        <p:txBody>
+          <a:bodyPr anchor="ctr"/>
+          <a:lstStyle/>
+          <a:p>
+            <a:pPr algn="ctr">
+              <a:defRPr/>
+            </a:pPr>
+            <a:r>
+              <a:rPr lang="nl-NL" sz="1200" dirty="0">
+                <a:solidFill>
+                  <a:schemeClr val="tx1"/>
+                </a:solidFill>
+                <a:cs typeface="Arial" pitchFamily="34" charset="0"/>
+              </a:rPr>
+              <a:t>1,1</a:t>
+            </a:r>
+          </a:p>
+        </p:txBody>
+      </p:sp>
+      <p:cxnSp>
+        <p:nvCxnSpPr>
+          <p:cNvPr id="34" name="Straight Arrow Connector 33">
+            <a:extLst>
+              <a:ext uri="{FF2B5EF4-FFF2-40B4-BE49-F238E27FC236}">
+                <a16:creationId xmlns:a16="http://schemas.microsoft.com/office/drawing/2014/main" id="{9D69796B-0C5D-ACEE-39CF-E45BB382B78D}"/>
+              </a:ext>
+            </a:extLst>
+          </p:cNvPr>
+          <p:cNvCxnSpPr>
+            <a:cxnSpLocks/>
+            <a:stCxn id="13" idx="2"/>
+            <a:endCxn id="33" idx="0"/>
+          </p:cNvCxnSpPr>
+          <p:nvPr/>
+        </p:nvCxnSpPr>
+        <p:spPr>
+          <a:xfrm>
+            <a:off x="7431264" y="2433339"/>
+            <a:ext cx="0" cy="310318"/>
+          </a:xfrm>
+          <a:prstGeom prst="straightConnector1">
+            <a:avLst/>
+          </a:prstGeom>
+          <a:ln>
+            <a:solidFill>
+              <a:schemeClr val="tx1"/>
+            </a:solidFill>
+            <a:tailEnd type="triangle"/>
+          </a:ln>
+        </p:spPr>
+        <p:style>
+          <a:lnRef idx="1">
+            <a:schemeClr val="accent1"/>
+          </a:lnRef>
+          <a:fillRef idx="0">
+            <a:schemeClr val="accent1"/>
+          </a:fillRef>
+          <a:effectRef idx="0">
+            <a:schemeClr val="accent1"/>
+          </a:effectRef>
+          <a:fontRef idx="minor">
+            <a:schemeClr val="tx1"/>
+          </a:fontRef>
+        </p:style>
+      </p:cxnSp>
+      <p:cxnSp>
+        <p:nvCxnSpPr>
+          <p:cNvPr id="37" name="Straight Arrow Connector 36">
+            <a:extLst>
+              <a:ext uri="{FF2B5EF4-FFF2-40B4-BE49-F238E27FC236}">
+                <a16:creationId xmlns:a16="http://schemas.microsoft.com/office/drawing/2014/main" id="{C2AB4DBC-33DD-10E2-D3A4-89B742C67348}"/>
+              </a:ext>
+            </a:extLst>
+          </p:cNvPr>
+          <p:cNvCxnSpPr>
+            <a:cxnSpLocks/>
+            <a:stCxn id="29" idx="3"/>
+            <a:endCxn id="33" idx="1"/>
+          </p:cNvCxnSpPr>
+          <p:nvPr/>
+        </p:nvCxnSpPr>
+        <p:spPr>
+          <a:xfrm>
+            <a:off x="6622137" y="2883992"/>
+            <a:ext cx="556376" cy="7074"/>
+          </a:xfrm>
+          <a:prstGeom prst="straightConnector1">
+            <a:avLst/>
+          </a:prstGeom>
+          <a:ln>
+            <a:solidFill>
+              <a:srgbClr val="C00000"/>
+            </a:solidFill>
+            <a:tailEnd type="triangle"/>
+          </a:ln>
+        </p:spPr>
+        <p:style>
+          <a:lnRef idx="1">
+            <a:schemeClr val="accent1"/>
+          </a:lnRef>
+          <a:fillRef idx="0">
+            <a:schemeClr val="accent1"/>
+          </a:fillRef>
+          <a:effectRef idx="0">
+            <a:schemeClr val="accent1"/>
+          </a:effectRef>
+          <a:fontRef idx="minor">
+            <a:schemeClr val="tx1"/>
+          </a:fontRef>
+        </p:style>
+      </p:cxnSp>
+      <p:sp>
+        <p:nvSpPr>
+          <p:cNvPr id="42" name="Right Arrow 41">
+            <a:extLst>
+              <a:ext uri="{FF2B5EF4-FFF2-40B4-BE49-F238E27FC236}">
+                <a16:creationId xmlns:a16="http://schemas.microsoft.com/office/drawing/2014/main" id="{E135804D-DE6A-0891-2DCB-22D2CCEC6FB4}"/>
+              </a:ext>
+            </a:extLst>
+          </p:cNvPr>
+          <p:cNvSpPr/>
+          <p:nvPr/>
+        </p:nvSpPr>
+        <p:spPr>
+          <a:xfrm>
+            <a:off x="5086350" y="2324100"/>
+            <a:ext cx="552450" cy="381000"/>
+          </a:xfrm>
+          <a:prstGeom prst="rightArrow">
+            <a:avLst/>
+          </a:prstGeom>
+        </p:spPr>
+        <p:style>
+          <a:lnRef idx="2">
+            <a:schemeClr val="dk1"/>
+          </a:lnRef>
+          <a:fillRef idx="1">
+            <a:schemeClr val="lt1"/>
+          </a:fillRef>
+          <a:effectRef idx="0">
+            <a:schemeClr val="dk1"/>
+          </a:effectRef>
+          <a:fontRef idx="minor">
+            <a:schemeClr val="dk1"/>
+          </a:fontRef>
+        </p:style>
+        <p:txBody>
+          <a:bodyPr rtlCol="0" anchor="ctr"/>
+          <a:lstStyle/>
+          <a:p>
+            <a:pPr algn="ctr"/>
+            <a:endParaRPr lang="en-US"/>
+          </a:p>
+        </p:txBody>
+      </p:sp>
+      <p:sp>
+        <p:nvSpPr>
+          <p:cNvPr id="43" name="TextBox 42">
+            <a:extLst>
+              <a:ext uri="{FF2B5EF4-FFF2-40B4-BE49-F238E27FC236}">
+                <a16:creationId xmlns:a16="http://schemas.microsoft.com/office/drawing/2014/main" id="{4D575ECF-7EFB-BBF3-CE46-169265BA7C11}"/>
+              </a:ext>
+            </a:extLst>
+          </p:cNvPr>
+          <p:cNvSpPr txBox="1"/>
+          <p:nvPr/>
+        </p:nvSpPr>
+        <p:spPr>
+          <a:xfrm>
+            <a:off x="6086806" y="2396189"/>
+            <a:ext cx="287258" cy="338554"/>
+          </a:xfrm>
+          <a:prstGeom prst="rect">
+            <a:avLst/>
+          </a:prstGeom>
+          <a:noFill/>
+        </p:spPr>
+        <p:txBody>
+          <a:bodyPr wrap="none" rtlCol="0">
+            <a:spAutoFit/>
+          </a:bodyPr>
+          <a:lstStyle/>
+          <a:p>
+            <a:r>
+              <a:rPr lang="en-NL" sz="1600" i="1" dirty="0"/>
+              <a:t>a</a:t>
+            </a:r>
+          </a:p>
+        </p:txBody>
+      </p:sp>
+      <p:sp>
+        <p:nvSpPr>
+          <p:cNvPr id="44" name="TextBox 43">
+            <a:extLst>
+              <a:ext uri="{FF2B5EF4-FFF2-40B4-BE49-F238E27FC236}">
+                <a16:creationId xmlns:a16="http://schemas.microsoft.com/office/drawing/2014/main" id="{7D915098-E9DD-34A4-E3B2-841441A96869}"/>
+              </a:ext>
+            </a:extLst>
+          </p:cNvPr>
+          <p:cNvSpPr txBox="1"/>
+          <p:nvPr/>
+        </p:nvSpPr>
+        <p:spPr>
+          <a:xfrm>
+            <a:off x="7186452" y="2415684"/>
+            <a:ext cx="287258" cy="338554"/>
+          </a:xfrm>
+          <a:prstGeom prst="rect">
+            <a:avLst/>
+          </a:prstGeom>
+          <a:noFill/>
+        </p:spPr>
+        <p:txBody>
+          <a:bodyPr wrap="none" rtlCol="0">
+            <a:spAutoFit/>
+          </a:bodyPr>
+          <a:lstStyle/>
+          <a:p>
+            <a:r>
+              <a:rPr lang="en-NL" sz="1600" i="1" dirty="0"/>
+              <a:t>a</a:t>
+            </a:r>
+          </a:p>
+        </p:txBody>
+      </p:sp>
+      <p:sp>
+        <p:nvSpPr>
+          <p:cNvPr id="45" name="TextBox 44">
+            <a:extLst>
+              <a:ext uri="{FF2B5EF4-FFF2-40B4-BE49-F238E27FC236}">
+                <a16:creationId xmlns:a16="http://schemas.microsoft.com/office/drawing/2014/main" id="{4987D799-7B28-CD1C-62BF-44C6CF8FD17F}"/>
+              </a:ext>
+            </a:extLst>
+          </p:cNvPr>
+          <p:cNvSpPr txBox="1"/>
+          <p:nvPr/>
+        </p:nvSpPr>
+        <p:spPr>
+          <a:xfrm>
+            <a:off x="6648295" y="1666001"/>
+            <a:ext cx="276038" cy="338554"/>
+          </a:xfrm>
+          <a:prstGeom prst="rect">
+            <a:avLst/>
+          </a:prstGeom>
+          <a:noFill/>
+        </p:spPr>
+        <p:txBody>
+          <a:bodyPr wrap="none" rtlCol="0">
+            <a:spAutoFit/>
+          </a:bodyPr>
+          <a:lstStyle/>
+          <a:p>
+            <a:r>
+              <a:rPr lang="en-NL" sz="1600" i="1" dirty="0"/>
+              <a:t>c</a:t>
+            </a:r>
+          </a:p>
+        </p:txBody>
+      </p:sp>
+      <p:sp>
+        <p:nvSpPr>
+          <p:cNvPr id="46" name="TextBox 45">
+            <a:extLst>
+              <a:ext uri="{FF2B5EF4-FFF2-40B4-BE49-F238E27FC236}">
+                <a16:creationId xmlns:a16="http://schemas.microsoft.com/office/drawing/2014/main" id="{8D746EEC-5AE9-E0F7-F4EB-4C4DFF5AF731}"/>
+              </a:ext>
+            </a:extLst>
+          </p:cNvPr>
+          <p:cNvSpPr txBox="1"/>
+          <p:nvPr/>
+        </p:nvSpPr>
+        <p:spPr>
+          <a:xfrm>
+            <a:off x="7817279" y="1700663"/>
+            <a:ext cx="276038" cy="338554"/>
+          </a:xfrm>
+          <a:prstGeom prst="rect">
+            <a:avLst/>
+          </a:prstGeom>
+          <a:noFill/>
+        </p:spPr>
+        <p:txBody>
+          <a:bodyPr wrap="none" rtlCol="0">
+            <a:spAutoFit/>
+          </a:bodyPr>
+          <a:lstStyle/>
+          <a:p>
+            <a:r>
+              <a:rPr lang="en-NL" sz="1600" i="1" dirty="0"/>
+              <a:t>c</a:t>
+            </a:r>
+          </a:p>
+        </p:txBody>
+      </p:sp>
+      <p:sp>
+        <p:nvSpPr>
+          <p:cNvPr id="47" name="TextBox 46">
+            <a:extLst>
+              <a:ext uri="{FF2B5EF4-FFF2-40B4-BE49-F238E27FC236}">
+                <a16:creationId xmlns:a16="http://schemas.microsoft.com/office/drawing/2014/main" id="{CA63D876-1694-84FD-3ACF-DCAB0F0A9EDB}"/>
+              </a:ext>
+            </a:extLst>
+          </p:cNvPr>
+          <p:cNvSpPr txBox="1"/>
+          <p:nvPr/>
+        </p:nvSpPr>
+        <p:spPr>
+          <a:xfrm>
+            <a:off x="6731259" y="2241923"/>
+            <a:ext cx="287258" cy="338554"/>
+          </a:xfrm>
+          <a:prstGeom prst="rect">
+            <a:avLst/>
+          </a:prstGeom>
+          <a:noFill/>
+        </p:spPr>
+        <p:txBody>
+          <a:bodyPr wrap="none" rtlCol="0">
+            <a:spAutoFit/>
+          </a:bodyPr>
+          <a:lstStyle/>
+          <a:p>
+            <a:r>
+              <a:rPr lang="en-NL" sz="1600" i="1" dirty="0">
+                <a:solidFill>
+                  <a:srgbClr val="C00000"/>
+                </a:solidFill>
+              </a:rPr>
+              <a:t>b</a:t>
+            </a:r>
+          </a:p>
+        </p:txBody>
+      </p:sp>
+      <p:sp>
+        <p:nvSpPr>
+          <p:cNvPr id="48" name="TextBox 47">
+            <a:extLst>
+              <a:ext uri="{FF2B5EF4-FFF2-40B4-BE49-F238E27FC236}">
+                <a16:creationId xmlns:a16="http://schemas.microsoft.com/office/drawing/2014/main" id="{6D5D1EF7-6A3D-80A2-C7CF-E268859C3CB9}"/>
+              </a:ext>
+            </a:extLst>
+          </p:cNvPr>
+          <p:cNvSpPr txBox="1"/>
+          <p:nvPr/>
+        </p:nvSpPr>
+        <p:spPr>
+          <a:xfrm>
+            <a:off x="6736369" y="2792904"/>
+            <a:ext cx="287258" cy="338554"/>
+          </a:xfrm>
+          <a:prstGeom prst="rect">
+            <a:avLst/>
+          </a:prstGeom>
+          <a:noFill/>
+        </p:spPr>
+        <p:txBody>
+          <a:bodyPr wrap="none" rtlCol="0">
+            <a:spAutoFit/>
+          </a:bodyPr>
+          <a:lstStyle/>
+          <a:p>
+            <a:r>
+              <a:rPr lang="en-NL" sz="1600" i="1" dirty="0">
+                <a:solidFill>
+                  <a:srgbClr val="C00000"/>
+                </a:solidFill>
+              </a:rPr>
+              <a:t>b</a:t>
+            </a:r>
           </a:p>
         </p:txBody>
       </p:sp>
@@ -56829,7 +57686,7 @@
         </p:nvSpPr>
         <p:spPr>
           <a:xfrm>
-            <a:off x="2114550" y="1827213"/>
+            <a:off x="1644523" y="1790622"/>
             <a:ext cx="703263" cy="593725"/>
           </a:xfrm>
           <a:prstGeom prst="roundRect">
@@ -56876,7 +57733,7 @@
         </p:nvSpPr>
         <p:spPr>
           <a:xfrm>
-            <a:off x="2152649" y="2841625"/>
+            <a:off x="1682622" y="2805034"/>
             <a:ext cx="657225" cy="593725"/>
           </a:xfrm>
           <a:prstGeom prst="roundRect">
@@ -56925,7 +57782,7 @@
         </p:nvCxnSpPr>
         <p:spPr>
           <a:xfrm rot="10800000">
-            <a:off x="2466183" y="1827213"/>
+            <a:off x="1996156" y="1790622"/>
             <a:ext cx="351631" cy="296862"/>
           </a:xfrm>
           <a:prstGeom prst="curvedConnector4">
@@ -56937,7 +57794,7 @@
           <a:ln>
             <a:solidFill>
               <a:schemeClr val="bg2">
-                <a:lumMod val="10000"/>
+                <a:lumMod val="50000"/>
               </a:schemeClr>
             </a:solidFill>
             <a:tailEnd type="arrow"/>
@@ -56969,17 +57826,15 @@
         </p:nvCxnSpPr>
         <p:spPr>
           <a:xfrm>
-            <a:off x="2466182" y="2420938"/>
+            <a:off x="1996155" y="2384347"/>
             <a:ext cx="15080" cy="420687"/>
           </a:xfrm>
           <a:prstGeom prst="straightConnector1">
             <a:avLst/>
           </a:prstGeom>
-          <a:ln>
+          <a:ln w="28575">
             <a:solidFill>
-              <a:schemeClr val="bg2">
-                <a:lumMod val="10000"/>
-              </a:schemeClr>
+              <a:srgbClr val="C00000"/>
             </a:solidFill>
             <a:tailEnd type="arrow"/>
           </a:ln>
@@ -57007,7 +57862,7 @@
         </p:nvCxnSpPr>
         <p:spPr>
           <a:xfrm>
-            <a:off x="1828803" y="1771653"/>
+            <a:off x="1358776" y="1735062"/>
             <a:ext cx="295273" cy="141285"/>
           </a:xfrm>
           <a:prstGeom prst="straightConnector1">
@@ -57040,7 +57895,7 @@
         </p:nvSpPr>
         <p:spPr>
           <a:xfrm>
-            <a:off x="4705350" y="1884363"/>
+            <a:off x="4235323" y="1847772"/>
             <a:ext cx="703263" cy="593725"/>
           </a:xfrm>
           <a:prstGeom prst="roundRect">
@@ -57087,7 +57942,7 @@
         </p:nvSpPr>
         <p:spPr>
           <a:xfrm>
-            <a:off x="4743449" y="2898775"/>
+            <a:off x="4273422" y="2862184"/>
             <a:ext cx="657225" cy="593725"/>
           </a:xfrm>
           <a:prstGeom prst="roundRect">
@@ -57137,17 +57992,15 @@
         </p:nvCxnSpPr>
         <p:spPr>
           <a:xfrm>
-            <a:off x="5056982" y="2478088"/>
+            <a:off x="4586955" y="2441497"/>
             <a:ext cx="15080" cy="420687"/>
           </a:xfrm>
           <a:prstGeom prst="straightConnector1">
             <a:avLst/>
           </a:prstGeom>
-          <a:ln>
+          <a:ln w="28575">
             <a:solidFill>
-              <a:schemeClr val="bg2">
-                <a:lumMod val="10000"/>
-              </a:schemeClr>
+              <a:srgbClr val="C00000"/>
             </a:solidFill>
             <a:tailEnd type="arrow"/>
           </a:ln>
@@ -57175,7 +58028,7 @@
         </p:nvCxnSpPr>
         <p:spPr>
           <a:xfrm>
-            <a:off x="4419603" y="1828803"/>
+            <a:off x="3949576" y="1792212"/>
             <a:ext cx="295273" cy="141285"/>
           </a:xfrm>
           <a:prstGeom prst="straightConnector1">
@@ -57208,7 +58061,7 @@
         </p:nvSpPr>
         <p:spPr>
           <a:xfrm>
-            <a:off x="2114550" y="2400300"/>
+            <a:off x="1644523" y="2363709"/>
             <a:ext cx="338554" cy="461665"/>
           </a:xfrm>
           <a:prstGeom prst="rect">
@@ -57223,7 +58076,11 @@
           <a:lstStyle/>
           <a:p>
             <a:r>
-              <a:rPr lang="en-US" i="1" dirty="0"/>
+              <a:rPr lang="en-US" i="1" dirty="0">
+                <a:solidFill>
+                  <a:srgbClr val="C00000"/>
+                </a:solidFill>
+              </a:rPr>
               <a:t>a</a:t>
             </a:r>
           </a:p>
@@ -57237,7 +58094,7 @@
         </p:nvSpPr>
         <p:spPr>
           <a:xfrm>
-            <a:off x="4667250" y="2419350"/>
+            <a:off x="4197223" y="2382759"/>
             <a:ext cx="338554" cy="461665"/>
           </a:xfrm>
           <a:prstGeom prst="rect">
@@ -57252,7 +58109,11 @@
           <a:lstStyle/>
           <a:p>
             <a:r>
-              <a:rPr lang="en-US" i="1" dirty="0"/>
+              <a:rPr lang="en-US" i="1" dirty="0">
+                <a:solidFill>
+                  <a:srgbClr val="C00000"/>
+                </a:solidFill>
+              </a:rPr>
               <a:t>a</a:t>
             </a:r>
           </a:p>
@@ -57266,7 +58127,7 @@
         </p:nvSpPr>
         <p:spPr>
           <a:xfrm>
-            <a:off x="3067050" y="1276350"/>
+            <a:off x="2597023" y="1239759"/>
             <a:ext cx="320922" cy="461665"/>
           </a:xfrm>
           <a:prstGeom prst="rect">
@@ -57295,7 +58156,7 @@
         </p:nvSpPr>
         <p:spPr>
           <a:xfrm>
-            <a:off x="1504950" y="2286000"/>
+            <a:off x="1034923" y="2249409"/>
             <a:ext cx="4210050" cy="723900"/>
           </a:xfrm>
           <a:prstGeom prst="roundRect">
@@ -57349,7 +58210,7 @@
         </p:nvCxnSpPr>
         <p:spPr>
           <a:xfrm flipH="1">
-            <a:off x="5072062" y="3195638"/>
+            <a:off x="4602035" y="3159047"/>
             <a:ext cx="328612" cy="296862"/>
           </a:xfrm>
           <a:prstGeom prst="curvedConnector4">
@@ -57396,7 +58257,7 @@
         </p:nvSpPr>
         <p:spPr>
           <a:xfrm>
-            <a:off x="5977164" y="3344069"/>
+            <a:off x="5507137" y="3307478"/>
             <a:ext cx="338554" cy="461665"/>
           </a:xfrm>
           <a:prstGeom prst="rect">
@@ -57412,6 +58273,418 @@
           <a:p>
             <a:r>
               <a:rPr lang="en-US" i="1" dirty="0"/>
+              <a:t>d</a:t>
+            </a:r>
+          </a:p>
+        </p:txBody>
+      </p:sp>
+      <p:sp>
+        <p:nvSpPr>
+          <p:cNvPr id="19" name="Rounded Rectangle 18">
+            <a:extLst>
+              <a:ext uri="{FF2B5EF4-FFF2-40B4-BE49-F238E27FC236}">
+                <a16:creationId xmlns:a16="http://schemas.microsoft.com/office/drawing/2014/main" id="{6E7500B6-F81D-3BC7-3D4D-F7D2E1A8E579}"/>
+              </a:ext>
+            </a:extLst>
+          </p:cNvPr>
+          <p:cNvSpPr/>
+          <p:nvPr/>
+        </p:nvSpPr>
+        <p:spPr>
+          <a:xfrm>
+            <a:off x="7301379" y="2180173"/>
+            <a:ext cx="505502" cy="294818"/>
+          </a:xfrm>
+          <a:prstGeom prst="roundRect">
+            <a:avLst>
+              <a:gd name="adj" fmla="val 37006"/>
+            </a:avLst>
+          </a:prstGeom>
+          <a:noFill/>
+        </p:spPr>
+        <p:style>
+          <a:lnRef idx="1">
+            <a:schemeClr val="accent5"/>
+          </a:lnRef>
+          <a:fillRef idx="3">
+            <a:schemeClr val="accent5"/>
+          </a:fillRef>
+          <a:effectRef idx="2">
+            <a:schemeClr val="accent5"/>
+          </a:effectRef>
+          <a:fontRef idx="minor">
+            <a:schemeClr val="lt1"/>
+          </a:fontRef>
+        </p:style>
+        <p:txBody>
+          <a:bodyPr anchor="ctr"/>
+          <a:lstStyle/>
+          <a:p>
+            <a:pPr algn="ctr">
+              <a:defRPr/>
+            </a:pPr>
+            <a:r>
+              <a:rPr lang="nl-NL" sz="1200" dirty="0">
+                <a:solidFill>
+                  <a:schemeClr val="tx1"/>
+                </a:solidFill>
+                <a:cs typeface="Arial" pitchFamily="34" charset="0"/>
+              </a:rPr>
+              <a:t>0,0</a:t>
+            </a:r>
+          </a:p>
+        </p:txBody>
+      </p:sp>
+      <p:cxnSp>
+        <p:nvCxnSpPr>
+          <p:cNvPr id="22" name="Curved Connector 21">
+            <a:extLst>
+              <a:ext uri="{FF2B5EF4-FFF2-40B4-BE49-F238E27FC236}">
+                <a16:creationId xmlns:a16="http://schemas.microsoft.com/office/drawing/2014/main" id="{B1E693CE-ACAE-17EC-23FF-37C28A6CB178}"/>
+              </a:ext>
+            </a:extLst>
+          </p:cNvPr>
+          <p:cNvCxnSpPr>
+            <a:stCxn id="19" idx="3"/>
+            <a:endCxn id="19" idx="0"/>
+          </p:cNvCxnSpPr>
+          <p:nvPr/>
+        </p:nvCxnSpPr>
+        <p:spPr>
+          <a:xfrm flipH="1" flipV="1">
+            <a:off x="7554130" y="2180173"/>
+            <a:ext cx="252751" cy="147409"/>
+          </a:xfrm>
+          <a:prstGeom prst="curvedConnector4">
+            <a:avLst>
+              <a:gd name="adj1" fmla="val -90445"/>
+              <a:gd name="adj2" fmla="val 255079"/>
+            </a:avLst>
+          </a:prstGeom>
+          <a:ln>
+            <a:solidFill>
+              <a:schemeClr val="bg2">
+                <a:lumMod val="50000"/>
+              </a:schemeClr>
+            </a:solidFill>
+            <a:tailEnd type="triangle"/>
+          </a:ln>
+        </p:spPr>
+        <p:style>
+          <a:lnRef idx="1">
+            <a:schemeClr val="accent1"/>
+          </a:lnRef>
+          <a:fillRef idx="0">
+            <a:schemeClr val="accent1"/>
+          </a:fillRef>
+          <a:effectRef idx="0">
+            <a:schemeClr val="accent1"/>
+          </a:effectRef>
+          <a:fontRef idx="minor">
+            <a:schemeClr val="tx1"/>
+          </a:fontRef>
+        </p:style>
+      </p:cxnSp>
+      <p:cxnSp>
+        <p:nvCxnSpPr>
+          <p:cNvPr id="23" name="Curved Connector 22">
+            <a:extLst>
+              <a:ext uri="{FF2B5EF4-FFF2-40B4-BE49-F238E27FC236}">
+                <a16:creationId xmlns:a16="http://schemas.microsoft.com/office/drawing/2014/main" id="{59015896-18EC-A7E5-91DC-D31A65D0471D}"/>
+              </a:ext>
+            </a:extLst>
+          </p:cNvPr>
+          <p:cNvCxnSpPr>
+            <a:cxnSpLocks/>
+            <a:stCxn id="24" idx="3"/>
+            <a:endCxn id="24" idx="2"/>
+          </p:cNvCxnSpPr>
+          <p:nvPr/>
+        </p:nvCxnSpPr>
+        <p:spPr>
+          <a:xfrm flipH="1">
+            <a:off x="7554130" y="2925644"/>
+            <a:ext cx="252751" cy="147409"/>
+          </a:xfrm>
+          <a:prstGeom prst="curvedConnector4">
+            <a:avLst>
+              <a:gd name="adj1" fmla="val -90445"/>
+              <a:gd name="adj2" fmla="val 255079"/>
+            </a:avLst>
+          </a:prstGeom>
+          <a:ln>
+            <a:solidFill>
+              <a:schemeClr val="tx1"/>
+            </a:solidFill>
+            <a:tailEnd type="triangle"/>
+          </a:ln>
+        </p:spPr>
+        <p:style>
+          <a:lnRef idx="1">
+            <a:schemeClr val="accent1"/>
+          </a:lnRef>
+          <a:fillRef idx="0">
+            <a:schemeClr val="accent1"/>
+          </a:fillRef>
+          <a:effectRef idx="0">
+            <a:schemeClr val="accent1"/>
+          </a:effectRef>
+          <a:fontRef idx="minor">
+            <a:schemeClr val="tx1"/>
+          </a:fontRef>
+        </p:style>
+      </p:cxnSp>
+      <p:sp>
+        <p:nvSpPr>
+          <p:cNvPr id="24" name="Rounded Rectangle 23">
+            <a:extLst>
+              <a:ext uri="{FF2B5EF4-FFF2-40B4-BE49-F238E27FC236}">
+                <a16:creationId xmlns:a16="http://schemas.microsoft.com/office/drawing/2014/main" id="{652B5D3C-45D0-9732-1B8D-9DD72293FDDD}"/>
+              </a:ext>
+            </a:extLst>
+          </p:cNvPr>
+          <p:cNvSpPr/>
+          <p:nvPr/>
+        </p:nvSpPr>
+        <p:spPr>
+          <a:xfrm>
+            <a:off x="7301379" y="2778235"/>
+            <a:ext cx="505502" cy="294818"/>
+          </a:xfrm>
+          <a:prstGeom prst="roundRect">
+            <a:avLst>
+              <a:gd name="adj" fmla="val 37006"/>
+            </a:avLst>
+          </a:prstGeom>
+          <a:noFill/>
+        </p:spPr>
+        <p:style>
+          <a:lnRef idx="1">
+            <a:schemeClr val="accent5"/>
+          </a:lnRef>
+          <a:fillRef idx="3">
+            <a:schemeClr val="accent5"/>
+          </a:fillRef>
+          <a:effectRef idx="2">
+            <a:schemeClr val="accent5"/>
+          </a:effectRef>
+          <a:fontRef idx="minor">
+            <a:schemeClr val="lt1"/>
+          </a:fontRef>
+        </p:style>
+        <p:txBody>
+          <a:bodyPr anchor="ctr"/>
+          <a:lstStyle/>
+          <a:p>
+            <a:pPr algn="ctr">
+              <a:defRPr/>
+            </a:pPr>
+            <a:r>
+              <a:rPr lang="nl-NL" sz="1200" dirty="0">
+                <a:solidFill>
+                  <a:schemeClr val="tx1"/>
+                </a:solidFill>
+                <a:cs typeface="Arial" pitchFamily="34" charset="0"/>
+              </a:rPr>
+              <a:t>1,1</a:t>
+            </a:r>
+          </a:p>
+        </p:txBody>
+      </p:sp>
+      <p:cxnSp>
+        <p:nvCxnSpPr>
+          <p:cNvPr id="25" name="Straight Arrow Connector 24">
+            <a:extLst>
+              <a:ext uri="{FF2B5EF4-FFF2-40B4-BE49-F238E27FC236}">
+                <a16:creationId xmlns:a16="http://schemas.microsoft.com/office/drawing/2014/main" id="{1AA099DC-71F8-4213-76E3-F8150518DE01}"/>
+              </a:ext>
+            </a:extLst>
+          </p:cNvPr>
+          <p:cNvCxnSpPr>
+            <a:cxnSpLocks/>
+            <a:stCxn id="19" idx="2"/>
+            <a:endCxn id="24" idx="0"/>
+          </p:cNvCxnSpPr>
+          <p:nvPr/>
+        </p:nvCxnSpPr>
+        <p:spPr>
+          <a:xfrm>
+            <a:off x="7554130" y="2474991"/>
+            <a:ext cx="0" cy="303244"/>
+          </a:xfrm>
+          <a:prstGeom prst="straightConnector1">
+            <a:avLst/>
+          </a:prstGeom>
+          <a:ln w="19050">
+            <a:solidFill>
+              <a:srgbClr val="C00000"/>
+            </a:solidFill>
+            <a:tailEnd type="triangle"/>
+          </a:ln>
+        </p:spPr>
+        <p:style>
+          <a:lnRef idx="1">
+            <a:schemeClr val="accent1"/>
+          </a:lnRef>
+          <a:fillRef idx="0">
+            <a:schemeClr val="accent1"/>
+          </a:fillRef>
+          <a:effectRef idx="0">
+            <a:schemeClr val="accent1"/>
+          </a:effectRef>
+          <a:fontRef idx="minor">
+            <a:schemeClr val="tx1"/>
+          </a:fontRef>
+        </p:style>
+      </p:cxnSp>
+      <p:sp>
+        <p:nvSpPr>
+          <p:cNvPr id="30" name="Right Arrow 29">
+            <a:extLst>
+              <a:ext uri="{FF2B5EF4-FFF2-40B4-BE49-F238E27FC236}">
+                <a16:creationId xmlns:a16="http://schemas.microsoft.com/office/drawing/2014/main" id="{A7655068-C073-E7FE-5033-095578CE0076}"/>
+              </a:ext>
+            </a:extLst>
+          </p:cNvPr>
+          <p:cNvSpPr/>
+          <p:nvPr/>
+        </p:nvSpPr>
+        <p:spPr>
+          <a:xfrm>
+            <a:off x="6236764" y="2427357"/>
+            <a:ext cx="552450" cy="381000"/>
+          </a:xfrm>
+          <a:prstGeom prst="rightArrow">
+            <a:avLst/>
+          </a:prstGeom>
+        </p:spPr>
+        <p:style>
+          <a:lnRef idx="2">
+            <a:schemeClr val="dk1"/>
+          </a:lnRef>
+          <a:fillRef idx="1">
+            <a:schemeClr val="lt1"/>
+          </a:fillRef>
+          <a:effectRef idx="0">
+            <a:schemeClr val="dk1"/>
+          </a:effectRef>
+          <a:fontRef idx="minor">
+            <a:schemeClr val="dk1"/>
+          </a:fontRef>
+        </p:style>
+        <p:txBody>
+          <a:bodyPr rtlCol="0" anchor="ctr"/>
+          <a:lstStyle/>
+          <a:p>
+            <a:pPr algn="ctr"/>
+            <a:endParaRPr lang="en-US"/>
+          </a:p>
+        </p:txBody>
+      </p:sp>
+      <p:sp>
+        <p:nvSpPr>
+          <p:cNvPr id="31" name="TextBox 30">
+            <a:extLst>
+              <a:ext uri="{FF2B5EF4-FFF2-40B4-BE49-F238E27FC236}">
+                <a16:creationId xmlns:a16="http://schemas.microsoft.com/office/drawing/2014/main" id="{CDB5F56F-BEEE-762B-9C1A-0A2CA6FF544B}"/>
+              </a:ext>
+            </a:extLst>
+          </p:cNvPr>
+          <p:cNvSpPr txBox="1"/>
+          <p:nvPr/>
+        </p:nvSpPr>
+        <p:spPr>
+          <a:xfrm>
+            <a:off x="7271550" y="2437841"/>
+            <a:ext cx="287258" cy="338554"/>
+          </a:xfrm>
+          <a:prstGeom prst="rect">
+            <a:avLst/>
+          </a:prstGeom>
+          <a:noFill/>
+        </p:spPr>
+        <p:txBody>
+          <a:bodyPr wrap="none" rtlCol="0">
+            <a:spAutoFit/>
+          </a:bodyPr>
+          <a:lstStyle/>
+          <a:p>
+            <a:r>
+              <a:rPr lang="en-NL" sz="1600" i="1" dirty="0">
+                <a:solidFill>
+                  <a:srgbClr val="C00000"/>
+                </a:solidFill>
+              </a:rPr>
+              <a:t>a</a:t>
+            </a:r>
+          </a:p>
+        </p:txBody>
+      </p:sp>
+      <p:sp>
+        <p:nvSpPr>
+          <p:cNvPr id="33" name="TextBox 32">
+            <a:extLst>
+              <a:ext uri="{FF2B5EF4-FFF2-40B4-BE49-F238E27FC236}">
+                <a16:creationId xmlns:a16="http://schemas.microsoft.com/office/drawing/2014/main" id="{EB6C5777-CB51-33E9-14BA-977EAD5CFBC9}"/>
+              </a:ext>
+            </a:extLst>
+          </p:cNvPr>
+          <p:cNvSpPr txBox="1"/>
+          <p:nvPr/>
+        </p:nvSpPr>
+        <p:spPr>
+          <a:xfrm>
+            <a:off x="7833039" y="1707653"/>
+            <a:ext cx="276038" cy="338554"/>
+          </a:xfrm>
+          <a:prstGeom prst="rect">
+            <a:avLst/>
+          </a:prstGeom>
+          <a:noFill/>
+        </p:spPr>
+        <p:txBody>
+          <a:bodyPr wrap="none" rtlCol="0">
+            <a:spAutoFit/>
+          </a:bodyPr>
+          <a:lstStyle/>
+          <a:p>
+            <a:r>
+              <a:rPr lang="en-NL" sz="1600" i="1" dirty="0"/>
+              <a:t>c</a:t>
+            </a:r>
+          </a:p>
+        </p:txBody>
+      </p:sp>
+      <p:sp>
+        <p:nvSpPr>
+          <p:cNvPr id="36" name="TextBox 35">
+            <a:extLst>
+              <a:ext uri="{FF2B5EF4-FFF2-40B4-BE49-F238E27FC236}">
+                <a16:creationId xmlns:a16="http://schemas.microsoft.com/office/drawing/2014/main" id="{08016C77-1EA6-5580-9407-4597D85B8E5B}"/>
+              </a:ext>
+            </a:extLst>
+          </p:cNvPr>
+          <p:cNvSpPr txBox="1"/>
+          <p:nvPr/>
+        </p:nvSpPr>
+        <p:spPr>
+          <a:xfrm>
+            <a:off x="7971058" y="2925644"/>
+            <a:ext cx="287258" cy="338554"/>
+          </a:xfrm>
+          <a:prstGeom prst="rect">
+            <a:avLst/>
+          </a:prstGeom>
+          <a:noFill/>
+        </p:spPr>
+        <p:txBody>
+          <a:bodyPr wrap="none" rtlCol="0">
+            <a:spAutoFit/>
+          </a:bodyPr>
+          <a:lstStyle/>
+          <a:p>
+            <a:r>
+              <a:rPr lang="en-NL" sz="1600" i="1" dirty="0"/>
               <a:t>d</a:t>
             </a:r>
           </a:p>

--- a/slides/PV_ltl.pptx
+++ b/slides/PV_ltl.pptx
@@ -3639,7 +3639,7 @@
           <a:bodyPr/>
           <a:lstStyle/>
           <a:p>
-            <a:endParaRPr lang="nl-NL"/>
+            <a:endParaRPr lang="nl-NL" dirty="0"/>
           </a:p>
         </p:txBody>
       </p:sp>
@@ -47665,7 +47665,7 @@
                 <a:cs typeface="Arial" charset="0"/>
                 <a:sym typeface="Symbol"/>
               </a:rPr>
-              <a:t> turns out to be valid, then C will in the end fully constructed.</a:t>
+              <a:t> turns out to be valid, then C will in the end be fully constructed.</a:t>
             </a:r>
           </a:p>
           <a:p>
@@ -48180,7 +48180,7 @@
                 <a:cs typeface="Arial" charset="0"/>
                 <a:sym typeface="Symbol" pitchFamily="18" charset="2"/>
               </a:rPr>
-              <a:t>M</a:t>
+              <a:t>BM</a:t>
             </a:r>
             <a:r>
               <a:rPr lang="en-US" sz="2400" dirty="0">
@@ -48246,161 +48246,182 @@
               <a:t>  </a:t>
             </a:r>
             <a:r>
+              <a:rPr lang="en-US" sz="2400" i="1" dirty="0" err="1">
+                <a:cs typeface="Arial" charset="0"/>
+                <a:sym typeface="Symbol" pitchFamily="18" charset="2"/>
+              </a:rPr>
+              <a:t>next</a:t>
+            </a:r>
+            <a:r>
+              <a:rPr lang="en-US" sz="2400" baseline="-25000" dirty="0" err="1">
+                <a:cs typeface="Arial" charset="0"/>
+                <a:sym typeface="Symbol"/>
+              </a:rPr>
+              <a:t>B</a:t>
+            </a:r>
+            <a:r>
+              <a:rPr lang="en-US" sz="2400" baseline="-25000" dirty="0">
+                <a:cs typeface="Arial" charset="0"/>
+                <a:sym typeface="Symbol"/>
+              </a:rPr>
+              <a:t></a:t>
+            </a:r>
+            <a:r>
+              <a:rPr lang="en-US" sz="2400" dirty="0">
+                <a:cs typeface="Arial" charset="0"/>
+                <a:sym typeface="Symbol" pitchFamily="18" charset="2"/>
+              </a:rPr>
+              <a:t>(</a:t>
+            </a:r>
+            <a:r>
               <a:rPr lang="en-US" sz="2400" i="1" dirty="0">
                 <a:cs typeface="Arial" charset="0"/>
                 <a:sym typeface="Symbol" pitchFamily="18" charset="2"/>
               </a:rPr>
-              <a:t>next</a:t>
+              <a:t>u</a:t>
             </a:r>
             <a:r>
               <a:rPr lang="en-US" sz="2400" baseline="-25000" dirty="0">
                 <a:cs typeface="Arial" charset="0"/>
+                <a:sym typeface="Symbol" pitchFamily="18" charset="2"/>
+              </a:rPr>
+              <a:t>2</a:t>
+            </a:r>
+            <a:r>
+              <a:rPr lang="en-US" sz="2400" dirty="0">
+                <a:cs typeface="Arial" charset="0"/>
+                <a:sym typeface="Symbol" pitchFamily="18" charset="2"/>
+              </a:rPr>
+              <a:t>,</a:t>
+            </a:r>
+            <a:r>
+              <a:rPr lang="en-US" sz="2400" i="1" dirty="0">
+                <a:cs typeface="Arial" charset="0"/>
+                <a:sym typeface="Symbol" pitchFamily="18" charset="2"/>
+              </a:rPr>
+              <a:t>L</a:t>
+            </a:r>
+            <a:r>
+              <a:rPr lang="en-US" sz="2400" dirty="0">
+                <a:cs typeface="Arial" charset="0"/>
+                <a:sym typeface="Symbol" pitchFamily="18" charset="2"/>
+              </a:rPr>
+              <a:t>))</a:t>
+            </a:r>
+          </a:p>
+          <a:p>
+            <a:pPr eaLnBrk="1" hangingPunct="1"/>
+            <a:r>
+              <a:rPr lang="en-US" sz="2400" dirty="0">
+                <a:cs typeface="Arial" charset="0"/>
+                <a:sym typeface="Symbol" pitchFamily="18" charset="2"/>
+              </a:rPr>
+              <a:t>(</a:t>
+            </a:r>
+            <a:r>
+              <a:rPr lang="en-US" sz="2400" i="1" dirty="0">
+                <a:cs typeface="Arial" charset="0"/>
+                <a:sym typeface="Symbol" pitchFamily="18" charset="2"/>
+              </a:rPr>
+              <a:t>u</a:t>
+            </a:r>
+            <a:r>
+              <a:rPr lang="en-US" sz="2400" baseline="-25000" dirty="0">
+                <a:cs typeface="Arial" charset="0"/>
+                <a:sym typeface="Symbol" pitchFamily="18" charset="2"/>
+              </a:rPr>
+              <a:t>1</a:t>
+            </a:r>
+            <a:r>
+              <a:rPr lang="en-US" sz="2400" i="1" dirty="0">
+                <a:cs typeface="Arial" charset="0"/>
+                <a:sym typeface="Symbol" pitchFamily="18" charset="2"/>
+              </a:rPr>
+              <a:t>,u</a:t>
+            </a:r>
+            <a:r>
+              <a:rPr lang="en-US" sz="2400" baseline="-25000" dirty="0">
+                <a:cs typeface="Arial" charset="0"/>
+                <a:sym typeface="Symbol" pitchFamily="18" charset="2"/>
+              </a:rPr>
+              <a:t>2</a:t>
+            </a:r>
+            <a:r>
+              <a:rPr lang="en-US" sz="2400" dirty="0">
+                <a:cs typeface="Arial" charset="0"/>
+                <a:sym typeface="Symbol" pitchFamily="18" charset="2"/>
+              </a:rPr>
+              <a:t>)  </a:t>
+            </a:r>
+            <a:r>
+              <a:rPr lang="en-US" sz="2400" dirty="0" err="1">
+                <a:cs typeface="Arial" charset="0"/>
+                <a:sym typeface="Symbol" pitchFamily="18" charset="2"/>
+              </a:rPr>
+              <a:t>accept</a:t>
+            </a:r>
+            <a:r>
+              <a:rPr lang="en-US" sz="2400" i="1" baseline="-25000" dirty="0" err="1">
+                <a:cs typeface="Arial" charset="0"/>
+                <a:sym typeface="Symbol" pitchFamily="18" charset="2"/>
+              </a:rPr>
+              <a:t>BM</a:t>
+            </a:r>
+            <a:r>
+              <a:rPr lang="en-US" sz="2400" dirty="0">
+                <a:cs typeface="Arial" charset="0"/>
+                <a:sym typeface="Symbol" pitchFamily="18" charset="2"/>
+              </a:rPr>
+              <a:t>  </a:t>
+            </a:r>
+            <a:r>
+              <a:rPr lang="en-US" sz="2400" dirty="0">
+                <a:cs typeface="Arial" charset="0"/>
                 <a:sym typeface="Symbol"/>
               </a:rPr>
+              <a:t> </a:t>
+            </a:r>
+            <a:r>
+              <a:rPr lang="en-US" sz="2400" i="1" dirty="0">
+                <a:cs typeface="Arial" charset="0"/>
+                <a:sym typeface="Symbol" pitchFamily="18" charset="2"/>
+              </a:rPr>
+              <a:t> u</a:t>
+            </a:r>
+            <a:r>
+              <a:rPr lang="en-US" sz="2400" baseline="-25000" dirty="0">
+                <a:cs typeface="Arial" charset="0"/>
+                <a:sym typeface="Symbol" pitchFamily="18" charset="2"/>
+              </a:rPr>
+              <a:t>2</a:t>
+            </a:r>
+            <a:r>
+              <a:rPr lang="en-US" sz="2400" dirty="0">
+                <a:cs typeface="Arial" charset="0"/>
+                <a:sym typeface="Symbol" pitchFamily="18" charset="2"/>
+              </a:rPr>
+              <a:t>  </a:t>
+            </a:r>
+            <a:r>
+              <a:rPr lang="en-US" sz="2400" dirty="0" err="1">
+                <a:cs typeface="Arial" charset="0"/>
+                <a:sym typeface="Symbol" pitchFamily="18" charset="2"/>
+              </a:rPr>
+              <a:t>accept</a:t>
+            </a:r>
+            <a:r>
+              <a:rPr lang="en-US" sz="2400" baseline="-25000" dirty="0" err="1">
+                <a:cs typeface="Arial" charset="0"/>
+                <a:sym typeface="Symbol"/>
+              </a:rPr>
+              <a:t>B</a:t>
+            </a:r>
+            <a:r>
+              <a:rPr lang="en-US" sz="2400" baseline="-25000" dirty="0">
+                <a:cs typeface="Arial" charset="0"/>
+                <a:sym typeface="Symbol"/>
+              </a:rPr>
               <a:t></a:t>
-            </a:r>
-            <a:r>
-              <a:rPr lang="en-US" sz="2400" dirty="0">
-                <a:cs typeface="Arial" charset="0"/>
-                <a:sym typeface="Symbol" pitchFamily="18" charset="2"/>
-              </a:rPr>
-              <a:t>(</a:t>
-            </a:r>
-            <a:r>
-              <a:rPr lang="en-US" sz="2400" i="1" dirty="0">
-                <a:cs typeface="Arial" charset="0"/>
-                <a:sym typeface="Symbol" pitchFamily="18" charset="2"/>
-              </a:rPr>
-              <a:t>u</a:t>
-            </a:r>
-            <a:r>
-              <a:rPr lang="en-US" sz="2400" baseline="-25000" dirty="0">
-                <a:cs typeface="Arial" charset="0"/>
-                <a:sym typeface="Symbol" pitchFamily="18" charset="2"/>
-              </a:rPr>
-              <a:t>2</a:t>
-            </a:r>
-            <a:r>
-              <a:rPr lang="en-US" sz="2400" dirty="0">
-                <a:cs typeface="Arial" charset="0"/>
-                <a:sym typeface="Symbol" pitchFamily="18" charset="2"/>
-              </a:rPr>
-              <a:t>,</a:t>
-            </a:r>
-            <a:r>
-              <a:rPr lang="en-US" sz="2400" i="1" dirty="0">
-                <a:cs typeface="Arial" charset="0"/>
-                <a:sym typeface="Symbol" pitchFamily="18" charset="2"/>
-              </a:rPr>
-              <a:t>L</a:t>
-            </a:r>
-            <a:r>
-              <a:rPr lang="en-US" sz="2400" dirty="0">
-                <a:cs typeface="Arial" charset="0"/>
-                <a:sym typeface="Symbol" pitchFamily="18" charset="2"/>
-              </a:rPr>
-              <a:t>))</a:t>
-            </a:r>
-          </a:p>
-          <a:p>
-            <a:pPr eaLnBrk="1" hangingPunct="1"/>
-            <a:r>
-              <a:rPr lang="en-US" sz="2400" dirty="0">
-                <a:cs typeface="Arial" charset="0"/>
-                <a:sym typeface="Symbol" pitchFamily="18" charset="2"/>
-              </a:rPr>
-              <a:t>(</a:t>
-            </a:r>
-            <a:r>
-              <a:rPr lang="en-US" sz="2400" i="1" dirty="0">
-                <a:cs typeface="Arial" charset="0"/>
-                <a:sym typeface="Symbol" pitchFamily="18" charset="2"/>
-              </a:rPr>
-              <a:t>u</a:t>
-            </a:r>
-            <a:r>
-              <a:rPr lang="en-US" sz="2400" baseline="-25000" dirty="0">
-                <a:cs typeface="Arial" charset="0"/>
-                <a:sym typeface="Symbol" pitchFamily="18" charset="2"/>
-              </a:rPr>
-              <a:t>1</a:t>
-            </a:r>
-            <a:r>
-              <a:rPr lang="en-US" sz="2400" i="1" dirty="0">
-                <a:cs typeface="Arial" charset="0"/>
-                <a:sym typeface="Symbol" pitchFamily="18" charset="2"/>
-              </a:rPr>
-              <a:t>,u</a:t>
-            </a:r>
-            <a:r>
-              <a:rPr lang="en-US" sz="2400" baseline="-25000" dirty="0">
-                <a:cs typeface="Arial" charset="0"/>
-                <a:sym typeface="Symbol" pitchFamily="18" charset="2"/>
-              </a:rPr>
-              <a:t>2</a:t>
-            </a:r>
-            <a:r>
-              <a:rPr lang="en-US" sz="2400" dirty="0">
-                <a:cs typeface="Arial" charset="0"/>
-                <a:sym typeface="Symbol" pitchFamily="18" charset="2"/>
-              </a:rPr>
-              <a:t>)  </a:t>
-            </a:r>
-            <a:r>
-              <a:rPr lang="en-US" sz="2400" dirty="0" err="1">
-                <a:cs typeface="Arial" charset="0"/>
-                <a:sym typeface="Symbol" pitchFamily="18" charset="2"/>
-              </a:rPr>
-              <a:t>accept</a:t>
-            </a:r>
-            <a:r>
-              <a:rPr lang="en-US" sz="2400" i="1" baseline="-25000" dirty="0" err="1">
-                <a:cs typeface="Arial" charset="0"/>
-                <a:sym typeface="Symbol" pitchFamily="18" charset="2"/>
-              </a:rPr>
-              <a:t>C</a:t>
-            </a:r>
-            <a:r>
-              <a:rPr lang="en-US" sz="2400" dirty="0">
-                <a:cs typeface="Arial" charset="0"/>
-                <a:sym typeface="Symbol" pitchFamily="18" charset="2"/>
-              </a:rPr>
-              <a:t>  </a:t>
-            </a:r>
-            <a:r>
-              <a:rPr lang="en-US" sz="2400" dirty="0">
-                <a:cs typeface="Arial" charset="0"/>
-                <a:sym typeface="Symbol"/>
-              </a:rPr>
-              <a:t> </a:t>
-            </a:r>
-            <a:r>
-              <a:rPr lang="en-US" sz="2400" i="1" dirty="0">
-                <a:cs typeface="Arial" charset="0"/>
-                <a:sym typeface="Symbol" pitchFamily="18" charset="2"/>
-              </a:rPr>
-              <a:t> u</a:t>
-            </a:r>
-            <a:r>
-              <a:rPr lang="en-US" sz="2400" baseline="-25000" dirty="0">
-                <a:cs typeface="Arial" charset="0"/>
-                <a:sym typeface="Symbol" pitchFamily="18" charset="2"/>
-              </a:rPr>
-              <a:t>2</a:t>
-            </a:r>
-            <a:r>
-              <a:rPr lang="en-US" sz="2400" dirty="0">
-                <a:cs typeface="Arial" charset="0"/>
-                <a:sym typeface="Symbol" pitchFamily="18" charset="2"/>
-              </a:rPr>
-              <a:t>  accept</a:t>
-            </a:r>
-            <a:r>
-              <a:rPr lang="en-US" sz="2400" baseline="-25000" dirty="0">
-                <a:cs typeface="Arial" charset="0"/>
-                <a:sym typeface="Symbol"/>
-              </a:rPr>
-              <a:t> </a:t>
             </a:r>
             <a:r>
               <a:rPr lang="en-US" sz="2400" dirty="0">
